--- a/_slides/remanies/14. FX1_slides.pptx
+++ b/_slides/remanies/14. FX1_slides.pptx
@@ -5,10 +5,10 @@
     <p:sldMasterId id="2147483660" r:id="rId1"/>
   </p:sldMasterIdLst>
   <p:notesMasterIdLst>
-    <p:notesMasterId r:id="rId35"/>
+    <p:notesMasterId r:id="rId38"/>
   </p:notesMasterIdLst>
   <p:handoutMasterIdLst>
-    <p:handoutMasterId r:id="rId36"/>
+    <p:handoutMasterId r:id="rId39"/>
   </p:handoutMasterIdLst>
   <p:sldIdLst>
     <p:sldId id="568" r:id="rId2"/>
@@ -40,10 +40,13 @@
     <p:sldId id="592" r:id="rId28"/>
     <p:sldId id="593" r:id="rId29"/>
     <p:sldId id="594" r:id="rId30"/>
-    <p:sldId id="595" r:id="rId31"/>
-    <p:sldId id="596" r:id="rId32"/>
-    <p:sldId id="597" r:id="rId33"/>
-    <p:sldId id="598" r:id="rId34"/>
+    <p:sldId id="602" r:id="rId31"/>
+    <p:sldId id="601" r:id="rId32"/>
+    <p:sldId id="603" r:id="rId33"/>
+    <p:sldId id="595" r:id="rId34"/>
+    <p:sldId id="596" r:id="rId35"/>
+    <p:sldId id="597" r:id="rId36"/>
+    <p:sldId id="598" r:id="rId37"/>
   </p:sldIdLst>
   <p:sldSz cx="12192000" cy="6858000"/>
   <p:notesSz cx="6858000" cy="9144000"/>
@@ -196,6 +199,9 @@
             <p14:sldId id="592"/>
             <p14:sldId id="593"/>
             <p14:sldId id="594"/>
+            <p14:sldId id="602"/>
+            <p14:sldId id="601"/>
+            <p14:sldId id="603"/>
             <p14:sldId id="595"/>
             <p14:sldId id="596"/>
             <p14:sldId id="597"/>
@@ -3255,44 +3261,14 @@
           <a:lstStyle/>
           <a:p>
             <a:r>
-              <a:t>Filtre et gestionnaire sont le même type d'objet, un </a:t>
-            </a:r>
-            <a:r>
-              <a:rPr>
-                <a:latin typeface="Consolas"/>
-              </a:rPr>
-              <a:t>EventHandler</a:t>
-            </a:r>
-            <a:r>
-              <a:t>. Ce qui les distingue, c'est le moment où on les appelle : un filtre pendant la descente, un gestionnaire pendant la remontée. C'est pour cela qu'ils portent deux noms, et qu'on les ajoute par deux méthodes différentes.</a:t>
-            </a:r>
-          </a:p>
-          <a:p>
-            <a:r>
-              <a:t>Dans la démonstration, le filtre du conteneur s'affichait avant les gestionnaires du cercle. Ce n'était pas une question d'ordre d'écriture : le conteneur est traversé à la descente, avant que l'événement n'atteigne le cercle.</a:t>
-            </a:r>
-          </a:p>
-          <a:p>
-            <a:r>
-              <a:t>Les raccourcis </a:t>
-            </a:r>
-            <a:r>
-              <a:rPr>
-                <a:latin typeface="Consolas"/>
-              </a:rPr>
-              <a:t>setOnAction</a:t>
-            </a:r>
-            <a:r>
-              <a:t> ou </a:t>
-            </a:r>
-            <a:r>
-              <a:rPr>
-                <a:latin typeface="Consolas"/>
-              </a:rPr>
-              <a:t>setOnMouseClicked</a:t>
-            </a:r>
-            <a:r>
-              <a:t> posent tous des gestionnaires. Presque tout le code JavaFX en reste là. Un filtre se justifie quand un conteneur doit voir un événement avant ses enfants, et parfois les en priver. C'est le sujet de la slide suivante.</a:t>
+              <a:rPr lang="fr-BE" dirty="0"/>
+              <a:t>L'animation montre ce que fait un gestionnaire enregistré par addEventHandler. On clique sur le cercle : l'événement part de lui, la cible, et remonte le chemin vers la fenêtre, nœud par nœud. Chaque nœud traversé qui porte un gestionnaire pour ce type d'événement le déclenche au passage.</a:t>
+            </a:r>
+          </a:p>
+          <a:p>
+            <a:r>
+              <a:rPr lang="fr-BE" dirty="0"/>
+              <a:t>Ici, deux gestionnaires sont attachés au même nœud : ils sont appelés tous les deux, l'un après l'autre. C'est la phase de remontée, qu'on appelle le bouillonnement : l'image de la bulle qui remonte à la surface.</a:t>
             </a:r>
           </a:p>
         </p:txBody>
@@ -3362,35 +3338,20 @@
           <a:lstStyle/>
           <a:p>
             <a:r>
-              <a:t>Un filtre qui consomme l'événement l'arrête dans sa descente : la cible et tout ce qui suit ne le verront jamais. C'est ce qu'a fait la case à cocher de la démonstration. On s'en sert pour bloquer une saisie, ou pour qu'un panneau verrouillé ignore les clics qui lui sont destinés, sans toucher au code de ses enfants.</a:t>
-            </a:r>
-          </a:p>
-          <a:p>
-            <a:r>
-              <a:t>Vous connaissez maintenant deux façons de rendre un composant sourd. On peut retirer son gestionnaire, par </a:t>
-            </a:r>
-            <a:r>
-              <a:rPr>
-                <a:latin typeface="Consolas"/>
-              </a:rPr>
-              <a:t>removeEventHandler</a:t>
-            </a:r>
-            <a:r>
-              <a:t>, ou laisser le gestionnaire en place et intercepter l'événement plus haut, par un filtre. La première agit sur un composant, la seconde sur tout ce qu'un conteneur contient.</a:t>
-            </a:r>
-          </a:p>
-          <a:p>
-            <a:r>
-              <a:t>La dernière ligne de la slide est une nuance. </a:t>
-            </a:r>
-            <a:r>
-              <a:rPr>
-                <a:latin typeface="Consolas"/>
-              </a:rPr>
-              <a:t>consume</a:t>
-            </a:r>
-            <a:r>
-              <a:t> arrête le voyage d'un nœud au suivant ; il n'empêche pas les autres gestionnaires posés sur le même nœud de s'exécuter.</a:t>
+              <a:rPr lang="fr-BE" dirty="0"/>
+              <a:t>L'événement ne part pas directement de la cible. JavaFX trace d'abord le chemin, de la fenêtre jusqu'au nœud visé, puis le fait parcourir deux fois.</a:t>
+            </a:r>
+          </a:p>
+          <a:p>
+            <a:r>
+              <a:rPr lang="fr-BE" dirty="0"/>
+              <a:t>Première phase, la capture : l'événement descend du Stage vers la cible, en passant par la scène et chaque conteneur. Seconde phase, le bouillonnement : il remonte le même chemin, de la cible vers le Stage. L'animation montre ce trajet en U.</a:t>
+            </a:r>
+          </a:p>
+          <a:p>
+            <a:r>
+              <a:rPr lang="fr-BE" dirty="0"/>
+              <a:t>Les deux phases existent pour tout événement. Ce qui change, c'est qui écoute à quel moment : c'est l'objet de la slide suivante.</a:t>
             </a:r>
           </a:p>
         </p:txBody>
@@ -3460,18 +3421,20 @@
           <a:lstStyle/>
           <a:p>
             <a:r>
-              <a:rPr>
-                <a:latin typeface="Consolas"/>
-              </a:rPr>
-              <a:t>FX.5</a:t>
-            </a:r>
-            <a:r>
-              <a:t> fait construire ce que la démonstration a montré, avec un empilement de quatre niveaux : vous verrez le filtre, puis les gestionnaires, et vous constaterez ce qu'un clic à côté du cercle déclenche.</a:t>
-            </a:r>
-          </a:p>
-          <a:p>
-            <a:r>
-              <a:t>La seconde partie tient en une ligne. Ne la cherchez pas dans le cercle.</a:t>
+              <a:rPr lang="fr-BE" dirty="0"/>
+              <a:t>Deux sortes d'objets peuvent réagir sur ce trajet. Les filtres, enregistrés par addEventFilter, sont appelés pendant la descente. Les gestionnaires, enregistrés par addEventHandler ou par les raccourcis setOnAction et setOnMouseClicked, sont appelés pendant la remontée.</a:t>
+            </a:r>
+          </a:p>
+          <a:p>
+            <a:r>
+              <a:rPr lang="fr-BE" dirty="0"/>
+              <a:t>Un filtre posé sur un conteneur voit donc passer l'événement avant ses enfants, et avant la cible. C'est ce qui lui permet de l'intercepter, par consume, avant qu'il n'arrive : la slide consume() le montre.</a:t>
+            </a:r>
+          </a:p>
+          <a:p>
+            <a:r>
+              <a:rPr lang="fr-BE" dirty="0"/>
+              <a:t>Dans la quasi-totalité des cas, un gestionnaire suffit. Le filtre sert quand un conteneur doit surveiller ou bloquer ce qui arrive à tous ses enfants.</a:t>
             </a:r>
           </a:p>
         </p:txBody>
@@ -3497,6 +3460,292 @@
 </file>
 
 <file path=ppt/notesSlides/notesSlide33.xml><?xml version="1.0" encoding="utf-8"?>
+<p:notes xmlns:a="http://schemas.openxmlformats.org/drawingml/2006/main" xmlns:r="http://schemas.openxmlformats.org/officeDocument/2006/relationships" xmlns:p="http://schemas.openxmlformats.org/presentationml/2006/main">
+  <p:cSld>
+    <p:spTree>
+      <p:nvGrpSpPr>
+        <p:cNvPr id="1" name=""/>
+        <p:cNvGrpSpPr/>
+        <p:nvPr/>
+      </p:nvGrpSpPr>
+      <p:grpSpPr>
+        <a:xfrm>
+          <a:off x="0" y="0"/>
+          <a:ext cx="0" cy="0"/>
+          <a:chOff x="0" y="0"/>
+          <a:chExt cx="0" cy="0"/>
+        </a:xfrm>
+      </p:grpSpPr>
+      <p:sp>
+        <p:nvSpPr>
+          <p:cNvPr id="2" name="Slide Image Placeholder 1"/>
+          <p:cNvSpPr>
+            <a:spLocks noGrp="1" noRot="1" noChangeAspect="1"/>
+          </p:cNvSpPr>
+          <p:nvPr>
+            <p:ph type="sldImg" idx="2"/>
+          </p:nvPr>
+        </p:nvSpPr>
+        <p:spPr/>
+      </p:sp>
+      <p:sp>
+        <p:nvSpPr>
+          <p:cNvPr id="3" name="Notes Placeholder 2"/>
+          <p:cNvSpPr>
+            <a:spLocks noGrp="1"/>
+          </p:cNvSpPr>
+          <p:nvPr>
+            <p:ph type="body" sz="quarter" idx="3"/>
+          </p:nvPr>
+        </p:nvSpPr>
+        <p:spPr/>
+        <p:txBody>
+          <a:bodyPr/>
+          <a:lstStyle/>
+          <a:p>
+            <a:r>
+              <a:t>Filtre et gestionnaire sont le même type d'objet, un </a:t>
+            </a:r>
+            <a:r>
+              <a:rPr>
+                <a:latin typeface="Consolas"/>
+              </a:rPr>
+              <a:t>EventHandler</a:t>
+            </a:r>
+            <a:r>
+              <a:t>. Ce qui les distingue, c'est le moment où on les appelle : un filtre pendant la descente, un gestionnaire pendant la remontée. C'est pour cela qu'ils portent deux noms, et qu'on les ajoute par deux méthodes différentes.</a:t>
+            </a:r>
+          </a:p>
+          <a:p>
+            <a:r>
+              <a:t>Dans la démonstration, le filtre du conteneur s'affichait avant les gestionnaires du cercle. Ce n'était pas une question d'ordre d'écriture : le conteneur est traversé à la descente, avant que l'événement n'atteigne le cercle.</a:t>
+            </a:r>
+          </a:p>
+          <a:p>
+            <a:r>
+              <a:t>Les raccourcis </a:t>
+            </a:r>
+            <a:r>
+              <a:rPr>
+                <a:latin typeface="Consolas"/>
+              </a:rPr>
+              <a:t>setOnAction</a:t>
+            </a:r>
+            <a:r>
+              <a:t> ou </a:t>
+            </a:r>
+            <a:r>
+              <a:rPr>
+                <a:latin typeface="Consolas"/>
+              </a:rPr>
+              <a:t>setOnMouseClicked</a:t>
+            </a:r>
+            <a:r>
+              <a:t> posent tous des gestionnaires. Presque tout le code JavaFX en reste là. Un filtre se justifie quand un conteneur doit voir un événement avant ses enfants, et parfois les en priver. C'est le sujet de la slide suivante.</a:t>
+            </a:r>
+          </a:p>
+        </p:txBody>
+      </p:sp>
+      <p:sp>
+        <p:nvSpPr>
+          <p:cNvPr id="4" name="Slide Number Placeholder 3"/>
+          <p:cNvSpPr>
+            <a:spLocks noGrp="1"/>
+          </p:cNvSpPr>
+          <p:nvPr>
+            <p:ph type="sldNum" sz="quarter" idx="5"/>
+          </p:nvPr>
+        </p:nvSpPr>
+        <p:spPr/>
+      </p:sp>
+    </p:spTree>
+  </p:cSld>
+  <p:clrMapOvr>
+    <a:masterClrMapping/>
+  </p:clrMapOvr>
+</p:notes>
+</file>
+
+<file path=ppt/notesSlides/notesSlide34.xml><?xml version="1.0" encoding="utf-8"?>
+<p:notes xmlns:a="http://schemas.openxmlformats.org/drawingml/2006/main" xmlns:r="http://schemas.openxmlformats.org/officeDocument/2006/relationships" xmlns:p="http://schemas.openxmlformats.org/presentationml/2006/main">
+  <p:cSld>
+    <p:spTree>
+      <p:nvGrpSpPr>
+        <p:cNvPr id="1" name=""/>
+        <p:cNvGrpSpPr/>
+        <p:nvPr/>
+      </p:nvGrpSpPr>
+      <p:grpSpPr>
+        <a:xfrm>
+          <a:off x="0" y="0"/>
+          <a:ext cx="0" cy="0"/>
+          <a:chOff x="0" y="0"/>
+          <a:chExt cx="0" cy="0"/>
+        </a:xfrm>
+      </p:grpSpPr>
+      <p:sp>
+        <p:nvSpPr>
+          <p:cNvPr id="2" name="Slide Image Placeholder 1"/>
+          <p:cNvSpPr>
+            <a:spLocks noGrp="1" noRot="1" noChangeAspect="1"/>
+          </p:cNvSpPr>
+          <p:nvPr>
+            <p:ph type="sldImg" idx="2"/>
+          </p:nvPr>
+        </p:nvSpPr>
+        <p:spPr/>
+      </p:sp>
+      <p:sp>
+        <p:nvSpPr>
+          <p:cNvPr id="3" name="Notes Placeholder 2"/>
+          <p:cNvSpPr>
+            <a:spLocks noGrp="1"/>
+          </p:cNvSpPr>
+          <p:nvPr>
+            <p:ph type="body" sz="quarter" idx="3"/>
+          </p:nvPr>
+        </p:nvSpPr>
+        <p:spPr/>
+        <p:txBody>
+          <a:bodyPr/>
+          <a:lstStyle/>
+          <a:p>
+            <a:r>
+              <a:t>Un filtre qui consomme l'événement l'arrête dans sa descente : la cible et tout ce qui suit ne le verront jamais. C'est ce qu'a fait la case à cocher de la démonstration. On s'en sert pour bloquer une saisie, ou pour qu'un panneau verrouillé ignore les clics qui lui sont destinés, sans toucher au code de ses enfants.</a:t>
+            </a:r>
+          </a:p>
+          <a:p>
+            <a:r>
+              <a:t>Vous connaissez maintenant deux façons de rendre un composant sourd. On peut retirer son gestionnaire, par </a:t>
+            </a:r>
+            <a:r>
+              <a:rPr>
+                <a:latin typeface="Consolas"/>
+              </a:rPr>
+              <a:t>removeEventHandler</a:t>
+            </a:r>
+            <a:r>
+              <a:t>, ou laisser le gestionnaire en place et intercepter l'événement plus haut, par un filtre. La première agit sur un composant, la seconde sur tout ce qu'un conteneur contient.</a:t>
+            </a:r>
+          </a:p>
+          <a:p>
+            <a:r>
+              <a:t>La dernière ligne de la slide est une nuance. </a:t>
+            </a:r>
+            <a:r>
+              <a:rPr>
+                <a:latin typeface="Consolas"/>
+              </a:rPr>
+              <a:t>consume</a:t>
+            </a:r>
+            <a:r>
+              <a:t> arrête le voyage d'un nœud au suivant ; il n'empêche pas les autres gestionnaires posés sur le même nœud de s'exécuter.</a:t>
+            </a:r>
+          </a:p>
+        </p:txBody>
+      </p:sp>
+      <p:sp>
+        <p:nvSpPr>
+          <p:cNvPr id="4" name="Slide Number Placeholder 3"/>
+          <p:cNvSpPr>
+            <a:spLocks noGrp="1"/>
+          </p:cNvSpPr>
+          <p:nvPr>
+            <p:ph type="sldNum" sz="quarter" idx="5"/>
+          </p:nvPr>
+        </p:nvSpPr>
+        <p:spPr/>
+      </p:sp>
+    </p:spTree>
+  </p:cSld>
+  <p:clrMapOvr>
+    <a:masterClrMapping/>
+  </p:clrMapOvr>
+</p:notes>
+</file>
+
+<file path=ppt/notesSlides/notesSlide35.xml><?xml version="1.0" encoding="utf-8"?>
+<p:notes xmlns:a="http://schemas.openxmlformats.org/drawingml/2006/main" xmlns:r="http://schemas.openxmlformats.org/officeDocument/2006/relationships" xmlns:p="http://schemas.openxmlformats.org/presentationml/2006/main">
+  <p:cSld>
+    <p:spTree>
+      <p:nvGrpSpPr>
+        <p:cNvPr id="1" name=""/>
+        <p:cNvGrpSpPr/>
+        <p:nvPr/>
+      </p:nvGrpSpPr>
+      <p:grpSpPr>
+        <a:xfrm>
+          <a:off x="0" y="0"/>
+          <a:ext cx="0" cy="0"/>
+          <a:chOff x="0" y="0"/>
+          <a:chExt cx="0" cy="0"/>
+        </a:xfrm>
+      </p:grpSpPr>
+      <p:sp>
+        <p:nvSpPr>
+          <p:cNvPr id="2" name="Slide Image Placeholder 1"/>
+          <p:cNvSpPr>
+            <a:spLocks noGrp="1" noRot="1" noChangeAspect="1"/>
+          </p:cNvSpPr>
+          <p:nvPr>
+            <p:ph type="sldImg" idx="2"/>
+          </p:nvPr>
+        </p:nvSpPr>
+        <p:spPr/>
+      </p:sp>
+      <p:sp>
+        <p:nvSpPr>
+          <p:cNvPr id="3" name="Notes Placeholder 2"/>
+          <p:cNvSpPr>
+            <a:spLocks noGrp="1"/>
+          </p:cNvSpPr>
+          <p:nvPr>
+            <p:ph type="body" sz="quarter" idx="3"/>
+          </p:nvPr>
+        </p:nvSpPr>
+        <p:spPr/>
+        <p:txBody>
+          <a:bodyPr/>
+          <a:lstStyle/>
+          <a:p>
+            <a:r>
+              <a:rPr>
+                <a:latin typeface="Consolas"/>
+              </a:rPr>
+              <a:t>FX.5</a:t>
+            </a:r>
+            <a:r>
+              <a:t> fait construire ce que la démonstration a montré, avec un empilement de quatre niveaux : vous verrez le filtre, puis les gestionnaires, et vous constaterez ce qu'un clic à côté du cercle déclenche.</a:t>
+            </a:r>
+          </a:p>
+          <a:p>
+            <a:r>
+              <a:t>La seconde partie tient en une ligne. Ne la cherchez pas dans le cercle.</a:t>
+            </a:r>
+          </a:p>
+        </p:txBody>
+      </p:sp>
+      <p:sp>
+        <p:nvSpPr>
+          <p:cNvPr id="4" name="Slide Number Placeholder 3"/>
+          <p:cNvSpPr>
+            <a:spLocks noGrp="1"/>
+          </p:cNvSpPr>
+          <p:nvPr>
+            <p:ph type="sldNum" sz="quarter" idx="5"/>
+          </p:nvPr>
+        </p:nvSpPr>
+        <p:spPr/>
+      </p:sp>
+    </p:spTree>
+  </p:cSld>
+  <p:clrMapOvr>
+    <a:masterClrMapping/>
+  </p:clrMapOvr>
+</p:notes>
+</file>
+
+<file path=ppt/notesSlides/notesSlide36.xml><?xml version="1.0" encoding="utf-8"?>
 <p:notes xmlns:a="http://schemas.openxmlformats.org/drawingml/2006/main" xmlns:r="http://schemas.openxmlformats.org/officeDocument/2006/relationships" xmlns:p="http://schemas.openxmlformats.org/presentationml/2006/main">
   <p:cSld>
     <p:spTree>
@@ -20653,6 +20902,8689 @@
       </p:grpSpPr>
       <p:sp>
         <p:nvSpPr>
+          <p:cNvPr id="2" name="Titre 1">
+            <a:extLst>
+              <a:ext uri="{FF2B5EF4-FFF2-40B4-BE49-F238E27FC236}">
+                <a16:creationId xmlns:a16="http://schemas.microsoft.com/office/drawing/2014/main" id="{83DE6083-8256-154A-B26F-2269D186C987}"/>
+              </a:ext>
+            </a:extLst>
+          </p:cNvPr>
+          <p:cNvSpPr>
+            <a:spLocks noGrp="1"/>
+          </p:cNvSpPr>
+          <p:nvPr>
+            <p:ph type="title"/>
+          </p:nvPr>
+        </p:nvSpPr>
+        <p:spPr>
+          <a:xfrm>
+            <a:off x="838200" y="358303"/>
+            <a:ext cx="10515600" cy="1325563"/>
+          </a:xfrm>
+        </p:spPr>
+        <p:txBody>
+          <a:bodyPr/>
+          <a:lstStyle/>
+          <a:p>
+            <a:r>
+              <a:rPr lang="fr-FR" dirty="0"/>
+              <a:t>La propagation des événements</a:t>
+            </a:r>
+          </a:p>
+        </p:txBody>
+      </p:sp>
+      <p:sp>
+        <p:nvSpPr>
+          <p:cNvPr id="3" name="Rectangle 2">
+            <a:extLst>
+              <a:ext uri="{FF2B5EF4-FFF2-40B4-BE49-F238E27FC236}">
+                <a16:creationId xmlns:a16="http://schemas.microsoft.com/office/drawing/2014/main" id="{790C4C52-7F42-2E4E-A436-82763CA856C4}"/>
+              </a:ext>
+            </a:extLst>
+          </p:cNvPr>
+          <p:cNvSpPr/>
+          <p:nvPr/>
+        </p:nvSpPr>
+        <p:spPr>
+          <a:xfrm>
+            <a:off x="841248" y="5870448"/>
+            <a:ext cx="5486400" cy="274320"/>
+          </a:xfrm>
+          <a:prstGeom prst="rect">
+            <a:avLst/>
+          </a:prstGeom>
+        </p:spPr>
+        <p:txBody>
+          <a:bodyPr wrap="square">
+            <a:spAutoFit/>
+          </a:bodyPr>
+          <a:lstStyle/>
+          <a:p>
+            <a:r>
+              <a:rPr lang="fr-FR" sz="1100" i="1" dirty="0"/>
+              <a:t>Source : </a:t>
+            </a:r>
+            <a:r>
+              <a:rPr sz="1100">
+                <a:hlinkClick r:id="rId3"/>
+              </a:rPr>
+              <a:t>Stack Overflow, question 25740103</a:t>
+            </a:r>
+            <a:endParaRPr lang="fr-FR" sz="1200" i="1" dirty="0"/>
+          </a:p>
+        </p:txBody>
+      </p:sp>
+      <p:grpSp>
+        <p:nvGrpSpPr>
+          <p:cNvPr id="13" name="Groupe 12">
+            <a:extLst>
+              <a:ext uri="{FF2B5EF4-FFF2-40B4-BE49-F238E27FC236}">
+                <a16:creationId xmlns:a16="http://schemas.microsoft.com/office/drawing/2014/main" id="{73E26F97-7D94-2143-B907-8C837FC3BD12}"/>
+              </a:ext>
+            </a:extLst>
+          </p:cNvPr>
+          <p:cNvGrpSpPr/>
+          <p:nvPr/>
+        </p:nvGrpSpPr>
+        <p:grpSpPr>
+          <a:xfrm>
+            <a:off x="3603171" y="1759076"/>
+            <a:ext cx="4005944" cy="3151241"/>
+            <a:chOff x="1665513" y="1772829"/>
+            <a:chExt cx="5018314" cy="3947613"/>
+          </a:xfrm>
+        </p:grpSpPr>
+        <p:sp>
+          <p:nvSpPr>
+            <p:cNvPr id="7" name="Rectangle : coins arrondis 6">
+              <a:extLst>
+                <a:ext uri="{FF2B5EF4-FFF2-40B4-BE49-F238E27FC236}">
+                  <a16:creationId xmlns:a16="http://schemas.microsoft.com/office/drawing/2014/main" id="{C164CF95-3D0A-8A47-BFBE-C85F0D5C7FB6}"/>
+                </a:ext>
+              </a:extLst>
+            </p:cNvPr>
+            <p:cNvSpPr/>
+            <p:nvPr/>
+          </p:nvSpPr>
+          <p:spPr>
+            <a:xfrm>
+              <a:off x="3287485" y="1772829"/>
+              <a:ext cx="1828800" cy="458742"/>
+            </a:xfrm>
+            <a:prstGeom prst="roundRect">
+              <a:avLst/>
+            </a:prstGeom>
+          </p:spPr>
+          <p:style>
+            <a:lnRef idx="2">
+              <a:schemeClr val="accent1">
+                <a:shade val="50000"/>
+              </a:schemeClr>
+            </a:lnRef>
+            <a:fillRef idx="1">
+              <a:schemeClr val="accent1"/>
+            </a:fillRef>
+            <a:effectRef idx="0">
+              <a:schemeClr val="accent1"/>
+            </a:effectRef>
+            <a:fontRef idx="minor">
+              <a:schemeClr val="lt1"/>
+            </a:fontRef>
+          </p:style>
+          <p:txBody>
+            <a:bodyPr rtlCol="0" anchor="ctr"/>
+            <a:lstStyle/>
+            <a:p>
+              <a:pPr algn="ctr"/>
+              <a:r>
+                <a:rPr lang="fr-FR" sz="1600" dirty="0">
+                  <a:latin typeface="Consolas" panose="020B0609020204030204" pitchFamily="49" charset="0"/>
+                  <a:cs typeface="Consolas" panose="020B0609020204030204" pitchFamily="49" charset="0"/>
+                </a:rPr>
+                <a:t>Stage</a:t>
+              </a:r>
+            </a:p>
+          </p:txBody>
+        </p:sp>
+        <p:sp>
+          <p:nvSpPr>
+            <p:cNvPr id="8" name="Rectangle : coins arrondis 7">
+              <a:extLst>
+                <a:ext uri="{FF2B5EF4-FFF2-40B4-BE49-F238E27FC236}">
+                  <a16:creationId xmlns:a16="http://schemas.microsoft.com/office/drawing/2014/main" id="{491234DF-841B-7F4F-A6FC-A0BFED02FBC3}"/>
+                </a:ext>
+              </a:extLst>
+            </p:cNvPr>
+            <p:cNvSpPr/>
+            <p:nvPr/>
+          </p:nvSpPr>
+          <p:spPr>
+            <a:xfrm>
+              <a:off x="3287485" y="2645047"/>
+              <a:ext cx="1828800" cy="458742"/>
+            </a:xfrm>
+            <a:prstGeom prst="roundRect">
+              <a:avLst/>
+            </a:prstGeom>
+          </p:spPr>
+          <p:style>
+            <a:lnRef idx="2">
+              <a:schemeClr val="accent1">
+                <a:shade val="50000"/>
+              </a:schemeClr>
+            </a:lnRef>
+            <a:fillRef idx="1">
+              <a:schemeClr val="accent1"/>
+            </a:fillRef>
+            <a:effectRef idx="0">
+              <a:schemeClr val="accent1"/>
+            </a:effectRef>
+            <a:fontRef idx="minor">
+              <a:schemeClr val="lt1"/>
+            </a:fontRef>
+          </p:style>
+          <p:txBody>
+            <a:bodyPr rtlCol="0" anchor="ctr"/>
+            <a:lstStyle/>
+            <a:p>
+              <a:pPr algn="ctr"/>
+              <a:r>
+                <a:rPr lang="fr-FR" sz="1600" dirty="0" err="1">
+                  <a:latin typeface="Consolas" panose="020B0609020204030204" pitchFamily="49" charset="0"/>
+                  <a:cs typeface="Consolas" panose="020B0609020204030204" pitchFamily="49" charset="0"/>
+                </a:rPr>
+                <a:t>Scene</a:t>
+              </a:r>
+              <a:endParaRPr lang="fr-FR" sz="1600" dirty="0">
+                <a:latin typeface="Consolas" panose="020B0609020204030204" pitchFamily="49" charset="0"/>
+                <a:cs typeface="Consolas" panose="020B0609020204030204" pitchFamily="49" charset="0"/>
+              </a:endParaRPr>
+            </a:p>
+          </p:txBody>
+        </p:sp>
+        <p:sp>
+          <p:nvSpPr>
+            <p:cNvPr id="9" name="Rectangle : coins arrondis 8">
+              <a:extLst>
+                <a:ext uri="{FF2B5EF4-FFF2-40B4-BE49-F238E27FC236}">
+                  <a16:creationId xmlns:a16="http://schemas.microsoft.com/office/drawing/2014/main" id="{9E81C4B6-1051-9B4E-8ECB-EDCA0F0A503B}"/>
+                </a:ext>
+              </a:extLst>
+            </p:cNvPr>
+            <p:cNvSpPr/>
+            <p:nvPr/>
+          </p:nvSpPr>
+          <p:spPr>
+            <a:xfrm>
+              <a:off x="3287485" y="3517265"/>
+              <a:ext cx="1828800" cy="458742"/>
+            </a:xfrm>
+            <a:prstGeom prst="roundRect">
+              <a:avLst/>
+            </a:prstGeom>
+          </p:spPr>
+          <p:style>
+            <a:lnRef idx="2">
+              <a:schemeClr val="accent1">
+                <a:shade val="50000"/>
+              </a:schemeClr>
+            </a:lnRef>
+            <a:fillRef idx="1">
+              <a:schemeClr val="accent1"/>
+            </a:fillRef>
+            <a:effectRef idx="0">
+              <a:schemeClr val="accent1"/>
+            </a:effectRef>
+            <a:fontRef idx="minor">
+              <a:schemeClr val="lt1"/>
+            </a:fontRef>
+          </p:style>
+          <p:txBody>
+            <a:bodyPr rtlCol="0" anchor="ctr"/>
+            <a:lstStyle/>
+            <a:p>
+              <a:pPr algn="ctr"/>
+              <a:r>
+                <a:rPr lang="fr-FR" sz="1600" dirty="0" err="1">
+                  <a:latin typeface="Consolas" panose="020B0609020204030204" pitchFamily="49" charset="0"/>
+                  <a:cs typeface="Consolas" panose="020B0609020204030204" pitchFamily="49" charset="0"/>
+                </a:rPr>
+                <a:t>BorderPane</a:t>
+              </a:r>
+              <a:endParaRPr lang="fr-FR" sz="1600" dirty="0">
+                <a:latin typeface="Consolas" panose="020B0609020204030204" pitchFamily="49" charset="0"/>
+                <a:cs typeface="Consolas" panose="020B0609020204030204" pitchFamily="49" charset="0"/>
+              </a:endParaRPr>
+            </a:p>
+          </p:txBody>
+        </p:sp>
+        <p:sp>
+          <p:nvSpPr>
+            <p:cNvPr id="10" name="Rectangle : coins arrondis 9">
+              <a:extLst>
+                <a:ext uri="{FF2B5EF4-FFF2-40B4-BE49-F238E27FC236}">
+                  <a16:creationId xmlns:a16="http://schemas.microsoft.com/office/drawing/2014/main" id="{A4D5A57C-C4A8-4745-9AB0-31AF2357FCAB}"/>
+                </a:ext>
+              </a:extLst>
+            </p:cNvPr>
+            <p:cNvSpPr/>
+            <p:nvPr/>
+          </p:nvSpPr>
+          <p:spPr>
+            <a:xfrm>
+              <a:off x="3287485" y="4389483"/>
+              <a:ext cx="1828800" cy="458742"/>
+            </a:xfrm>
+            <a:prstGeom prst="roundRect">
+              <a:avLst/>
+            </a:prstGeom>
+          </p:spPr>
+          <p:style>
+            <a:lnRef idx="2">
+              <a:schemeClr val="accent1">
+                <a:shade val="50000"/>
+              </a:schemeClr>
+            </a:lnRef>
+            <a:fillRef idx="1">
+              <a:schemeClr val="accent1"/>
+            </a:fillRef>
+            <a:effectRef idx="0">
+              <a:schemeClr val="accent1"/>
+            </a:effectRef>
+            <a:fontRef idx="minor">
+              <a:schemeClr val="lt1"/>
+            </a:fontRef>
+          </p:style>
+          <p:txBody>
+            <a:bodyPr rtlCol="0" anchor="ctr"/>
+            <a:lstStyle/>
+            <a:p>
+              <a:pPr algn="ctr"/>
+              <a:r>
+                <a:rPr lang="fr-FR" sz="1600" dirty="0">
+                  <a:latin typeface="Consolas" panose="020B0609020204030204" pitchFamily="49" charset="0"/>
+                  <a:cs typeface="Consolas" panose="020B0609020204030204" pitchFamily="49" charset="0"/>
+                </a:rPr>
+                <a:t>Pane</a:t>
+              </a:r>
+            </a:p>
+          </p:txBody>
+        </p:sp>
+        <p:sp>
+          <p:nvSpPr>
+            <p:cNvPr id="11" name="Rectangle : coins arrondis 10">
+              <a:extLst>
+                <a:ext uri="{FF2B5EF4-FFF2-40B4-BE49-F238E27FC236}">
+                  <a16:creationId xmlns:a16="http://schemas.microsoft.com/office/drawing/2014/main" id="{46BE3D6E-E636-DA41-8D9F-1AA64F0F6F00}"/>
+                </a:ext>
+              </a:extLst>
+            </p:cNvPr>
+            <p:cNvSpPr/>
+            <p:nvPr/>
+          </p:nvSpPr>
+          <p:spPr>
+            <a:xfrm>
+              <a:off x="1665513" y="5261700"/>
+              <a:ext cx="1828800" cy="458742"/>
+            </a:xfrm>
+            <a:prstGeom prst="roundRect">
+              <a:avLst/>
+            </a:prstGeom>
+          </p:spPr>
+          <p:style>
+            <a:lnRef idx="2">
+              <a:schemeClr val="accent1">
+                <a:shade val="50000"/>
+              </a:schemeClr>
+            </a:lnRef>
+            <a:fillRef idx="1">
+              <a:schemeClr val="accent1"/>
+            </a:fillRef>
+            <a:effectRef idx="0">
+              <a:schemeClr val="accent1"/>
+            </a:effectRef>
+            <a:fontRef idx="minor">
+              <a:schemeClr val="lt1"/>
+            </a:fontRef>
+          </p:style>
+          <p:txBody>
+            <a:bodyPr rtlCol="0" anchor="ctr"/>
+            <a:lstStyle/>
+            <a:p>
+              <a:pPr algn="ctr"/>
+              <a:r>
+                <a:rPr lang="fr-FR" sz="1600" dirty="0">
+                  <a:latin typeface="Consolas" panose="020B0609020204030204" pitchFamily="49" charset="0"/>
+                  <a:cs typeface="Consolas" panose="020B0609020204030204" pitchFamily="49" charset="0"/>
+                </a:rPr>
+                <a:t>Rectangle</a:t>
+              </a:r>
+            </a:p>
+          </p:txBody>
+        </p:sp>
+        <p:sp>
+          <p:nvSpPr>
+            <p:cNvPr id="12" name="Rectangle : coins arrondis 11">
+              <a:extLst>
+                <a:ext uri="{FF2B5EF4-FFF2-40B4-BE49-F238E27FC236}">
+                  <a16:creationId xmlns:a16="http://schemas.microsoft.com/office/drawing/2014/main" id="{71EC6A08-A8AF-3746-8A0C-EBE27F43EC0C}"/>
+                </a:ext>
+              </a:extLst>
+            </p:cNvPr>
+            <p:cNvSpPr/>
+            <p:nvPr/>
+          </p:nvSpPr>
+          <p:spPr>
+            <a:xfrm>
+              <a:off x="4855027" y="5261700"/>
+              <a:ext cx="1828800" cy="458742"/>
+            </a:xfrm>
+            <a:prstGeom prst="roundRect">
+              <a:avLst/>
+            </a:prstGeom>
+          </p:spPr>
+          <p:style>
+            <a:lnRef idx="2">
+              <a:schemeClr val="accent1">
+                <a:shade val="50000"/>
+              </a:schemeClr>
+            </a:lnRef>
+            <a:fillRef idx="1">
+              <a:schemeClr val="accent1"/>
+            </a:fillRef>
+            <a:effectRef idx="0">
+              <a:schemeClr val="accent1"/>
+            </a:effectRef>
+            <a:fontRef idx="minor">
+              <a:schemeClr val="lt1"/>
+            </a:fontRef>
+          </p:style>
+          <p:txBody>
+            <a:bodyPr rtlCol="0" anchor="ctr"/>
+            <a:lstStyle/>
+            <a:p>
+              <a:pPr algn="ctr"/>
+              <a:r>
+                <a:rPr lang="fr-FR" sz="1600" dirty="0">
+                  <a:latin typeface="Consolas" panose="020B0609020204030204" pitchFamily="49" charset="0"/>
+                  <a:cs typeface="Consolas" panose="020B0609020204030204" pitchFamily="49" charset="0"/>
+                </a:rPr>
+                <a:t>Circle</a:t>
+              </a:r>
+            </a:p>
+          </p:txBody>
+        </p:sp>
+      </p:grpSp>
+      <p:sp>
+        <p:nvSpPr>
+          <p:cNvPr id="14" name="Terminaison 13">
+            <a:extLst>
+              <a:ext uri="{FF2B5EF4-FFF2-40B4-BE49-F238E27FC236}">
+                <a16:creationId xmlns:a16="http://schemas.microsoft.com/office/drawing/2014/main" id="{D4A57323-E62E-D74E-8CCE-D59AB9DA5E4E}"/>
+              </a:ext>
+            </a:extLst>
+          </p:cNvPr>
+          <p:cNvSpPr/>
+          <p:nvPr/>
+        </p:nvSpPr>
+        <p:spPr>
+          <a:xfrm>
+            <a:off x="8414657" y="4474029"/>
+            <a:ext cx="1812018" cy="301752"/>
+          </a:xfrm>
+          <a:prstGeom prst="flowChartTerminator">
+            <a:avLst/>
+          </a:prstGeom>
+          <a:solidFill>
+            <a:schemeClr val="accent3"/>
+          </a:solidFill>
+          <a:ln>
+            <a:solidFill>
+              <a:schemeClr val="accent3">
+                <a:lumMod val="50000"/>
+              </a:schemeClr>
+            </a:solidFill>
+          </a:ln>
+        </p:spPr>
+        <p:style>
+          <a:lnRef idx="2">
+            <a:schemeClr val="accent1">
+              <a:shade val="50000"/>
+            </a:schemeClr>
+          </a:lnRef>
+          <a:fillRef idx="1">
+            <a:schemeClr val="accent1"/>
+          </a:fillRef>
+          <a:effectRef idx="0">
+            <a:schemeClr val="accent1"/>
+          </a:effectRef>
+          <a:fontRef idx="minor">
+            <a:schemeClr val="lt1"/>
+          </a:fontRef>
+        </p:style>
+        <p:txBody>
+          <a:bodyPr rtlCol="0" anchor="ctr"/>
+          <a:lstStyle/>
+          <a:p>
+            <a:pPr algn="ctr"/>
+            <a:r>
+              <a:rPr lang="fr-FR" sz="1600" dirty="0" err="1">
+                <a:latin typeface="Consolas" panose="020B0609020204030204" pitchFamily="49" charset="0"/>
+                <a:cs typeface="Consolas" panose="020B0609020204030204" pitchFamily="49" charset="0"/>
+              </a:rPr>
+              <a:t>EventHandler</a:t>
+            </a:r>
+            <a:endParaRPr lang="fr-FR" sz="1600" dirty="0">
+              <a:latin typeface="Consolas" panose="020B0609020204030204" pitchFamily="49" charset="0"/>
+              <a:cs typeface="Consolas" panose="020B0609020204030204" pitchFamily="49" charset="0"/>
+            </a:endParaRPr>
+          </a:p>
+        </p:txBody>
+      </p:sp>
+      <p:sp>
+        <p:nvSpPr>
+          <p:cNvPr id="15" name="Terminaison 14">
+            <a:extLst>
+              <a:ext uri="{FF2B5EF4-FFF2-40B4-BE49-F238E27FC236}">
+                <a16:creationId xmlns:a16="http://schemas.microsoft.com/office/drawing/2014/main" id="{D03C91D6-B180-FB41-84DB-5CB998525D44}"/>
+              </a:ext>
+            </a:extLst>
+          </p:cNvPr>
+          <p:cNvSpPr/>
+          <p:nvPr/>
+        </p:nvSpPr>
+        <p:spPr>
+          <a:xfrm>
+            <a:off x="8414657" y="4985658"/>
+            <a:ext cx="1812018" cy="301752"/>
+          </a:xfrm>
+          <a:prstGeom prst="flowChartTerminator">
+            <a:avLst/>
+          </a:prstGeom>
+          <a:solidFill>
+            <a:schemeClr val="accent3"/>
+          </a:solidFill>
+          <a:ln>
+            <a:solidFill>
+              <a:schemeClr val="accent3">
+                <a:lumMod val="50000"/>
+              </a:schemeClr>
+            </a:solidFill>
+          </a:ln>
+        </p:spPr>
+        <p:style>
+          <a:lnRef idx="2">
+            <a:schemeClr val="accent1">
+              <a:shade val="50000"/>
+            </a:schemeClr>
+          </a:lnRef>
+          <a:fillRef idx="1">
+            <a:schemeClr val="accent1"/>
+          </a:fillRef>
+          <a:effectRef idx="0">
+            <a:schemeClr val="accent1"/>
+          </a:effectRef>
+          <a:fontRef idx="minor">
+            <a:schemeClr val="lt1"/>
+          </a:fontRef>
+        </p:style>
+        <p:txBody>
+          <a:bodyPr rtlCol="0" anchor="ctr"/>
+          <a:lstStyle/>
+          <a:p>
+            <a:pPr algn="ctr"/>
+            <a:r>
+              <a:rPr lang="fr-FR" sz="1600" dirty="0" err="1">
+                <a:latin typeface="Consolas" panose="020B0609020204030204" pitchFamily="49" charset="0"/>
+                <a:cs typeface="Consolas" panose="020B0609020204030204" pitchFamily="49" charset="0"/>
+              </a:rPr>
+              <a:t>EventHandler</a:t>
+            </a:r>
+            <a:endParaRPr lang="fr-FR" sz="1600" dirty="0">
+              <a:latin typeface="Consolas" panose="020B0609020204030204" pitchFamily="49" charset="0"/>
+              <a:cs typeface="Consolas" panose="020B0609020204030204" pitchFamily="49" charset="0"/>
+            </a:endParaRPr>
+          </a:p>
+        </p:txBody>
+      </p:sp>
+      <p:cxnSp>
+        <p:nvCxnSpPr>
+          <p:cNvPr id="17" name="Connecteur droit 16">
+            <a:extLst>
+              <a:ext uri="{FF2B5EF4-FFF2-40B4-BE49-F238E27FC236}">
+                <a16:creationId xmlns:a16="http://schemas.microsoft.com/office/drawing/2014/main" id="{7BD7D9B6-4181-6D42-A43A-EC0A5AFF0F12}"/>
+              </a:ext>
+            </a:extLst>
+          </p:cNvPr>
+          <p:cNvCxnSpPr>
+            <a:endCxn id="14" idx="1"/>
+          </p:cNvCxnSpPr>
+          <p:nvPr/>
+        </p:nvCxnSpPr>
+        <p:spPr>
+          <a:xfrm flipV="1">
+            <a:off x="7609115" y="4624905"/>
+            <a:ext cx="805542" cy="102312"/>
+          </a:xfrm>
+          <a:prstGeom prst="line">
+            <a:avLst/>
+          </a:prstGeom>
+          <a:ln>
+            <a:solidFill>
+              <a:schemeClr val="accent6"/>
+            </a:solidFill>
+          </a:ln>
+        </p:spPr>
+        <p:style>
+          <a:lnRef idx="1">
+            <a:schemeClr val="accent1"/>
+          </a:lnRef>
+          <a:fillRef idx="0">
+            <a:schemeClr val="accent1"/>
+          </a:fillRef>
+          <a:effectRef idx="0">
+            <a:schemeClr val="accent1"/>
+          </a:effectRef>
+          <a:fontRef idx="minor">
+            <a:schemeClr val="tx1"/>
+          </a:fontRef>
+        </p:style>
+      </p:cxnSp>
+      <p:cxnSp>
+        <p:nvCxnSpPr>
+          <p:cNvPr id="18" name="Connecteur droit 17">
+            <a:extLst>
+              <a:ext uri="{FF2B5EF4-FFF2-40B4-BE49-F238E27FC236}">
+                <a16:creationId xmlns:a16="http://schemas.microsoft.com/office/drawing/2014/main" id="{582DA460-6A02-4941-B33F-B4C0C8D0EA0A}"/>
+              </a:ext>
+            </a:extLst>
+          </p:cNvPr>
+          <p:cNvCxnSpPr>
+            <a:cxnSpLocks/>
+            <a:stCxn id="12" idx="3"/>
+            <a:endCxn id="15" idx="1"/>
+          </p:cNvCxnSpPr>
+          <p:nvPr/>
+        </p:nvCxnSpPr>
+        <p:spPr>
+          <a:xfrm>
+            <a:off x="7609115" y="4727218"/>
+            <a:ext cx="805542" cy="409317"/>
+          </a:xfrm>
+          <a:prstGeom prst="line">
+            <a:avLst/>
+          </a:prstGeom>
+          <a:ln>
+            <a:solidFill>
+              <a:schemeClr val="accent6"/>
+            </a:solidFill>
+          </a:ln>
+        </p:spPr>
+        <p:style>
+          <a:lnRef idx="1">
+            <a:schemeClr val="accent1"/>
+          </a:lnRef>
+          <a:fillRef idx="0">
+            <a:schemeClr val="accent1"/>
+          </a:fillRef>
+          <a:effectRef idx="0">
+            <a:schemeClr val="accent1"/>
+          </a:effectRef>
+          <a:fontRef idx="minor">
+            <a:schemeClr val="tx1"/>
+          </a:fontRef>
+        </p:style>
+      </p:cxnSp>
+      <p:sp>
+        <p:nvSpPr>
+          <p:cNvPr id="21" name="Légende sans bordure 1 20">
+            <a:extLst>
+              <a:ext uri="{FF2B5EF4-FFF2-40B4-BE49-F238E27FC236}">
+                <a16:creationId xmlns:a16="http://schemas.microsoft.com/office/drawing/2014/main" id="{E1F975EF-7275-4E43-97F6-F2E34D4321BD}"/>
+              </a:ext>
+            </a:extLst>
+          </p:cNvPr>
+          <p:cNvSpPr/>
+          <p:nvPr/>
+        </p:nvSpPr>
+        <p:spPr>
+          <a:xfrm>
+            <a:off x="7506154" y="3474626"/>
+            <a:ext cx="2095047" cy="301752"/>
+          </a:xfrm>
+          <a:prstGeom prst="callout1">
+            <a:avLst>
+              <a:gd name="adj1" fmla="val 98115"/>
+              <a:gd name="adj2" fmla="val 19725"/>
+              <a:gd name="adj3" fmla="val 372240"/>
+              <a:gd name="adj4" fmla="val 25057"/>
+            </a:avLst>
+          </a:prstGeom>
+          <a:noFill/>
+          <a:ln w="12700">
+            <a:solidFill>
+              <a:schemeClr val="accent6"/>
+            </a:solidFill>
+            <a:headEnd type="none" w="med" len="med"/>
+            <a:tailEnd type="arrow" w="med" len="med"/>
+          </a:ln>
+        </p:spPr>
+        <p:style>
+          <a:lnRef idx="2">
+            <a:schemeClr val="accent1">
+              <a:shade val="50000"/>
+            </a:schemeClr>
+          </a:lnRef>
+          <a:fillRef idx="1">
+            <a:schemeClr val="accent1"/>
+          </a:fillRef>
+          <a:effectRef idx="0">
+            <a:schemeClr val="accent1"/>
+          </a:effectRef>
+          <a:fontRef idx="minor">
+            <a:schemeClr val="lt1"/>
+          </a:fontRef>
+        </p:style>
+        <p:txBody>
+          <a:bodyPr rtlCol="0" anchor="ctr"/>
+          <a:lstStyle/>
+          <a:p>
+            <a:pPr algn="ctr"/>
+            <a:r>
+              <a:rPr lang="fr-FR" sz="1600" dirty="0" err="1">
+                <a:solidFill>
+                  <a:schemeClr val="accent3"/>
+                </a:solidFill>
+                <a:latin typeface="Consolas" panose="020B0609020204030204" pitchFamily="49" charset="0"/>
+                <a:cs typeface="Consolas" panose="020B0609020204030204" pitchFamily="49" charset="0"/>
+              </a:rPr>
+              <a:t>addEventHandler</a:t>
+            </a:r>
+            <a:endParaRPr lang="fr-FR" sz="1600" dirty="0">
+              <a:solidFill>
+                <a:schemeClr val="accent3"/>
+              </a:solidFill>
+              <a:latin typeface="Consolas" panose="020B0609020204030204" pitchFamily="49" charset="0"/>
+              <a:cs typeface="Consolas" panose="020B0609020204030204" pitchFamily="49" charset="0"/>
+            </a:endParaRPr>
+          </a:p>
+        </p:txBody>
+      </p:sp>
+      <p:cxnSp>
+        <p:nvCxnSpPr>
+          <p:cNvPr id="22" name="Connecteur droit 21">
+            <a:extLst>
+              <a:ext uri="{FF2B5EF4-FFF2-40B4-BE49-F238E27FC236}">
+                <a16:creationId xmlns:a16="http://schemas.microsoft.com/office/drawing/2014/main" id="{6596CF2D-3C72-024B-9D14-6B019FC961C7}"/>
+              </a:ext>
+            </a:extLst>
+          </p:cNvPr>
+          <p:cNvCxnSpPr>
+            <a:cxnSpLocks/>
+            <a:endCxn id="8" idx="0"/>
+          </p:cNvCxnSpPr>
+          <p:nvPr/>
+        </p:nvCxnSpPr>
+        <p:spPr>
+          <a:xfrm>
+            <a:off x="5627868" y="2125274"/>
+            <a:ext cx="1" cy="330063"/>
+          </a:xfrm>
+          <a:prstGeom prst="line">
+            <a:avLst/>
+          </a:prstGeom>
+          <a:ln>
+            <a:solidFill>
+              <a:schemeClr val="accent6"/>
+            </a:solidFill>
+          </a:ln>
+        </p:spPr>
+        <p:style>
+          <a:lnRef idx="1">
+            <a:schemeClr val="accent1"/>
+          </a:lnRef>
+          <a:fillRef idx="0">
+            <a:schemeClr val="accent1"/>
+          </a:fillRef>
+          <a:effectRef idx="0">
+            <a:schemeClr val="accent1"/>
+          </a:effectRef>
+          <a:fontRef idx="minor">
+            <a:schemeClr val="tx1"/>
+          </a:fontRef>
+        </p:style>
+      </p:cxnSp>
+      <p:cxnSp>
+        <p:nvCxnSpPr>
+          <p:cNvPr id="25" name="Connecteur droit 24">
+            <a:extLst>
+              <a:ext uri="{FF2B5EF4-FFF2-40B4-BE49-F238E27FC236}">
+                <a16:creationId xmlns:a16="http://schemas.microsoft.com/office/drawing/2014/main" id="{C918552C-264B-114B-9486-6A2C5EE70EB4}"/>
+              </a:ext>
+            </a:extLst>
+          </p:cNvPr>
+          <p:cNvCxnSpPr>
+            <a:cxnSpLocks/>
+          </p:cNvCxnSpPr>
+          <p:nvPr/>
+        </p:nvCxnSpPr>
+        <p:spPr>
+          <a:xfrm>
+            <a:off x="5627868" y="2812309"/>
+            <a:ext cx="1" cy="330063"/>
+          </a:xfrm>
+          <a:prstGeom prst="line">
+            <a:avLst/>
+          </a:prstGeom>
+          <a:ln>
+            <a:solidFill>
+              <a:schemeClr val="accent6"/>
+            </a:solidFill>
+          </a:ln>
+        </p:spPr>
+        <p:style>
+          <a:lnRef idx="1">
+            <a:schemeClr val="accent1"/>
+          </a:lnRef>
+          <a:fillRef idx="0">
+            <a:schemeClr val="accent1"/>
+          </a:fillRef>
+          <a:effectRef idx="0">
+            <a:schemeClr val="accent1"/>
+          </a:effectRef>
+          <a:fontRef idx="minor">
+            <a:schemeClr val="tx1"/>
+          </a:fontRef>
+        </p:style>
+      </p:cxnSp>
+      <p:cxnSp>
+        <p:nvCxnSpPr>
+          <p:cNvPr id="26" name="Connecteur droit 25">
+            <a:extLst>
+              <a:ext uri="{FF2B5EF4-FFF2-40B4-BE49-F238E27FC236}">
+                <a16:creationId xmlns:a16="http://schemas.microsoft.com/office/drawing/2014/main" id="{B7C96B72-01CC-6F44-A843-F9F764DE7E1B}"/>
+              </a:ext>
+            </a:extLst>
+          </p:cNvPr>
+          <p:cNvCxnSpPr>
+            <a:cxnSpLocks/>
+          </p:cNvCxnSpPr>
+          <p:nvPr/>
+        </p:nvCxnSpPr>
+        <p:spPr>
+          <a:xfrm>
+            <a:off x="5627868" y="3519116"/>
+            <a:ext cx="1" cy="330063"/>
+          </a:xfrm>
+          <a:prstGeom prst="line">
+            <a:avLst/>
+          </a:prstGeom>
+          <a:ln>
+            <a:solidFill>
+              <a:schemeClr val="accent6"/>
+            </a:solidFill>
+          </a:ln>
+        </p:spPr>
+        <p:style>
+          <a:lnRef idx="1">
+            <a:schemeClr val="accent1"/>
+          </a:lnRef>
+          <a:fillRef idx="0">
+            <a:schemeClr val="accent1"/>
+          </a:fillRef>
+          <a:effectRef idx="0">
+            <a:schemeClr val="accent1"/>
+          </a:effectRef>
+          <a:fontRef idx="minor">
+            <a:schemeClr val="tx1"/>
+          </a:fontRef>
+        </p:style>
+      </p:cxnSp>
+      <p:cxnSp>
+        <p:nvCxnSpPr>
+          <p:cNvPr id="27" name="Connecteur droit 26">
+            <a:extLst>
+              <a:ext uri="{FF2B5EF4-FFF2-40B4-BE49-F238E27FC236}">
+                <a16:creationId xmlns:a16="http://schemas.microsoft.com/office/drawing/2014/main" id="{29157CA7-6F1D-B34F-8D9F-5A7F4EA69ECB}"/>
+              </a:ext>
+            </a:extLst>
+          </p:cNvPr>
+          <p:cNvCxnSpPr>
+            <a:cxnSpLocks/>
+            <a:endCxn id="12" idx="0"/>
+          </p:cNvCxnSpPr>
+          <p:nvPr/>
+        </p:nvCxnSpPr>
+        <p:spPr>
+          <a:xfrm>
+            <a:off x="5627868" y="4220980"/>
+            <a:ext cx="1251315" cy="323139"/>
+          </a:xfrm>
+          <a:prstGeom prst="line">
+            <a:avLst/>
+          </a:prstGeom>
+          <a:ln>
+            <a:solidFill>
+              <a:schemeClr val="accent6"/>
+            </a:solidFill>
+          </a:ln>
+        </p:spPr>
+        <p:style>
+          <a:lnRef idx="1">
+            <a:schemeClr val="accent1"/>
+          </a:lnRef>
+          <a:fillRef idx="0">
+            <a:schemeClr val="accent1"/>
+          </a:fillRef>
+          <a:effectRef idx="0">
+            <a:schemeClr val="accent1"/>
+          </a:effectRef>
+          <a:fontRef idx="minor">
+            <a:schemeClr val="tx1"/>
+          </a:fontRef>
+        </p:style>
+      </p:cxnSp>
+      <p:cxnSp>
+        <p:nvCxnSpPr>
+          <p:cNvPr id="29" name="Connecteur droit 28">
+            <a:extLst>
+              <a:ext uri="{FF2B5EF4-FFF2-40B4-BE49-F238E27FC236}">
+                <a16:creationId xmlns:a16="http://schemas.microsoft.com/office/drawing/2014/main" id="{4CE0640D-ACFF-6244-90AC-66482A5F4CD9}"/>
+              </a:ext>
+            </a:extLst>
+          </p:cNvPr>
+          <p:cNvCxnSpPr>
+            <a:cxnSpLocks/>
+            <a:endCxn id="11" idx="0"/>
+          </p:cNvCxnSpPr>
+          <p:nvPr/>
+        </p:nvCxnSpPr>
+        <p:spPr>
+          <a:xfrm flipH="1">
+            <a:off x="4333105" y="4220980"/>
+            <a:ext cx="1294762" cy="323139"/>
+          </a:xfrm>
+          <a:prstGeom prst="line">
+            <a:avLst/>
+          </a:prstGeom>
+          <a:ln>
+            <a:solidFill>
+              <a:schemeClr val="accent6"/>
+            </a:solidFill>
+          </a:ln>
+        </p:spPr>
+        <p:style>
+          <a:lnRef idx="1">
+            <a:schemeClr val="accent1"/>
+          </a:lnRef>
+          <a:fillRef idx="0">
+            <a:schemeClr val="accent1"/>
+          </a:fillRef>
+          <a:effectRef idx="0">
+            <a:schemeClr val="accent1"/>
+          </a:effectRef>
+          <a:fontRef idx="minor">
+            <a:schemeClr val="tx1"/>
+          </a:fontRef>
+        </p:style>
+      </p:cxnSp>
+      <p:grpSp>
+        <p:nvGrpSpPr>
+          <p:cNvPr id="32" name="Groupe 31">
+            <a:extLst>
+              <a:ext uri="{FF2B5EF4-FFF2-40B4-BE49-F238E27FC236}">
+                <a16:creationId xmlns:a16="http://schemas.microsoft.com/office/drawing/2014/main" id="{F7DD1873-5835-D249-92B0-385AC4CF8052}"/>
+              </a:ext>
+            </a:extLst>
+          </p:cNvPr>
+          <p:cNvGrpSpPr/>
+          <p:nvPr/>
+        </p:nvGrpSpPr>
+        <p:grpSpPr>
+          <a:xfrm>
+            <a:off x="6564135" y="3855944"/>
+            <a:ext cx="1668586" cy="681620"/>
+            <a:chOff x="4467540" y="4051953"/>
+            <a:chExt cx="3047084" cy="1244741"/>
+          </a:xfrm>
+        </p:grpSpPr>
+        <p:grpSp>
+          <p:nvGrpSpPr>
+            <p:cNvPr id="33" name="Groupe 32">
+              <a:extLst>
+                <a:ext uri="{FF2B5EF4-FFF2-40B4-BE49-F238E27FC236}">
+                  <a16:creationId xmlns:a16="http://schemas.microsoft.com/office/drawing/2014/main" id="{A9C28895-0B76-E743-9340-4830EF9A20BB}"/>
+                </a:ext>
+              </a:extLst>
+            </p:cNvPr>
+            <p:cNvGrpSpPr/>
+            <p:nvPr/>
+          </p:nvGrpSpPr>
+          <p:grpSpPr>
+            <a:xfrm>
+              <a:off x="4886162" y="4051953"/>
+              <a:ext cx="2628462" cy="1244741"/>
+              <a:chOff x="4139926" y="2291668"/>
+              <a:chExt cx="3068600" cy="1453173"/>
+            </a:xfrm>
+          </p:grpSpPr>
+          <p:sp>
+            <p:nvSpPr>
+              <p:cNvPr id="38" name="Forme libre 37">
+                <a:extLst>
+                  <a:ext uri="{FF2B5EF4-FFF2-40B4-BE49-F238E27FC236}">
+                    <a16:creationId xmlns:a16="http://schemas.microsoft.com/office/drawing/2014/main" id="{3527E8FC-E1D3-5E43-B392-E1C4A7AC9D4C}"/>
+                  </a:ext>
+                </a:extLst>
+              </p:cNvPr>
+              <p:cNvSpPr/>
+              <p:nvPr/>
+            </p:nvSpPr>
+            <p:spPr>
+              <a:xfrm>
+                <a:off x="4445421" y="2291668"/>
+                <a:ext cx="2552170" cy="1453173"/>
+              </a:xfrm>
+              <a:custGeom>
+                <a:avLst/>
+                <a:gdLst>
+                  <a:gd name="connsiteX0" fmla="*/ 1884783 w 3023118"/>
+                  <a:gd name="connsiteY0" fmla="*/ 615821 h 2286000"/>
+                  <a:gd name="connsiteX1" fmla="*/ 1847461 w 3023118"/>
+                  <a:gd name="connsiteY1" fmla="*/ 102637 h 2286000"/>
+                  <a:gd name="connsiteX2" fmla="*/ 1483567 w 3023118"/>
+                  <a:gd name="connsiteY2" fmla="*/ 494523 h 2286000"/>
+                  <a:gd name="connsiteX3" fmla="*/ 1138335 w 3023118"/>
+                  <a:gd name="connsiteY3" fmla="*/ 0 h 2286000"/>
+                  <a:gd name="connsiteX4" fmla="*/ 1063690 w 3023118"/>
+                  <a:gd name="connsiteY4" fmla="*/ 541176 h 2286000"/>
+                  <a:gd name="connsiteX5" fmla="*/ 569167 w 3023118"/>
+                  <a:gd name="connsiteY5" fmla="*/ 270588 h 2286000"/>
+                  <a:gd name="connsiteX6" fmla="*/ 811763 w 3023118"/>
+                  <a:gd name="connsiteY6" fmla="*/ 867747 h 2286000"/>
+                  <a:gd name="connsiteX7" fmla="*/ 158620 w 3023118"/>
+                  <a:gd name="connsiteY7" fmla="*/ 858417 h 2286000"/>
+                  <a:gd name="connsiteX8" fmla="*/ 485192 w 3023118"/>
+                  <a:gd name="connsiteY8" fmla="*/ 1156996 h 2286000"/>
+                  <a:gd name="connsiteX9" fmla="*/ 0 w 3023118"/>
+                  <a:gd name="connsiteY9" fmla="*/ 1399592 h 2286000"/>
+                  <a:gd name="connsiteX10" fmla="*/ 653143 w 3023118"/>
+                  <a:gd name="connsiteY10" fmla="*/ 1446245 h 2286000"/>
+                  <a:gd name="connsiteX11" fmla="*/ 130628 w 3023118"/>
+                  <a:gd name="connsiteY11" fmla="*/ 2099388 h 2286000"/>
+                  <a:gd name="connsiteX12" fmla="*/ 961053 w 3023118"/>
+                  <a:gd name="connsiteY12" fmla="*/ 1744825 h 2286000"/>
+                  <a:gd name="connsiteX13" fmla="*/ 933061 w 3023118"/>
+                  <a:gd name="connsiteY13" fmla="*/ 2286000 h 2286000"/>
+                  <a:gd name="connsiteX14" fmla="*/ 1324947 w 3023118"/>
+                  <a:gd name="connsiteY14" fmla="*/ 1884784 h 2286000"/>
+                  <a:gd name="connsiteX15" fmla="*/ 1511559 w 3023118"/>
+                  <a:gd name="connsiteY15" fmla="*/ 2202025 h 2286000"/>
+                  <a:gd name="connsiteX16" fmla="*/ 1604865 w 3023118"/>
+                  <a:gd name="connsiteY16" fmla="*/ 2006082 h 2286000"/>
+                  <a:gd name="connsiteX17" fmla="*/ 1819469 w 3023118"/>
+                  <a:gd name="connsiteY17" fmla="*/ 2155372 h 2286000"/>
+                  <a:gd name="connsiteX18" fmla="*/ 1847461 w 3023118"/>
+                  <a:gd name="connsiteY18" fmla="*/ 1763486 h 2286000"/>
+                  <a:gd name="connsiteX19" fmla="*/ 2332653 w 3023118"/>
+                  <a:gd name="connsiteY19" fmla="*/ 1959429 h 2286000"/>
+                  <a:gd name="connsiteX20" fmla="*/ 2118049 w 3023118"/>
+                  <a:gd name="connsiteY20" fmla="*/ 1548882 h 2286000"/>
+                  <a:gd name="connsiteX21" fmla="*/ 3023118 w 3023118"/>
+                  <a:gd name="connsiteY21" fmla="*/ 1548882 h 2286000"/>
+                  <a:gd name="connsiteX22" fmla="*/ 2369975 w 3023118"/>
+                  <a:gd name="connsiteY22" fmla="*/ 1194319 h 2286000"/>
+                  <a:gd name="connsiteX23" fmla="*/ 2873828 w 3023118"/>
+                  <a:gd name="connsiteY23" fmla="*/ 923731 h 2286000"/>
+                  <a:gd name="connsiteX24" fmla="*/ 2239347 w 3023118"/>
+                  <a:gd name="connsiteY24" fmla="*/ 886408 h 2286000"/>
+                  <a:gd name="connsiteX25" fmla="*/ 2481943 w 3023118"/>
+                  <a:gd name="connsiteY25" fmla="*/ 363894 h 2286000"/>
+                  <a:gd name="connsiteX26" fmla="*/ 1884783 w 3023118"/>
+                  <a:gd name="connsiteY26" fmla="*/ 615821 h 2286000"/>
+                </a:gdLst>
+                <a:ahLst/>
+                <a:cxnLst>
+                  <a:cxn ang="0">
+                    <a:pos x="connsiteX0" y="connsiteY0"/>
+                  </a:cxn>
+                  <a:cxn ang="0">
+                    <a:pos x="connsiteX1" y="connsiteY1"/>
+                  </a:cxn>
+                  <a:cxn ang="0">
+                    <a:pos x="connsiteX2" y="connsiteY2"/>
+                  </a:cxn>
+                  <a:cxn ang="0">
+                    <a:pos x="connsiteX3" y="connsiteY3"/>
+                  </a:cxn>
+                  <a:cxn ang="0">
+                    <a:pos x="connsiteX4" y="connsiteY4"/>
+                  </a:cxn>
+                  <a:cxn ang="0">
+                    <a:pos x="connsiteX5" y="connsiteY5"/>
+                  </a:cxn>
+                  <a:cxn ang="0">
+                    <a:pos x="connsiteX6" y="connsiteY6"/>
+                  </a:cxn>
+                  <a:cxn ang="0">
+                    <a:pos x="connsiteX7" y="connsiteY7"/>
+                  </a:cxn>
+                  <a:cxn ang="0">
+                    <a:pos x="connsiteX8" y="connsiteY8"/>
+                  </a:cxn>
+                  <a:cxn ang="0">
+                    <a:pos x="connsiteX9" y="connsiteY9"/>
+                  </a:cxn>
+                  <a:cxn ang="0">
+                    <a:pos x="connsiteX10" y="connsiteY10"/>
+                  </a:cxn>
+                  <a:cxn ang="0">
+                    <a:pos x="connsiteX11" y="connsiteY11"/>
+                  </a:cxn>
+                  <a:cxn ang="0">
+                    <a:pos x="connsiteX12" y="connsiteY12"/>
+                  </a:cxn>
+                  <a:cxn ang="0">
+                    <a:pos x="connsiteX13" y="connsiteY13"/>
+                  </a:cxn>
+                  <a:cxn ang="0">
+                    <a:pos x="connsiteX14" y="connsiteY14"/>
+                  </a:cxn>
+                  <a:cxn ang="0">
+                    <a:pos x="connsiteX15" y="connsiteY15"/>
+                  </a:cxn>
+                  <a:cxn ang="0">
+                    <a:pos x="connsiteX16" y="connsiteY16"/>
+                  </a:cxn>
+                  <a:cxn ang="0">
+                    <a:pos x="connsiteX17" y="connsiteY17"/>
+                  </a:cxn>
+                  <a:cxn ang="0">
+                    <a:pos x="connsiteX18" y="connsiteY18"/>
+                  </a:cxn>
+                  <a:cxn ang="0">
+                    <a:pos x="connsiteX19" y="connsiteY19"/>
+                  </a:cxn>
+                  <a:cxn ang="0">
+                    <a:pos x="connsiteX20" y="connsiteY20"/>
+                  </a:cxn>
+                  <a:cxn ang="0">
+                    <a:pos x="connsiteX21" y="connsiteY21"/>
+                  </a:cxn>
+                  <a:cxn ang="0">
+                    <a:pos x="connsiteX22" y="connsiteY22"/>
+                  </a:cxn>
+                  <a:cxn ang="0">
+                    <a:pos x="connsiteX23" y="connsiteY23"/>
+                  </a:cxn>
+                  <a:cxn ang="0">
+                    <a:pos x="connsiteX24" y="connsiteY24"/>
+                  </a:cxn>
+                  <a:cxn ang="0">
+                    <a:pos x="connsiteX25" y="connsiteY25"/>
+                  </a:cxn>
+                  <a:cxn ang="0">
+                    <a:pos x="connsiteX26" y="connsiteY26"/>
+                  </a:cxn>
+                </a:cxnLst>
+                <a:rect l="l" t="t" r="r" b="b"/>
+                <a:pathLst>
+                  <a:path w="3023118" h="2286000">
+                    <a:moveTo>
+                      <a:pt x="1884783" y="615821"/>
+                    </a:moveTo>
+                    <a:lnTo>
+                      <a:pt x="1847461" y="102637"/>
+                    </a:lnTo>
+                    <a:lnTo>
+                      <a:pt x="1483567" y="494523"/>
+                    </a:lnTo>
+                    <a:lnTo>
+                      <a:pt x="1138335" y="0"/>
+                    </a:lnTo>
+                    <a:lnTo>
+                      <a:pt x="1063690" y="541176"/>
+                    </a:lnTo>
+                    <a:lnTo>
+                      <a:pt x="569167" y="270588"/>
+                    </a:lnTo>
+                    <a:lnTo>
+                      <a:pt x="811763" y="867747"/>
+                    </a:lnTo>
+                    <a:lnTo>
+                      <a:pt x="158620" y="858417"/>
+                    </a:lnTo>
+                    <a:lnTo>
+                      <a:pt x="485192" y="1156996"/>
+                    </a:lnTo>
+                    <a:lnTo>
+                      <a:pt x="0" y="1399592"/>
+                    </a:lnTo>
+                    <a:lnTo>
+                      <a:pt x="653143" y="1446245"/>
+                    </a:lnTo>
+                    <a:lnTo>
+                      <a:pt x="130628" y="2099388"/>
+                    </a:lnTo>
+                    <a:lnTo>
+                      <a:pt x="961053" y="1744825"/>
+                    </a:lnTo>
+                    <a:lnTo>
+                      <a:pt x="933061" y="2286000"/>
+                    </a:lnTo>
+                    <a:lnTo>
+                      <a:pt x="1324947" y="1884784"/>
+                    </a:lnTo>
+                    <a:lnTo>
+                      <a:pt x="1511559" y="2202025"/>
+                    </a:lnTo>
+                    <a:lnTo>
+                      <a:pt x="1604865" y="2006082"/>
+                    </a:lnTo>
+                    <a:lnTo>
+                      <a:pt x="1819469" y="2155372"/>
+                    </a:lnTo>
+                    <a:lnTo>
+                      <a:pt x="1847461" y="1763486"/>
+                    </a:lnTo>
+                    <a:lnTo>
+                      <a:pt x="2332653" y="1959429"/>
+                    </a:lnTo>
+                    <a:lnTo>
+                      <a:pt x="2118049" y="1548882"/>
+                    </a:lnTo>
+                    <a:lnTo>
+                      <a:pt x="3023118" y="1548882"/>
+                    </a:lnTo>
+                    <a:lnTo>
+                      <a:pt x="2369975" y="1194319"/>
+                    </a:lnTo>
+                    <a:lnTo>
+                      <a:pt x="2873828" y="923731"/>
+                    </a:lnTo>
+                    <a:lnTo>
+                      <a:pt x="2239347" y="886408"/>
+                    </a:lnTo>
+                    <a:lnTo>
+                      <a:pt x="2481943" y="363894"/>
+                    </a:lnTo>
+                    <a:lnTo>
+                      <a:pt x="1884783" y="615821"/>
+                    </a:lnTo>
+                    <a:close/>
+                  </a:path>
+                </a:pathLst>
+              </a:custGeom>
+              <a:solidFill>
+                <a:srgbClr val="FFFF00"/>
+              </a:solidFill>
+              <a:ln>
+                <a:solidFill>
+                  <a:srgbClr val="FF0000"/>
+                </a:solidFill>
+              </a:ln>
+            </p:spPr>
+            <p:style>
+              <a:lnRef idx="2">
+                <a:schemeClr val="accent1">
+                  <a:shade val="50000"/>
+                </a:schemeClr>
+              </a:lnRef>
+              <a:fillRef idx="1">
+                <a:schemeClr val="accent1"/>
+              </a:fillRef>
+              <a:effectRef idx="0">
+                <a:schemeClr val="accent1"/>
+              </a:effectRef>
+              <a:fontRef idx="minor">
+                <a:schemeClr val="lt1"/>
+              </a:fontRef>
+            </p:style>
+            <p:txBody>
+              <a:bodyPr rtlCol="0" anchor="ctr"/>
+              <a:lstStyle/>
+              <a:p>
+                <a:pPr algn="ctr"/>
+                <a:endParaRPr lang="fr-FR" sz="900"/>
+              </a:p>
+            </p:txBody>
+          </p:sp>
+          <p:sp>
+            <p:nvSpPr>
+              <p:cNvPr id="39" name="Rectangle 38">
+                <a:extLst>
+                  <a:ext uri="{FF2B5EF4-FFF2-40B4-BE49-F238E27FC236}">
+                    <a16:creationId xmlns:a16="http://schemas.microsoft.com/office/drawing/2014/main" id="{442D49A0-6F58-4645-BF54-815FD8F896D1}"/>
+                  </a:ext>
+                </a:extLst>
+              </p:cNvPr>
+              <p:cNvSpPr/>
+              <p:nvPr/>
+            </p:nvSpPr>
+            <p:spPr>
+              <a:xfrm rot="21000827">
+                <a:off x="4139926" y="2595201"/>
+                <a:ext cx="3068600" cy="721777"/>
+              </a:xfrm>
+              <a:prstGeom prst="rect">
+                <a:avLst/>
+              </a:prstGeom>
+              <a:noFill/>
+            </p:spPr>
+            <p:txBody>
+              <a:bodyPr wrap="square" lIns="91440" tIns="45720" rIns="91440" bIns="45720">
+                <a:spAutoFit/>
+              </a:bodyPr>
+              <a:lstStyle/>
+              <a:p>
+                <a:pPr algn="ctr"/>
+                <a:r>
+                  <a:rPr lang="fr-FR" sz="1600" b="1" dirty="0">
+                    <a:ln w="12700">
+                      <a:noFill/>
+                      <a:prstDash val="solid"/>
+                    </a:ln>
+                    <a:effectLst>
+                      <a:outerShdw dist="38100" dir="2640000" algn="bl" rotWithShape="0">
+                        <a:schemeClr val="tx2">
+                          <a:lumMod val="75000"/>
+                        </a:schemeClr>
+                      </a:outerShdw>
+                    </a:effectLst>
+                  </a:rPr>
+                  <a:t>Evénement</a:t>
+                </a:r>
+              </a:p>
+            </p:txBody>
+          </p:sp>
+        </p:grpSp>
+        <p:grpSp>
+          <p:nvGrpSpPr>
+            <p:cNvPr id="34" name="Groupe 33">
+              <a:extLst>
+                <a:ext uri="{FF2B5EF4-FFF2-40B4-BE49-F238E27FC236}">
+                  <a16:creationId xmlns:a16="http://schemas.microsoft.com/office/drawing/2014/main" id="{6049FB0C-BD81-6744-89FA-30B75BAD963B}"/>
+                </a:ext>
+              </a:extLst>
+            </p:cNvPr>
+            <p:cNvGrpSpPr/>
+            <p:nvPr/>
+          </p:nvGrpSpPr>
+          <p:grpSpPr>
+            <a:xfrm>
+              <a:off x="4467540" y="4079457"/>
+              <a:ext cx="736611" cy="1100506"/>
+              <a:chOff x="3153747" y="2382820"/>
+              <a:chExt cx="736611" cy="1100506"/>
+            </a:xfrm>
+          </p:grpSpPr>
+          <p:sp>
+            <p:nvSpPr>
+              <p:cNvPr id="35" name="Arc 34">
+                <a:extLst>
+                  <a:ext uri="{FF2B5EF4-FFF2-40B4-BE49-F238E27FC236}">
+                    <a16:creationId xmlns:a16="http://schemas.microsoft.com/office/drawing/2014/main" id="{F666ACC0-FF61-1B46-AEFC-F2F7CF34B73D}"/>
+                  </a:ext>
+                </a:extLst>
+              </p:cNvPr>
+              <p:cNvSpPr/>
+              <p:nvPr/>
+            </p:nvSpPr>
+            <p:spPr>
+              <a:xfrm rot="18941501">
+                <a:off x="3153747" y="2382820"/>
+                <a:ext cx="736611" cy="736611"/>
+              </a:xfrm>
+              <a:prstGeom prst="arc">
+                <a:avLst/>
+              </a:prstGeom>
+              <a:ln w="28575">
+                <a:solidFill>
+                  <a:schemeClr val="tx1"/>
+                </a:solidFill>
+              </a:ln>
+            </p:spPr>
+            <p:style>
+              <a:lnRef idx="1">
+                <a:schemeClr val="accent1"/>
+              </a:lnRef>
+              <a:fillRef idx="0">
+                <a:schemeClr val="accent1"/>
+              </a:fillRef>
+              <a:effectRef idx="0">
+                <a:schemeClr val="accent1"/>
+              </a:effectRef>
+              <a:fontRef idx="minor">
+                <a:schemeClr val="tx1"/>
+              </a:fontRef>
+            </p:style>
+            <p:txBody>
+              <a:bodyPr rtlCol="0" anchor="ctr"/>
+              <a:lstStyle/>
+              <a:p>
+                <a:pPr algn="ctr"/>
+                <a:endParaRPr lang="fr-FR" sz="1000"/>
+              </a:p>
+            </p:txBody>
+          </p:sp>
+          <p:sp>
+            <p:nvSpPr>
+              <p:cNvPr id="36" name="Arc 35">
+                <a:extLst>
+                  <a:ext uri="{FF2B5EF4-FFF2-40B4-BE49-F238E27FC236}">
+                    <a16:creationId xmlns:a16="http://schemas.microsoft.com/office/drawing/2014/main" id="{0E09215A-89A9-344A-93D3-C254ADE7A6F7}"/>
+                  </a:ext>
+                </a:extLst>
+              </p:cNvPr>
+              <p:cNvSpPr/>
+              <p:nvPr/>
+            </p:nvSpPr>
+            <p:spPr>
+              <a:xfrm rot="18394680">
+                <a:off x="3153747" y="2550772"/>
+                <a:ext cx="736611" cy="736611"/>
+              </a:xfrm>
+              <a:prstGeom prst="arc">
+                <a:avLst/>
+              </a:prstGeom>
+              <a:ln w="28575">
+                <a:solidFill>
+                  <a:schemeClr val="tx1"/>
+                </a:solidFill>
+              </a:ln>
+            </p:spPr>
+            <p:style>
+              <a:lnRef idx="1">
+                <a:schemeClr val="accent1"/>
+              </a:lnRef>
+              <a:fillRef idx="0">
+                <a:schemeClr val="accent1"/>
+              </a:fillRef>
+              <a:effectRef idx="0">
+                <a:schemeClr val="accent1"/>
+              </a:effectRef>
+              <a:fontRef idx="minor">
+                <a:schemeClr val="tx1"/>
+              </a:fontRef>
+            </p:style>
+            <p:txBody>
+              <a:bodyPr rtlCol="0" anchor="ctr"/>
+              <a:lstStyle/>
+              <a:p>
+                <a:pPr algn="ctr"/>
+                <a:endParaRPr lang="fr-FR" sz="1000"/>
+              </a:p>
+            </p:txBody>
+          </p:sp>
+          <p:sp>
+            <p:nvSpPr>
+              <p:cNvPr id="37" name="Arc 36">
+                <a:extLst>
+                  <a:ext uri="{FF2B5EF4-FFF2-40B4-BE49-F238E27FC236}">
+                    <a16:creationId xmlns:a16="http://schemas.microsoft.com/office/drawing/2014/main" id="{8B72436B-F811-9B48-A13F-974B879A42C9}"/>
+                  </a:ext>
+                </a:extLst>
+              </p:cNvPr>
+              <p:cNvSpPr/>
+              <p:nvPr/>
+            </p:nvSpPr>
+            <p:spPr>
+              <a:xfrm rot="17674455">
+                <a:off x="3153747" y="2746715"/>
+                <a:ext cx="736611" cy="736611"/>
+              </a:xfrm>
+              <a:prstGeom prst="arc">
+                <a:avLst/>
+              </a:prstGeom>
+              <a:ln w="28575">
+                <a:solidFill>
+                  <a:schemeClr val="tx1"/>
+                </a:solidFill>
+              </a:ln>
+            </p:spPr>
+            <p:style>
+              <a:lnRef idx="1">
+                <a:schemeClr val="accent1"/>
+              </a:lnRef>
+              <a:fillRef idx="0">
+                <a:schemeClr val="accent1"/>
+              </a:fillRef>
+              <a:effectRef idx="0">
+                <a:schemeClr val="accent1"/>
+              </a:effectRef>
+              <a:fontRef idx="minor">
+                <a:schemeClr val="tx1"/>
+              </a:fontRef>
+            </p:style>
+            <p:txBody>
+              <a:bodyPr rtlCol="0" anchor="ctr"/>
+              <a:lstStyle/>
+              <a:p>
+                <a:pPr algn="ctr"/>
+                <a:endParaRPr lang="fr-FR" sz="1000"/>
+              </a:p>
+            </p:txBody>
+          </p:sp>
+        </p:grpSp>
+      </p:grpSp>
+      <p:sp>
+        <p:nvSpPr>
+          <p:cNvPr id="40" name="Arc 39">
+            <a:extLst>
+              <a:ext uri="{FF2B5EF4-FFF2-40B4-BE49-F238E27FC236}">
+                <a16:creationId xmlns:a16="http://schemas.microsoft.com/office/drawing/2014/main" id="{5AD60BDF-850D-FE45-B327-348190E5546C}"/>
+              </a:ext>
+            </a:extLst>
+          </p:cNvPr>
+          <p:cNvSpPr/>
+          <p:nvPr/>
+        </p:nvSpPr>
+        <p:spPr>
+          <a:xfrm>
+            <a:off x="7982371" y="4043939"/>
+            <a:ext cx="924463" cy="632123"/>
+          </a:xfrm>
+          <a:prstGeom prst="arc">
+            <a:avLst>
+              <a:gd name="adj1" fmla="val 13490468"/>
+              <a:gd name="adj2" fmla="val 21549927"/>
+            </a:avLst>
+          </a:prstGeom>
+          <a:ln w="38100">
+            <a:solidFill>
+              <a:schemeClr val="tx1"/>
+            </a:solidFill>
+            <a:headEnd type="none" w="med" len="med"/>
+            <a:tailEnd type="triangle" w="lg" len="lg"/>
+          </a:ln>
+        </p:spPr>
+        <p:style>
+          <a:lnRef idx="1">
+            <a:schemeClr val="accent1"/>
+          </a:lnRef>
+          <a:fillRef idx="0">
+            <a:schemeClr val="accent1"/>
+          </a:fillRef>
+          <a:effectRef idx="0">
+            <a:schemeClr val="accent1"/>
+          </a:effectRef>
+          <a:fontRef idx="minor">
+            <a:schemeClr val="tx1"/>
+          </a:fontRef>
+        </p:style>
+        <p:txBody>
+          <a:bodyPr rtlCol="0" anchor="ctr"/>
+          <a:lstStyle/>
+          <a:p>
+            <a:pPr algn="ctr"/>
+            <a:endParaRPr lang="fr-FR"/>
+          </a:p>
+        </p:txBody>
+      </p:sp>
+      <p:sp>
+        <p:nvSpPr>
+          <p:cNvPr id="42" name="Arc 41">
+            <a:extLst>
+              <a:ext uri="{FF2B5EF4-FFF2-40B4-BE49-F238E27FC236}">
+                <a16:creationId xmlns:a16="http://schemas.microsoft.com/office/drawing/2014/main" id="{8F738D51-4751-6B4B-8CCF-6CC473596C1B}"/>
+              </a:ext>
+            </a:extLst>
+          </p:cNvPr>
+          <p:cNvSpPr/>
+          <p:nvPr/>
+        </p:nvSpPr>
+        <p:spPr>
+          <a:xfrm rot="1583111">
+            <a:off x="7950003" y="4213871"/>
+            <a:ext cx="924463" cy="632123"/>
+          </a:xfrm>
+          <a:prstGeom prst="arc">
+            <a:avLst>
+              <a:gd name="adj1" fmla="val 13490468"/>
+              <a:gd name="adj2" fmla="val 21549927"/>
+            </a:avLst>
+          </a:prstGeom>
+          <a:ln w="38100">
+            <a:solidFill>
+              <a:schemeClr val="tx1"/>
+            </a:solidFill>
+            <a:headEnd type="none" w="med" len="med"/>
+            <a:tailEnd type="triangle" w="lg" len="lg"/>
+          </a:ln>
+        </p:spPr>
+        <p:style>
+          <a:lnRef idx="1">
+            <a:schemeClr val="accent1"/>
+          </a:lnRef>
+          <a:fillRef idx="0">
+            <a:schemeClr val="accent1"/>
+          </a:fillRef>
+          <a:effectRef idx="0">
+            <a:schemeClr val="accent1"/>
+          </a:effectRef>
+          <a:fontRef idx="minor">
+            <a:schemeClr val="tx1"/>
+          </a:fontRef>
+        </p:style>
+        <p:txBody>
+          <a:bodyPr rtlCol="0" anchor="ctr"/>
+          <a:lstStyle/>
+          <a:p>
+            <a:pPr algn="ctr"/>
+            <a:endParaRPr lang="fr-FR"/>
+          </a:p>
+        </p:txBody>
+      </p:sp>
+      <p:sp>
+        <p:nvSpPr>
+          <p:cNvPr id="4" name="Espace réservé du numéro de diapositive 3">
+            <a:extLst>
+              <a:ext uri="{FF2B5EF4-FFF2-40B4-BE49-F238E27FC236}">
+                <a16:creationId xmlns:a16="http://schemas.microsoft.com/office/drawing/2014/main" id="{B4966007-E810-9939-09C7-7953205D3271}"/>
+              </a:ext>
+            </a:extLst>
+          </p:cNvPr>
+          <p:cNvSpPr>
+            <a:spLocks noGrp="1"/>
+          </p:cNvSpPr>
+          <p:nvPr>
+            <p:ph type="sldNum" sz="quarter" idx="4"/>
+          </p:nvPr>
+        </p:nvSpPr>
+        <p:spPr/>
+        <p:txBody>
+          <a:bodyPr/>
+          <a:lstStyle/>
+          <a:p>
+            <a:fld id="{33C783E2-4793-4F48-A271-51A73CC37D74}" type="slidenum">
+              <a:rPr lang="fr-FR" smtClean="0"/>
+              <a:t>30</a:t>
+            </a:fld>
+            <a:endParaRPr lang="fr-FR"/>
+          </a:p>
+        </p:txBody>
+      </p:sp>
+      <p:sp>
+        <p:nvSpPr>
+          <p:cNvPr id="5" name="Repere de section"/>
+          <p:cNvSpPr txBox="1"/>
+          <p:nvPr/>
+        </p:nvSpPr>
+        <p:spPr>
+          <a:xfrm>
+            <a:off x="6583680" y="6382512"/>
+            <a:ext cx="4480560" cy="320040"/>
+          </a:xfrm>
+          <a:prstGeom prst="rect">
+            <a:avLst/>
+          </a:prstGeom>
+          <a:noFill/>
+        </p:spPr>
+        <p:txBody>
+          <a:bodyPr wrap="none" tIns="0" bIns="0">
+            <a:spAutoFit/>
+          </a:bodyPr>
+          <a:lstStyle/>
+          <a:p>
+            <a:pPr algn="r"/>
+            <a:r>
+              <a:rPr sz="1100">
+                <a:solidFill>
+                  <a:srgbClr val="BCBEC4"/>
+                </a:solidFill>
+              </a:rPr>
+              <a:t>FX1 · </a:t>
+            </a:r>
+            <a:r>
+              <a:rPr sz="1100" b="1">
+                <a:solidFill>
+                  <a:schemeClr val="accent4"/>
+                </a:solidFill>
+              </a:rPr>
+              <a:t>5. La propagation</a:t>
+            </a:r>
+          </a:p>
+        </p:txBody>
+      </p:sp>
+    </p:spTree>
+  </p:cSld>
+  <p:clrMapOvr>
+    <a:masterClrMapping/>
+  </p:clrMapOvr>
+  <p:timing>
+    <p:tnLst>
+      <p:par>
+        <p:cTn id="1" dur="indefinite" restart="never" nodeType="tmRoot">
+          <p:childTnLst>
+            <p:seq concurrent="1" nextAc="seek">
+              <p:cTn id="2" dur="indefinite" nodeType="mainSeq">
+                <p:childTnLst>
+                  <p:par>
+                    <p:cTn id="3" fill="hold">
+                      <p:stCondLst>
+                        <p:cond delay="indefinite"/>
+                      </p:stCondLst>
+                      <p:childTnLst>
+                        <p:par>
+                          <p:cTn id="4" fill="hold">
+                            <p:stCondLst>
+                              <p:cond delay="0"/>
+                            </p:stCondLst>
+                            <p:childTnLst>
+                              <p:par>
+                                <p:cTn id="5" presetID="22" presetClass="entr" presetSubtype="1" fill="hold" nodeType="clickEffect">
+                                  <p:stCondLst>
+                                    <p:cond delay="0"/>
+                                  </p:stCondLst>
+                                  <p:childTnLst>
+                                    <p:set>
+                                      <p:cBhvr>
+                                        <p:cTn id="6" dur="1" fill="hold">
+                                          <p:stCondLst>
+                                            <p:cond delay="0"/>
+                                          </p:stCondLst>
+                                        </p:cTn>
+                                        <p:tgtEl>
+                                          <p:spTgt spid="13"/>
+                                        </p:tgtEl>
+                                        <p:attrNameLst>
+                                          <p:attrName>style.visibility</p:attrName>
+                                        </p:attrNameLst>
+                                      </p:cBhvr>
+                                      <p:to>
+                                        <p:strVal val="visible"/>
+                                      </p:to>
+                                    </p:set>
+                                    <p:animEffect transition="in" filter="wipe(up)">
+                                      <p:cBhvr>
+                                        <p:cTn id="7" dur="1000"/>
+                                        <p:tgtEl>
+                                          <p:spTgt spid="13"/>
+                                        </p:tgtEl>
+                                      </p:cBhvr>
+                                    </p:animEffect>
+                                  </p:childTnLst>
+                                </p:cTn>
+                              </p:par>
+                              <p:par>
+                                <p:cTn id="8" presetID="22" presetClass="entr" presetSubtype="8" fill="hold" nodeType="withEffect">
+                                  <p:stCondLst>
+                                    <p:cond delay="0"/>
+                                  </p:stCondLst>
+                                  <p:childTnLst>
+                                    <p:set>
+                                      <p:cBhvr>
+                                        <p:cTn id="9" dur="1" fill="hold">
+                                          <p:stCondLst>
+                                            <p:cond delay="0"/>
+                                          </p:stCondLst>
+                                        </p:cTn>
+                                        <p:tgtEl>
+                                          <p:spTgt spid="22"/>
+                                        </p:tgtEl>
+                                        <p:attrNameLst>
+                                          <p:attrName>style.visibility</p:attrName>
+                                        </p:attrNameLst>
+                                      </p:cBhvr>
+                                      <p:to>
+                                        <p:strVal val="visible"/>
+                                      </p:to>
+                                    </p:set>
+                                    <p:animEffect transition="in" filter="wipe(left)">
+                                      <p:cBhvr>
+                                        <p:cTn id="10" dur="500"/>
+                                        <p:tgtEl>
+                                          <p:spTgt spid="22"/>
+                                        </p:tgtEl>
+                                      </p:cBhvr>
+                                    </p:animEffect>
+                                  </p:childTnLst>
+                                </p:cTn>
+                              </p:par>
+                              <p:par>
+                                <p:cTn id="11" presetID="22" presetClass="entr" presetSubtype="8" fill="hold" nodeType="withEffect">
+                                  <p:stCondLst>
+                                    <p:cond delay="0"/>
+                                  </p:stCondLst>
+                                  <p:childTnLst>
+                                    <p:set>
+                                      <p:cBhvr>
+                                        <p:cTn id="12" dur="1" fill="hold">
+                                          <p:stCondLst>
+                                            <p:cond delay="0"/>
+                                          </p:stCondLst>
+                                        </p:cTn>
+                                        <p:tgtEl>
+                                          <p:spTgt spid="25"/>
+                                        </p:tgtEl>
+                                        <p:attrNameLst>
+                                          <p:attrName>style.visibility</p:attrName>
+                                        </p:attrNameLst>
+                                      </p:cBhvr>
+                                      <p:to>
+                                        <p:strVal val="visible"/>
+                                      </p:to>
+                                    </p:set>
+                                    <p:animEffect transition="in" filter="wipe(left)">
+                                      <p:cBhvr>
+                                        <p:cTn id="13" dur="500"/>
+                                        <p:tgtEl>
+                                          <p:spTgt spid="25"/>
+                                        </p:tgtEl>
+                                      </p:cBhvr>
+                                    </p:animEffect>
+                                  </p:childTnLst>
+                                </p:cTn>
+                              </p:par>
+                              <p:par>
+                                <p:cTn id="14" presetID="22" presetClass="entr" presetSubtype="8" fill="hold" nodeType="withEffect">
+                                  <p:stCondLst>
+                                    <p:cond delay="0"/>
+                                  </p:stCondLst>
+                                  <p:childTnLst>
+                                    <p:set>
+                                      <p:cBhvr>
+                                        <p:cTn id="15" dur="1" fill="hold">
+                                          <p:stCondLst>
+                                            <p:cond delay="0"/>
+                                          </p:stCondLst>
+                                        </p:cTn>
+                                        <p:tgtEl>
+                                          <p:spTgt spid="26"/>
+                                        </p:tgtEl>
+                                        <p:attrNameLst>
+                                          <p:attrName>style.visibility</p:attrName>
+                                        </p:attrNameLst>
+                                      </p:cBhvr>
+                                      <p:to>
+                                        <p:strVal val="visible"/>
+                                      </p:to>
+                                    </p:set>
+                                    <p:animEffect transition="in" filter="wipe(left)">
+                                      <p:cBhvr>
+                                        <p:cTn id="16" dur="500"/>
+                                        <p:tgtEl>
+                                          <p:spTgt spid="26"/>
+                                        </p:tgtEl>
+                                      </p:cBhvr>
+                                    </p:animEffect>
+                                  </p:childTnLst>
+                                </p:cTn>
+                              </p:par>
+                              <p:par>
+                                <p:cTn id="17" presetID="22" presetClass="entr" presetSubtype="8" fill="hold" nodeType="withEffect">
+                                  <p:stCondLst>
+                                    <p:cond delay="0"/>
+                                  </p:stCondLst>
+                                  <p:childTnLst>
+                                    <p:set>
+                                      <p:cBhvr>
+                                        <p:cTn id="18" dur="1" fill="hold">
+                                          <p:stCondLst>
+                                            <p:cond delay="0"/>
+                                          </p:stCondLst>
+                                        </p:cTn>
+                                        <p:tgtEl>
+                                          <p:spTgt spid="27"/>
+                                        </p:tgtEl>
+                                        <p:attrNameLst>
+                                          <p:attrName>style.visibility</p:attrName>
+                                        </p:attrNameLst>
+                                      </p:cBhvr>
+                                      <p:to>
+                                        <p:strVal val="visible"/>
+                                      </p:to>
+                                    </p:set>
+                                    <p:animEffect transition="in" filter="wipe(left)">
+                                      <p:cBhvr>
+                                        <p:cTn id="19" dur="500"/>
+                                        <p:tgtEl>
+                                          <p:spTgt spid="27"/>
+                                        </p:tgtEl>
+                                      </p:cBhvr>
+                                    </p:animEffect>
+                                  </p:childTnLst>
+                                </p:cTn>
+                              </p:par>
+                              <p:par>
+                                <p:cTn id="20" presetID="22" presetClass="entr" presetSubtype="8" fill="hold" nodeType="withEffect">
+                                  <p:stCondLst>
+                                    <p:cond delay="0"/>
+                                  </p:stCondLst>
+                                  <p:childTnLst>
+                                    <p:set>
+                                      <p:cBhvr>
+                                        <p:cTn id="21" dur="1" fill="hold">
+                                          <p:stCondLst>
+                                            <p:cond delay="0"/>
+                                          </p:stCondLst>
+                                        </p:cTn>
+                                        <p:tgtEl>
+                                          <p:spTgt spid="29"/>
+                                        </p:tgtEl>
+                                        <p:attrNameLst>
+                                          <p:attrName>style.visibility</p:attrName>
+                                        </p:attrNameLst>
+                                      </p:cBhvr>
+                                      <p:to>
+                                        <p:strVal val="visible"/>
+                                      </p:to>
+                                    </p:set>
+                                    <p:animEffect transition="in" filter="wipe(left)">
+                                      <p:cBhvr>
+                                        <p:cTn id="22" dur="500"/>
+                                        <p:tgtEl>
+                                          <p:spTgt spid="29"/>
+                                        </p:tgtEl>
+                                      </p:cBhvr>
+                                    </p:animEffect>
+                                  </p:childTnLst>
+                                </p:cTn>
+                              </p:par>
+                            </p:childTnLst>
+                          </p:cTn>
+                        </p:par>
+                      </p:childTnLst>
+                    </p:cTn>
+                  </p:par>
+                  <p:par>
+                    <p:cTn id="23" fill="hold">
+                      <p:stCondLst>
+                        <p:cond delay="indefinite"/>
+                      </p:stCondLst>
+                      <p:childTnLst>
+                        <p:par>
+                          <p:cTn id="24" fill="hold">
+                            <p:stCondLst>
+                              <p:cond delay="0"/>
+                            </p:stCondLst>
+                            <p:childTnLst>
+                              <p:par>
+                                <p:cTn id="25" presetID="22" presetClass="entr" presetSubtype="8" fill="hold" grpId="0" nodeType="clickEffect">
+                                  <p:stCondLst>
+                                    <p:cond delay="0"/>
+                                  </p:stCondLst>
+                                  <p:childTnLst>
+                                    <p:set>
+                                      <p:cBhvr>
+                                        <p:cTn id="26" dur="1" fill="hold">
+                                          <p:stCondLst>
+                                            <p:cond delay="0"/>
+                                          </p:stCondLst>
+                                        </p:cTn>
+                                        <p:tgtEl>
+                                          <p:spTgt spid="14"/>
+                                        </p:tgtEl>
+                                        <p:attrNameLst>
+                                          <p:attrName>style.visibility</p:attrName>
+                                        </p:attrNameLst>
+                                      </p:cBhvr>
+                                      <p:to>
+                                        <p:strVal val="visible"/>
+                                      </p:to>
+                                    </p:set>
+                                    <p:animEffect transition="in" filter="wipe(left)">
+                                      <p:cBhvr>
+                                        <p:cTn id="27" dur="500"/>
+                                        <p:tgtEl>
+                                          <p:spTgt spid="14"/>
+                                        </p:tgtEl>
+                                      </p:cBhvr>
+                                    </p:animEffect>
+                                  </p:childTnLst>
+                                </p:cTn>
+                              </p:par>
+                            </p:childTnLst>
+                          </p:cTn>
+                        </p:par>
+                        <p:par>
+                          <p:cTn id="28" fill="hold">
+                            <p:stCondLst>
+                              <p:cond delay="500"/>
+                            </p:stCondLst>
+                            <p:childTnLst>
+                              <p:par>
+                                <p:cTn id="29" presetID="12" presetClass="entr" presetSubtype="1" fill="hold" grpId="0" nodeType="afterEffect">
+                                  <p:stCondLst>
+                                    <p:cond delay="0"/>
+                                  </p:stCondLst>
+                                  <p:childTnLst>
+                                    <p:set>
+                                      <p:cBhvr>
+                                        <p:cTn id="30" dur="1" fill="hold">
+                                          <p:stCondLst>
+                                            <p:cond delay="0"/>
+                                          </p:stCondLst>
+                                        </p:cTn>
+                                        <p:tgtEl>
+                                          <p:spTgt spid="21"/>
+                                        </p:tgtEl>
+                                        <p:attrNameLst>
+                                          <p:attrName>style.visibility</p:attrName>
+                                        </p:attrNameLst>
+                                      </p:cBhvr>
+                                      <p:to>
+                                        <p:strVal val="visible"/>
+                                      </p:to>
+                                    </p:set>
+                                    <p:anim calcmode="lin" valueType="num">
+                                      <p:cBhvr additive="base">
+                                        <p:cTn id="31" dur="500"/>
+                                        <p:tgtEl>
+                                          <p:spTgt spid="21"/>
+                                        </p:tgtEl>
+                                        <p:attrNameLst>
+                                          <p:attrName>ppt_y</p:attrName>
+                                        </p:attrNameLst>
+                                      </p:cBhvr>
+                                      <p:tavLst>
+                                        <p:tav tm="0">
+                                          <p:val>
+                                            <p:strVal val="#ppt_y-#ppt_h*1.125000"/>
+                                          </p:val>
+                                        </p:tav>
+                                        <p:tav tm="100000">
+                                          <p:val>
+                                            <p:strVal val="#ppt_y"/>
+                                          </p:val>
+                                        </p:tav>
+                                      </p:tavLst>
+                                    </p:anim>
+                                    <p:animEffect transition="in" filter="wipe(down)">
+                                      <p:cBhvr>
+                                        <p:cTn id="32" dur="500"/>
+                                        <p:tgtEl>
+                                          <p:spTgt spid="21"/>
+                                        </p:tgtEl>
+                                      </p:cBhvr>
+                                    </p:animEffect>
+                                  </p:childTnLst>
+                                </p:cTn>
+                              </p:par>
+                              <p:par>
+                                <p:cTn id="33" presetID="22" presetClass="entr" presetSubtype="8" fill="hold" nodeType="withEffect">
+                                  <p:stCondLst>
+                                    <p:cond delay="0"/>
+                                  </p:stCondLst>
+                                  <p:childTnLst>
+                                    <p:set>
+                                      <p:cBhvr>
+                                        <p:cTn id="34" dur="1" fill="hold">
+                                          <p:stCondLst>
+                                            <p:cond delay="0"/>
+                                          </p:stCondLst>
+                                        </p:cTn>
+                                        <p:tgtEl>
+                                          <p:spTgt spid="17"/>
+                                        </p:tgtEl>
+                                        <p:attrNameLst>
+                                          <p:attrName>style.visibility</p:attrName>
+                                        </p:attrNameLst>
+                                      </p:cBhvr>
+                                      <p:to>
+                                        <p:strVal val="visible"/>
+                                      </p:to>
+                                    </p:set>
+                                    <p:animEffect transition="in" filter="wipe(left)">
+                                      <p:cBhvr>
+                                        <p:cTn id="35" dur="500"/>
+                                        <p:tgtEl>
+                                          <p:spTgt spid="17"/>
+                                        </p:tgtEl>
+                                      </p:cBhvr>
+                                    </p:animEffect>
+                                  </p:childTnLst>
+                                </p:cTn>
+                              </p:par>
+                            </p:childTnLst>
+                          </p:cTn>
+                        </p:par>
+                        <p:par>
+                          <p:cTn id="36" fill="hold">
+                            <p:stCondLst>
+                              <p:cond delay="1000"/>
+                            </p:stCondLst>
+                            <p:childTnLst>
+                              <p:par>
+                                <p:cTn id="37" presetID="22" presetClass="entr" presetSubtype="8" fill="hold" grpId="0" nodeType="afterEffect">
+                                  <p:stCondLst>
+                                    <p:cond delay="500"/>
+                                  </p:stCondLst>
+                                  <p:childTnLst>
+                                    <p:set>
+                                      <p:cBhvr>
+                                        <p:cTn id="38" dur="1" fill="hold">
+                                          <p:stCondLst>
+                                            <p:cond delay="0"/>
+                                          </p:stCondLst>
+                                        </p:cTn>
+                                        <p:tgtEl>
+                                          <p:spTgt spid="15"/>
+                                        </p:tgtEl>
+                                        <p:attrNameLst>
+                                          <p:attrName>style.visibility</p:attrName>
+                                        </p:attrNameLst>
+                                      </p:cBhvr>
+                                      <p:to>
+                                        <p:strVal val="visible"/>
+                                      </p:to>
+                                    </p:set>
+                                    <p:animEffect transition="in" filter="wipe(left)">
+                                      <p:cBhvr>
+                                        <p:cTn id="39" dur="500"/>
+                                        <p:tgtEl>
+                                          <p:spTgt spid="15"/>
+                                        </p:tgtEl>
+                                      </p:cBhvr>
+                                    </p:animEffect>
+                                  </p:childTnLst>
+                                </p:cTn>
+                              </p:par>
+                              <p:par>
+                                <p:cTn id="40" presetID="22" presetClass="entr" presetSubtype="8" fill="hold" nodeType="withEffect">
+                                  <p:stCondLst>
+                                    <p:cond delay="500"/>
+                                  </p:stCondLst>
+                                  <p:childTnLst>
+                                    <p:set>
+                                      <p:cBhvr>
+                                        <p:cTn id="41" dur="1" fill="hold">
+                                          <p:stCondLst>
+                                            <p:cond delay="0"/>
+                                          </p:stCondLst>
+                                        </p:cTn>
+                                        <p:tgtEl>
+                                          <p:spTgt spid="18"/>
+                                        </p:tgtEl>
+                                        <p:attrNameLst>
+                                          <p:attrName>style.visibility</p:attrName>
+                                        </p:attrNameLst>
+                                      </p:cBhvr>
+                                      <p:to>
+                                        <p:strVal val="visible"/>
+                                      </p:to>
+                                    </p:set>
+                                    <p:animEffect transition="in" filter="wipe(left)">
+                                      <p:cBhvr>
+                                        <p:cTn id="42" dur="500"/>
+                                        <p:tgtEl>
+                                          <p:spTgt spid="18"/>
+                                        </p:tgtEl>
+                                      </p:cBhvr>
+                                    </p:animEffect>
+                                  </p:childTnLst>
+                                </p:cTn>
+                              </p:par>
+                            </p:childTnLst>
+                          </p:cTn>
+                        </p:par>
+                      </p:childTnLst>
+                    </p:cTn>
+                  </p:par>
+                  <p:par>
+                    <p:cTn id="43" fill="hold">
+                      <p:stCondLst>
+                        <p:cond delay="indefinite"/>
+                      </p:stCondLst>
+                      <p:childTnLst>
+                        <p:par>
+                          <p:cTn id="44" fill="hold">
+                            <p:stCondLst>
+                              <p:cond delay="0"/>
+                            </p:stCondLst>
+                            <p:childTnLst>
+                              <p:par>
+                                <p:cTn id="45" presetID="1" presetClass="entr" presetSubtype="0" fill="hold" nodeType="clickEffect">
+                                  <p:stCondLst>
+                                    <p:cond delay="0"/>
+                                  </p:stCondLst>
+                                  <p:childTnLst>
+                                    <p:set>
+                                      <p:cBhvr>
+                                        <p:cTn id="46" dur="1" fill="hold">
+                                          <p:stCondLst>
+                                            <p:cond delay="0"/>
+                                          </p:stCondLst>
+                                        </p:cTn>
+                                        <p:tgtEl>
+                                          <p:spTgt spid="32"/>
+                                        </p:tgtEl>
+                                        <p:attrNameLst>
+                                          <p:attrName>style.visibility</p:attrName>
+                                        </p:attrNameLst>
+                                      </p:cBhvr>
+                                      <p:to>
+                                        <p:strVal val="visible"/>
+                                      </p:to>
+                                    </p:set>
+                                  </p:childTnLst>
+                                </p:cTn>
+                              </p:par>
+                              <p:par>
+                                <p:cTn id="47" presetID="0" presetClass="path" presetSubtype="0" accel="50000" decel="50000" fill="hold" nodeType="withEffect">
+                                  <p:stCondLst>
+                                    <p:cond delay="0"/>
+                                  </p:stCondLst>
+                                  <p:childTnLst>
+                                    <p:animMotion origin="layout" path="M -0.07326 -0.33681 C -0.0743 -0.34607 -0.07535 -0.35533 -0.07239 -0.30394 C -0.06944 -0.25232 -0.06875 -0.08357 -0.05573 -0.02778 C -0.04253 0.028 -0.00451 0.01689 0.00625 0.03125 " pathEditMode="fixed" ptsTypes="AAAA">
+                                      <p:cBhvr>
+                                        <p:cTn id="48" dur="2000" fill="hold"/>
+                                        <p:tgtEl>
+                                          <p:spTgt spid="32"/>
+                                        </p:tgtEl>
+                                        <p:attrNameLst>
+                                          <p:attrName>ppt_x</p:attrName>
+                                          <p:attrName>ppt_y</p:attrName>
+                                        </p:attrNameLst>
+                                      </p:cBhvr>
+                                    </p:animMotion>
+                                  </p:childTnLst>
+                                </p:cTn>
+                              </p:par>
+                            </p:childTnLst>
+                          </p:cTn>
+                        </p:par>
+                        <p:par>
+                          <p:cTn id="49" fill="hold">
+                            <p:stCondLst>
+                              <p:cond delay="2000"/>
+                            </p:stCondLst>
+                            <p:childTnLst>
+                              <p:par>
+                                <p:cTn id="50" presetID="22" presetClass="entr" presetSubtype="1" fill="hold" grpId="0" nodeType="afterEffect">
+                                  <p:stCondLst>
+                                    <p:cond delay="0"/>
+                                  </p:stCondLst>
+                                  <p:childTnLst>
+                                    <p:set>
+                                      <p:cBhvr>
+                                        <p:cTn id="51" dur="1" fill="hold">
+                                          <p:stCondLst>
+                                            <p:cond delay="0"/>
+                                          </p:stCondLst>
+                                        </p:cTn>
+                                        <p:tgtEl>
+                                          <p:spTgt spid="40"/>
+                                        </p:tgtEl>
+                                        <p:attrNameLst>
+                                          <p:attrName>style.visibility</p:attrName>
+                                        </p:attrNameLst>
+                                      </p:cBhvr>
+                                      <p:to>
+                                        <p:strVal val="visible"/>
+                                      </p:to>
+                                    </p:set>
+                                    <p:animEffect transition="in" filter="wipe(up)">
+                                      <p:cBhvr>
+                                        <p:cTn id="52" dur="500"/>
+                                        <p:tgtEl>
+                                          <p:spTgt spid="40"/>
+                                        </p:tgtEl>
+                                      </p:cBhvr>
+                                    </p:animEffect>
+                                  </p:childTnLst>
+                                </p:cTn>
+                              </p:par>
+                            </p:childTnLst>
+                          </p:cTn>
+                        </p:par>
+                        <p:par>
+                          <p:cTn id="53" fill="hold">
+                            <p:stCondLst>
+                              <p:cond delay="2500"/>
+                            </p:stCondLst>
+                            <p:childTnLst>
+                              <p:par>
+                                <p:cTn id="54" presetID="22" presetClass="entr" presetSubtype="1" fill="hold" grpId="0" nodeType="afterEffect">
+                                  <p:stCondLst>
+                                    <p:cond delay="0"/>
+                                  </p:stCondLst>
+                                  <p:childTnLst>
+                                    <p:set>
+                                      <p:cBhvr>
+                                        <p:cTn id="55" dur="1" fill="hold">
+                                          <p:stCondLst>
+                                            <p:cond delay="0"/>
+                                          </p:stCondLst>
+                                        </p:cTn>
+                                        <p:tgtEl>
+                                          <p:spTgt spid="42"/>
+                                        </p:tgtEl>
+                                        <p:attrNameLst>
+                                          <p:attrName>style.visibility</p:attrName>
+                                        </p:attrNameLst>
+                                      </p:cBhvr>
+                                      <p:to>
+                                        <p:strVal val="visible"/>
+                                      </p:to>
+                                    </p:set>
+                                    <p:animEffect transition="in" filter="wipe(up)">
+                                      <p:cBhvr>
+                                        <p:cTn id="56" dur="500"/>
+                                        <p:tgtEl>
+                                          <p:spTgt spid="42"/>
+                                        </p:tgtEl>
+                                      </p:cBhvr>
+                                    </p:animEffect>
+                                  </p:childTnLst>
+                                </p:cTn>
+                              </p:par>
+                            </p:childTnLst>
+                          </p:cTn>
+                        </p:par>
+                      </p:childTnLst>
+                    </p:cTn>
+                  </p:par>
+                </p:childTnLst>
+              </p:cTn>
+              <p:prevCondLst>
+                <p:cond evt="onPrev" delay="0">
+                  <p:tgtEl>
+                    <p:sldTgt/>
+                  </p:tgtEl>
+                </p:cond>
+              </p:prevCondLst>
+              <p:nextCondLst>
+                <p:cond evt="onNext" delay="0">
+                  <p:tgtEl>
+                    <p:sldTgt/>
+                  </p:tgtEl>
+                </p:cond>
+              </p:nextCondLst>
+            </p:seq>
+          </p:childTnLst>
+        </p:cTn>
+      </p:par>
+    </p:tnLst>
+    <p:bldLst>
+      <p:bldP spid="14" grpId="0" animBg="1"/>
+      <p:bldP spid="15" grpId="0" animBg="1"/>
+      <p:bldP spid="21" grpId="0" animBg="1"/>
+      <p:bldP spid="40" grpId="0" animBg="1"/>
+      <p:bldP spid="42" grpId="0" animBg="1"/>
+    </p:bldLst>
+  </p:timing>
+</p:sld>
+</file>
+
+<file path=ppt/slides/slide31.xml><?xml version="1.0" encoding="utf-8"?>
+<p:sld xmlns:a="http://schemas.openxmlformats.org/drawingml/2006/main" xmlns:r="http://schemas.openxmlformats.org/officeDocument/2006/relationships" xmlns:p="http://schemas.openxmlformats.org/presentationml/2006/main">
+  <p:cSld>
+    <p:spTree>
+      <p:nvGrpSpPr>
+        <p:cNvPr id="1" name=""/>
+        <p:cNvGrpSpPr/>
+        <p:nvPr/>
+      </p:nvGrpSpPr>
+      <p:grpSpPr>
+        <a:xfrm>
+          <a:off x="0" y="0"/>
+          <a:ext cx="0" cy="0"/>
+          <a:chOff x="0" y="0"/>
+          <a:chExt cx="0" cy="0"/>
+        </a:xfrm>
+      </p:grpSpPr>
+      <p:sp>
+        <p:nvSpPr>
+          <p:cNvPr id="2" name="Titre 1">
+            <a:extLst>
+              <a:ext uri="{FF2B5EF4-FFF2-40B4-BE49-F238E27FC236}">
+                <a16:creationId xmlns:a16="http://schemas.microsoft.com/office/drawing/2014/main" id="{83DE6083-8256-154A-B26F-2269D186C987}"/>
+              </a:ext>
+            </a:extLst>
+          </p:cNvPr>
+          <p:cNvSpPr>
+            <a:spLocks noGrp="1"/>
+          </p:cNvSpPr>
+          <p:nvPr>
+            <p:ph type="title"/>
+          </p:nvPr>
+        </p:nvSpPr>
+        <p:spPr/>
+        <p:txBody>
+          <a:bodyPr>
+            <a:normAutofit/>
+          </a:bodyPr>
+          <a:lstStyle/>
+          <a:p>
+            <a:r>
+              <a:rPr lang="fr-FR" dirty="0"/>
+              <a:t>Les </a:t>
+            </a:r>
+            <a:r>
+              <a:rPr lang="fr-FR" sz="4400" dirty="0" err="1">
+                <a:solidFill>
+                  <a:schemeClr val="accent4"/>
+                </a:solidFill>
+                <a:latin typeface="Consolas" panose="020B0609020204030204" pitchFamily="49" charset="0"/>
+                <a:cs typeface="Consolas" panose="020B0609020204030204" pitchFamily="49" charset="0"/>
+              </a:rPr>
+              <a:t>E</a:t>
+            </a:r>
+            <a:r>
+              <a:rPr lang="fr-FR" sz="4400" cap="none" dirty="0" err="1">
+                <a:solidFill>
+                  <a:schemeClr val="accent4"/>
+                </a:solidFill>
+                <a:latin typeface="Consolas" panose="020B0609020204030204" pitchFamily="49" charset="0"/>
+                <a:cs typeface="Consolas" panose="020B0609020204030204" pitchFamily="49" charset="0"/>
+              </a:rPr>
+              <a:t>vent</a:t>
+            </a:r>
+            <a:r>
+              <a:rPr lang="fr-FR" sz="4400" dirty="0" err="1">
+                <a:solidFill>
+                  <a:schemeClr val="accent4"/>
+                </a:solidFill>
+                <a:latin typeface="Consolas" panose="020B0609020204030204" pitchFamily="49" charset="0"/>
+                <a:cs typeface="Consolas" panose="020B0609020204030204" pitchFamily="49" charset="0"/>
+              </a:rPr>
+              <a:t>Filter</a:t>
+            </a:r>
+            <a:endParaRPr lang="fr-FR" dirty="0"/>
+          </a:p>
+        </p:txBody>
+      </p:sp>
+      <p:sp>
+        <p:nvSpPr>
+          <p:cNvPr id="3" name="Rectangle 2">
+            <a:extLst>
+              <a:ext uri="{FF2B5EF4-FFF2-40B4-BE49-F238E27FC236}">
+                <a16:creationId xmlns:a16="http://schemas.microsoft.com/office/drawing/2014/main" id="{790C4C52-7F42-2E4E-A436-82763CA856C4}"/>
+              </a:ext>
+            </a:extLst>
+          </p:cNvPr>
+          <p:cNvSpPr/>
+          <p:nvPr/>
+        </p:nvSpPr>
+        <p:spPr>
+          <a:xfrm>
+            <a:off x="841248" y="5870448"/>
+            <a:ext cx="5486400" cy="274320"/>
+          </a:xfrm>
+          <a:prstGeom prst="rect">
+            <a:avLst/>
+          </a:prstGeom>
+        </p:spPr>
+        <p:txBody>
+          <a:bodyPr wrap="square">
+            <a:spAutoFit/>
+          </a:bodyPr>
+          <a:lstStyle/>
+          <a:p>
+            <a:r>
+              <a:rPr lang="fr-FR" sz="1100" i="1" dirty="0"/>
+              <a:t>Source : </a:t>
+            </a:r>
+            <a:r>
+              <a:rPr sz="1100">
+                <a:hlinkClick r:id="rId3"/>
+              </a:rPr>
+              <a:t>Stack Overflow, question 25740103</a:t>
+            </a:r>
+            <a:endParaRPr lang="fr-FR" sz="1200" i="1" dirty="0"/>
+          </a:p>
+        </p:txBody>
+      </p:sp>
+      <p:grpSp>
+        <p:nvGrpSpPr>
+          <p:cNvPr id="13" name="Groupe 12">
+            <a:extLst>
+              <a:ext uri="{FF2B5EF4-FFF2-40B4-BE49-F238E27FC236}">
+                <a16:creationId xmlns:a16="http://schemas.microsoft.com/office/drawing/2014/main" id="{73E26F97-7D94-2143-B907-8C837FC3BD12}"/>
+              </a:ext>
+            </a:extLst>
+          </p:cNvPr>
+          <p:cNvGrpSpPr/>
+          <p:nvPr/>
+        </p:nvGrpSpPr>
+        <p:grpSpPr>
+          <a:xfrm>
+            <a:off x="7436208" y="2228470"/>
+            <a:ext cx="4005944" cy="3151241"/>
+            <a:chOff x="1665513" y="1772829"/>
+            <a:chExt cx="5018314" cy="3947613"/>
+          </a:xfrm>
+        </p:grpSpPr>
+        <p:sp>
+          <p:nvSpPr>
+            <p:cNvPr id="7" name="Rectangle : coins arrondis 6">
+              <a:extLst>
+                <a:ext uri="{FF2B5EF4-FFF2-40B4-BE49-F238E27FC236}">
+                  <a16:creationId xmlns:a16="http://schemas.microsoft.com/office/drawing/2014/main" id="{C164CF95-3D0A-8A47-BFBE-C85F0D5C7FB6}"/>
+                </a:ext>
+              </a:extLst>
+            </p:cNvPr>
+            <p:cNvSpPr/>
+            <p:nvPr/>
+          </p:nvSpPr>
+          <p:spPr>
+            <a:xfrm>
+              <a:off x="3287485" y="1772829"/>
+              <a:ext cx="1828800" cy="458742"/>
+            </a:xfrm>
+            <a:prstGeom prst="roundRect">
+              <a:avLst/>
+            </a:prstGeom>
+          </p:spPr>
+          <p:style>
+            <a:lnRef idx="2">
+              <a:schemeClr val="accent1">
+                <a:shade val="50000"/>
+              </a:schemeClr>
+            </a:lnRef>
+            <a:fillRef idx="1">
+              <a:schemeClr val="accent1"/>
+            </a:fillRef>
+            <a:effectRef idx="0">
+              <a:schemeClr val="accent1"/>
+            </a:effectRef>
+            <a:fontRef idx="minor">
+              <a:schemeClr val="lt1"/>
+            </a:fontRef>
+          </p:style>
+          <p:txBody>
+            <a:bodyPr rtlCol="0" anchor="ctr"/>
+            <a:lstStyle/>
+            <a:p>
+              <a:pPr algn="ctr"/>
+              <a:r>
+                <a:rPr lang="fr-FR" sz="1600" dirty="0">
+                  <a:latin typeface="Consolas" panose="020B0609020204030204" pitchFamily="49" charset="0"/>
+                  <a:cs typeface="Consolas" panose="020B0609020204030204" pitchFamily="49" charset="0"/>
+                </a:rPr>
+                <a:t>Stage</a:t>
+              </a:r>
+            </a:p>
+          </p:txBody>
+        </p:sp>
+        <p:sp>
+          <p:nvSpPr>
+            <p:cNvPr id="8" name="Rectangle : coins arrondis 7">
+              <a:extLst>
+                <a:ext uri="{FF2B5EF4-FFF2-40B4-BE49-F238E27FC236}">
+                  <a16:creationId xmlns:a16="http://schemas.microsoft.com/office/drawing/2014/main" id="{491234DF-841B-7F4F-A6FC-A0BFED02FBC3}"/>
+                </a:ext>
+              </a:extLst>
+            </p:cNvPr>
+            <p:cNvSpPr/>
+            <p:nvPr/>
+          </p:nvSpPr>
+          <p:spPr>
+            <a:xfrm>
+              <a:off x="3287485" y="2645047"/>
+              <a:ext cx="1828800" cy="458742"/>
+            </a:xfrm>
+            <a:prstGeom prst="roundRect">
+              <a:avLst/>
+            </a:prstGeom>
+          </p:spPr>
+          <p:style>
+            <a:lnRef idx="2">
+              <a:schemeClr val="accent1">
+                <a:shade val="50000"/>
+              </a:schemeClr>
+            </a:lnRef>
+            <a:fillRef idx="1">
+              <a:schemeClr val="accent1"/>
+            </a:fillRef>
+            <a:effectRef idx="0">
+              <a:schemeClr val="accent1"/>
+            </a:effectRef>
+            <a:fontRef idx="minor">
+              <a:schemeClr val="lt1"/>
+            </a:fontRef>
+          </p:style>
+          <p:txBody>
+            <a:bodyPr rtlCol="0" anchor="ctr"/>
+            <a:lstStyle/>
+            <a:p>
+              <a:pPr algn="ctr"/>
+              <a:r>
+                <a:rPr lang="fr-FR" sz="1600" dirty="0" err="1">
+                  <a:latin typeface="Consolas" panose="020B0609020204030204" pitchFamily="49" charset="0"/>
+                  <a:cs typeface="Consolas" panose="020B0609020204030204" pitchFamily="49" charset="0"/>
+                </a:rPr>
+                <a:t>Scene</a:t>
+              </a:r>
+              <a:endParaRPr lang="fr-FR" sz="1600" dirty="0">
+                <a:latin typeface="Consolas" panose="020B0609020204030204" pitchFamily="49" charset="0"/>
+                <a:cs typeface="Consolas" panose="020B0609020204030204" pitchFamily="49" charset="0"/>
+              </a:endParaRPr>
+            </a:p>
+          </p:txBody>
+        </p:sp>
+        <p:sp>
+          <p:nvSpPr>
+            <p:cNvPr id="9" name="Rectangle : coins arrondis 8">
+              <a:extLst>
+                <a:ext uri="{FF2B5EF4-FFF2-40B4-BE49-F238E27FC236}">
+                  <a16:creationId xmlns:a16="http://schemas.microsoft.com/office/drawing/2014/main" id="{9E81C4B6-1051-9B4E-8ECB-EDCA0F0A503B}"/>
+                </a:ext>
+              </a:extLst>
+            </p:cNvPr>
+            <p:cNvSpPr/>
+            <p:nvPr/>
+          </p:nvSpPr>
+          <p:spPr>
+            <a:xfrm>
+              <a:off x="3287485" y="3517265"/>
+              <a:ext cx="1828800" cy="458742"/>
+            </a:xfrm>
+            <a:prstGeom prst="roundRect">
+              <a:avLst/>
+            </a:prstGeom>
+          </p:spPr>
+          <p:style>
+            <a:lnRef idx="2">
+              <a:schemeClr val="accent1">
+                <a:shade val="50000"/>
+              </a:schemeClr>
+            </a:lnRef>
+            <a:fillRef idx="1">
+              <a:schemeClr val="accent1"/>
+            </a:fillRef>
+            <a:effectRef idx="0">
+              <a:schemeClr val="accent1"/>
+            </a:effectRef>
+            <a:fontRef idx="minor">
+              <a:schemeClr val="lt1"/>
+            </a:fontRef>
+          </p:style>
+          <p:txBody>
+            <a:bodyPr rtlCol="0" anchor="ctr"/>
+            <a:lstStyle/>
+            <a:p>
+              <a:pPr algn="ctr"/>
+              <a:r>
+                <a:rPr lang="fr-FR" sz="1600" dirty="0" err="1">
+                  <a:latin typeface="Consolas" panose="020B0609020204030204" pitchFamily="49" charset="0"/>
+                  <a:cs typeface="Consolas" panose="020B0609020204030204" pitchFamily="49" charset="0"/>
+                </a:rPr>
+                <a:t>BorderPane</a:t>
+              </a:r>
+              <a:endParaRPr lang="fr-FR" sz="1600" dirty="0">
+                <a:latin typeface="Consolas" panose="020B0609020204030204" pitchFamily="49" charset="0"/>
+                <a:cs typeface="Consolas" panose="020B0609020204030204" pitchFamily="49" charset="0"/>
+              </a:endParaRPr>
+            </a:p>
+          </p:txBody>
+        </p:sp>
+        <p:sp>
+          <p:nvSpPr>
+            <p:cNvPr id="10" name="Rectangle : coins arrondis 9">
+              <a:extLst>
+                <a:ext uri="{FF2B5EF4-FFF2-40B4-BE49-F238E27FC236}">
+                  <a16:creationId xmlns:a16="http://schemas.microsoft.com/office/drawing/2014/main" id="{A4D5A57C-C4A8-4745-9AB0-31AF2357FCAB}"/>
+                </a:ext>
+              </a:extLst>
+            </p:cNvPr>
+            <p:cNvSpPr/>
+            <p:nvPr/>
+          </p:nvSpPr>
+          <p:spPr>
+            <a:xfrm>
+              <a:off x="3287485" y="4389483"/>
+              <a:ext cx="1828800" cy="458742"/>
+            </a:xfrm>
+            <a:prstGeom prst="roundRect">
+              <a:avLst/>
+            </a:prstGeom>
+          </p:spPr>
+          <p:style>
+            <a:lnRef idx="2">
+              <a:schemeClr val="accent1">
+                <a:shade val="50000"/>
+              </a:schemeClr>
+            </a:lnRef>
+            <a:fillRef idx="1">
+              <a:schemeClr val="accent1"/>
+            </a:fillRef>
+            <a:effectRef idx="0">
+              <a:schemeClr val="accent1"/>
+            </a:effectRef>
+            <a:fontRef idx="minor">
+              <a:schemeClr val="lt1"/>
+            </a:fontRef>
+          </p:style>
+          <p:txBody>
+            <a:bodyPr rtlCol="0" anchor="ctr"/>
+            <a:lstStyle/>
+            <a:p>
+              <a:pPr algn="ctr"/>
+              <a:r>
+                <a:rPr lang="fr-FR" sz="1600" dirty="0">
+                  <a:latin typeface="Consolas" panose="020B0609020204030204" pitchFamily="49" charset="0"/>
+                  <a:cs typeface="Consolas" panose="020B0609020204030204" pitchFamily="49" charset="0"/>
+                </a:rPr>
+                <a:t>Pane</a:t>
+              </a:r>
+            </a:p>
+          </p:txBody>
+        </p:sp>
+        <p:sp>
+          <p:nvSpPr>
+            <p:cNvPr id="11" name="Rectangle : coins arrondis 10">
+              <a:extLst>
+                <a:ext uri="{FF2B5EF4-FFF2-40B4-BE49-F238E27FC236}">
+                  <a16:creationId xmlns:a16="http://schemas.microsoft.com/office/drawing/2014/main" id="{46BE3D6E-E636-DA41-8D9F-1AA64F0F6F00}"/>
+                </a:ext>
+              </a:extLst>
+            </p:cNvPr>
+            <p:cNvSpPr/>
+            <p:nvPr/>
+          </p:nvSpPr>
+          <p:spPr>
+            <a:xfrm>
+              <a:off x="1665513" y="5261700"/>
+              <a:ext cx="1828800" cy="458742"/>
+            </a:xfrm>
+            <a:prstGeom prst="roundRect">
+              <a:avLst/>
+            </a:prstGeom>
+          </p:spPr>
+          <p:style>
+            <a:lnRef idx="2">
+              <a:schemeClr val="accent1">
+                <a:shade val="50000"/>
+              </a:schemeClr>
+            </a:lnRef>
+            <a:fillRef idx="1">
+              <a:schemeClr val="accent1"/>
+            </a:fillRef>
+            <a:effectRef idx="0">
+              <a:schemeClr val="accent1"/>
+            </a:effectRef>
+            <a:fontRef idx="minor">
+              <a:schemeClr val="lt1"/>
+            </a:fontRef>
+          </p:style>
+          <p:txBody>
+            <a:bodyPr rtlCol="0" anchor="ctr"/>
+            <a:lstStyle/>
+            <a:p>
+              <a:pPr algn="ctr"/>
+              <a:r>
+                <a:rPr lang="fr-FR" sz="1600" dirty="0">
+                  <a:latin typeface="Consolas" panose="020B0609020204030204" pitchFamily="49" charset="0"/>
+                  <a:cs typeface="Consolas" panose="020B0609020204030204" pitchFamily="49" charset="0"/>
+                </a:rPr>
+                <a:t>Rectangle</a:t>
+              </a:r>
+            </a:p>
+          </p:txBody>
+        </p:sp>
+        <p:sp>
+          <p:nvSpPr>
+            <p:cNvPr id="12" name="Rectangle : coins arrondis 11">
+              <a:extLst>
+                <a:ext uri="{FF2B5EF4-FFF2-40B4-BE49-F238E27FC236}">
+                  <a16:creationId xmlns:a16="http://schemas.microsoft.com/office/drawing/2014/main" id="{71EC6A08-A8AF-3746-8A0C-EBE27F43EC0C}"/>
+                </a:ext>
+              </a:extLst>
+            </p:cNvPr>
+            <p:cNvSpPr/>
+            <p:nvPr/>
+          </p:nvSpPr>
+          <p:spPr>
+            <a:xfrm>
+              <a:off x="4855027" y="5261700"/>
+              <a:ext cx="1828800" cy="458742"/>
+            </a:xfrm>
+            <a:prstGeom prst="roundRect">
+              <a:avLst/>
+            </a:prstGeom>
+          </p:spPr>
+          <p:style>
+            <a:lnRef idx="2">
+              <a:schemeClr val="accent1">
+                <a:shade val="50000"/>
+              </a:schemeClr>
+            </a:lnRef>
+            <a:fillRef idx="1">
+              <a:schemeClr val="accent1"/>
+            </a:fillRef>
+            <a:effectRef idx="0">
+              <a:schemeClr val="accent1"/>
+            </a:effectRef>
+            <a:fontRef idx="minor">
+              <a:schemeClr val="lt1"/>
+            </a:fontRef>
+          </p:style>
+          <p:txBody>
+            <a:bodyPr rtlCol="0" anchor="ctr"/>
+            <a:lstStyle/>
+            <a:p>
+              <a:pPr algn="ctr"/>
+              <a:r>
+                <a:rPr lang="fr-FR" sz="1600" dirty="0">
+                  <a:latin typeface="Consolas" panose="020B0609020204030204" pitchFamily="49" charset="0"/>
+                  <a:cs typeface="Consolas" panose="020B0609020204030204" pitchFamily="49" charset="0"/>
+                </a:rPr>
+                <a:t>Circle</a:t>
+              </a:r>
+            </a:p>
+          </p:txBody>
+        </p:sp>
+      </p:grpSp>
+      <p:cxnSp>
+        <p:nvCxnSpPr>
+          <p:cNvPr id="22" name="Connecteur droit 21">
+            <a:extLst>
+              <a:ext uri="{FF2B5EF4-FFF2-40B4-BE49-F238E27FC236}">
+                <a16:creationId xmlns:a16="http://schemas.microsoft.com/office/drawing/2014/main" id="{6596CF2D-3C72-024B-9D14-6B019FC961C7}"/>
+              </a:ext>
+            </a:extLst>
+          </p:cNvPr>
+          <p:cNvCxnSpPr>
+            <a:cxnSpLocks/>
+            <a:endCxn id="8" idx="0"/>
+          </p:cNvCxnSpPr>
+          <p:nvPr/>
+        </p:nvCxnSpPr>
+        <p:spPr>
+          <a:xfrm>
+            <a:off x="9460905" y="2594668"/>
+            <a:ext cx="1" cy="330063"/>
+          </a:xfrm>
+          <a:prstGeom prst="line">
+            <a:avLst/>
+          </a:prstGeom>
+          <a:ln>
+            <a:solidFill>
+              <a:schemeClr val="accent6"/>
+            </a:solidFill>
+          </a:ln>
+        </p:spPr>
+        <p:style>
+          <a:lnRef idx="1">
+            <a:schemeClr val="accent1"/>
+          </a:lnRef>
+          <a:fillRef idx="0">
+            <a:schemeClr val="accent1"/>
+          </a:fillRef>
+          <a:effectRef idx="0">
+            <a:schemeClr val="accent1"/>
+          </a:effectRef>
+          <a:fontRef idx="minor">
+            <a:schemeClr val="tx1"/>
+          </a:fontRef>
+        </p:style>
+      </p:cxnSp>
+      <p:cxnSp>
+        <p:nvCxnSpPr>
+          <p:cNvPr id="25" name="Connecteur droit 24">
+            <a:extLst>
+              <a:ext uri="{FF2B5EF4-FFF2-40B4-BE49-F238E27FC236}">
+                <a16:creationId xmlns:a16="http://schemas.microsoft.com/office/drawing/2014/main" id="{C918552C-264B-114B-9486-6A2C5EE70EB4}"/>
+              </a:ext>
+            </a:extLst>
+          </p:cNvPr>
+          <p:cNvCxnSpPr>
+            <a:cxnSpLocks/>
+          </p:cNvCxnSpPr>
+          <p:nvPr/>
+        </p:nvCxnSpPr>
+        <p:spPr>
+          <a:xfrm>
+            <a:off x="9460257" y="3303071"/>
+            <a:ext cx="1" cy="330063"/>
+          </a:xfrm>
+          <a:prstGeom prst="line">
+            <a:avLst/>
+          </a:prstGeom>
+          <a:ln>
+            <a:solidFill>
+              <a:schemeClr val="accent6"/>
+            </a:solidFill>
+          </a:ln>
+        </p:spPr>
+        <p:style>
+          <a:lnRef idx="1">
+            <a:schemeClr val="accent1"/>
+          </a:lnRef>
+          <a:fillRef idx="0">
+            <a:schemeClr val="accent1"/>
+          </a:fillRef>
+          <a:effectRef idx="0">
+            <a:schemeClr val="accent1"/>
+          </a:effectRef>
+          <a:fontRef idx="minor">
+            <a:schemeClr val="tx1"/>
+          </a:fontRef>
+        </p:style>
+      </p:cxnSp>
+      <p:cxnSp>
+        <p:nvCxnSpPr>
+          <p:cNvPr id="26" name="Connecteur droit 25">
+            <a:extLst>
+              <a:ext uri="{FF2B5EF4-FFF2-40B4-BE49-F238E27FC236}">
+                <a16:creationId xmlns:a16="http://schemas.microsoft.com/office/drawing/2014/main" id="{B7C96B72-01CC-6F44-A843-F9F764DE7E1B}"/>
+              </a:ext>
+            </a:extLst>
+          </p:cNvPr>
+          <p:cNvCxnSpPr>
+            <a:cxnSpLocks/>
+          </p:cNvCxnSpPr>
+          <p:nvPr/>
+        </p:nvCxnSpPr>
+        <p:spPr>
+          <a:xfrm>
+            <a:off x="9460257" y="3971619"/>
+            <a:ext cx="1" cy="330063"/>
+          </a:xfrm>
+          <a:prstGeom prst="line">
+            <a:avLst/>
+          </a:prstGeom>
+          <a:ln>
+            <a:solidFill>
+              <a:schemeClr val="accent6"/>
+            </a:solidFill>
+          </a:ln>
+        </p:spPr>
+        <p:style>
+          <a:lnRef idx="1">
+            <a:schemeClr val="accent1"/>
+          </a:lnRef>
+          <a:fillRef idx="0">
+            <a:schemeClr val="accent1"/>
+          </a:fillRef>
+          <a:effectRef idx="0">
+            <a:schemeClr val="accent1"/>
+          </a:effectRef>
+          <a:fontRef idx="minor">
+            <a:schemeClr val="tx1"/>
+          </a:fontRef>
+        </p:style>
+      </p:cxnSp>
+      <p:cxnSp>
+        <p:nvCxnSpPr>
+          <p:cNvPr id="27" name="Connecteur droit 26">
+            <a:extLst>
+              <a:ext uri="{FF2B5EF4-FFF2-40B4-BE49-F238E27FC236}">
+                <a16:creationId xmlns:a16="http://schemas.microsoft.com/office/drawing/2014/main" id="{29157CA7-6F1D-B34F-8D9F-5A7F4EA69ECB}"/>
+              </a:ext>
+            </a:extLst>
+          </p:cNvPr>
+          <p:cNvCxnSpPr>
+            <a:cxnSpLocks/>
+            <a:endCxn id="12" idx="0"/>
+          </p:cNvCxnSpPr>
+          <p:nvPr/>
+        </p:nvCxnSpPr>
+        <p:spPr>
+          <a:xfrm>
+            <a:off x="9460905" y="4690374"/>
+            <a:ext cx="1251315" cy="323139"/>
+          </a:xfrm>
+          <a:prstGeom prst="line">
+            <a:avLst/>
+          </a:prstGeom>
+          <a:ln>
+            <a:solidFill>
+              <a:schemeClr val="accent6"/>
+            </a:solidFill>
+          </a:ln>
+        </p:spPr>
+        <p:style>
+          <a:lnRef idx="1">
+            <a:schemeClr val="accent1"/>
+          </a:lnRef>
+          <a:fillRef idx="0">
+            <a:schemeClr val="accent1"/>
+          </a:fillRef>
+          <a:effectRef idx="0">
+            <a:schemeClr val="accent1"/>
+          </a:effectRef>
+          <a:fontRef idx="minor">
+            <a:schemeClr val="tx1"/>
+          </a:fontRef>
+        </p:style>
+      </p:cxnSp>
+      <p:cxnSp>
+        <p:nvCxnSpPr>
+          <p:cNvPr id="29" name="Connecteur droit 28">
+            <a:extLst>
+              <a:ext uri="{FF2B5EF4-FFF2-40B4-BE49-F238E27FC236}">
+                <a16:creationId xmlns:a16="http://schemas.microsoft.com/office/drawing/2014/main" id="{4CE0640D-ACFF-6244-90AC-66482A5F4CD9}"/>
+              </a:ext>
+            </a:extLst>
+          </p:cNvPr>
+          <p:cNvCxnSpPr>
+            <a:cxnSpLocks/>
+            <a:endCxn id="11" idx="0"/>
+          </p:cNvCxnSpPr>
+          <p:nvPr/>
+        </p:nvCxnSpPr>
+        <p:spPr>
+          <a:xfrm flipH="1">
+            <a:off x="8166142" y="4690374"/>
+            <a:ext cx="1294762" cy="323139"/>
+          </a:xfrm>
+          <a:prstGeom prst="line">
+            <a:avLst/>
+          </a:prstGeom>
+          <a:ln>
+            <a:solidFill>
+              <a:schemeClr val="accent6"/>
+            </a:solidFill>
+          </a:ln>
+        </p:spPr>
+        <p:style>
+          <a:lnRef idx="1">
+            <a:schemeClr val="accent1"/>
+          </a:lnRef>
+          <a:fillRef idx="0">
+            <a:schemeClr val="accent1"/>
+          </a:fillRef>
+          <a:effectRef idx="0">
+            <a:schemeClr val="accent1"/>
+          </a:effectRef>
+          <a:fontRef idx="minor">
+            <a:schemeClr val="tx1"/>
+          </a:fontRef>
+        </p:style>
+      </p:cxnSp>
+      <p:sp>
+        <p:nvSpPr>
+          <p:cNvPr id="28" name="Forme libre 27">
+            <a:extLst>
+              <a:ext uri="{FF2B5EF4-FFF2-40B4-BE49-F238E27FC236}">
+                <a16:creationId xmlns:a16="http://schemas.microsoft.com/office/drawing/2014/main" id="{7969752A-1A37-984B-BB8A-DAC48DE26395}"/>
+              </a:ext>
+            </a:extLst>
+          </p:cNvPr>
+          <p:cNvSpPr/>
+          <p:nvPr/>
+        </p:nvSpPr>
+        <p:spPr>
+          <a:xfrm>
+            <a:off x="8379263" y="2370040"/>
+            <a:ext cx="2263861" cy="2532432"/>
+          </a:xfrm>
+          <a:custGeom>
+            <a:avLst/>
+            <a:gdLst>
+              <a:gd name="connsiteX0" fmla="*/ 1733 w 2267175"/>
+              <a:gd name="connsiteY0" fmla="*/ 32657 h 2531888"/>
+              <a:gd name="connsiteX1" fmla="*/ 269521 w 2267175"/>
+              <a:gd name="connsiteY1" fmla="*/ 2201091 h 2531888"/>
+              <a:gd name="connsiteX2" fmla="*/ 1680310 w 2267175"/>
+              <a:gd name="connsiteY2" fmla="*/ 2488474 h 2531888"/>
+              <a:gd name="connsiteX3" fmla="*/ 2228950 w 2267175"/>
+              <a:gd name="connsiteY3" fmla="*/ 1841863 h 2531888"/>
+              <a:gd name="connsiteX4" fmla="*/ 2176699 w 2267175"/>
+              <a:gd name="connsiteY4" fmla="*/ 0 h 2531888"/>
+              <a:gd name="connsiteX0" fmla="*/ 273 w 2382557"/>
+              <a:gd name="connsiteY0" fmla="*/ 19594 h 2532432"/>
+              <a:gd name="connsiteX1" fmla="*/ 384903 w 2382557"/>
+              <a:gd name="connsiteY1" fmla="*/ 2201091 h 2532432"/>
+              <a:gd name="connsiteX2" fmla="*/ 1795692 w 2382557"/>
+              <a:gd name="connsiteY2" fmla="*/ 2488474 h 2532432"/>
+              <a:gd name="connsiteX3" fmla="*/ 2344332 w 2382557"/>
+              <a:gd name="connsiteY3" fmla="*/ 1841863 h 2532432"/>
+              <a:gd name="connsiteX4" fmla="*/ 2292081 w 2382557"/>
+              <a:gd name="connsiteY4" fmla="*/ 0 h 2532432"/>
+              <a:gd name="connsiteX0" fmla="*/ 0 w 2382284"/>
+              <a:gd name="connsiteY0" fmla="*/ 19594 h 2532432"/>
+              <a:gd name="connsiteX1" fmla="*/ 384630 w 2382284"/>
+              <a:gd name="connsiteY1" fmla="*/ 2201091 h 2532432"/>
+              <a:gd name="connsiteX2" fmla="*/ 1795419 w 2382284"/>
+              <a:gd name="connsiteY2" fmla="*/ 2488474 h 2532432"/>
+              <a:gd name="connsiteX3" fmla="*/ 2344059 w 2382284"/>
+              <a:gd name="connsiteY3" fmla="*/ 1841863 h 2532432"/>
+              <a:gd name="connsiteX4" fmla="*/ 2291808 w 2382284"/>
+              <a:gd name="connsiteY4" fmla="*/ 0 h 2532432"/>
+            </a:gdLst>
+            <a:ahLst/>
+            <a:cxnLst>
+              <a:cxn ang="0">
+                <a:pos x="connsiteX0" y="connsiteY0"/>
+              </a:cxn>
+              <a:cxn ang="0">
+                <a:pos x="connsiteX1" y="connsiteY1"/>
+              </a:cxn>
+              <a:cxn ang="0">
+                <a:pos x="connsiteX2" y="connsiteY2"/>
+              </a:cxn>
+              <a:cxn ang="0">
+                <a:pos x="connsiteX3" y="connsiteY3"/>
+              </a:cxn>
+              <a:cxn ang="0">
+                <a:pos x="connsiteX4" y="connsiteY4"/>
+              </a:cxn>
+            </a:cxnLst>
+            <a:rect l="l" t="t" r="r" b="b"/>
+            <a:pathLst>
+              <a:path w="2382284" h="2532432">
+                <a:moveTo>
+                  <a:pt x="0" y="19594"/>
+                </a:moveTo>
+                <a:cubicBezTo>
+                  <a:pt x="90235" y="984067"/>
+                  <a:pt x="85393" y="1789611"/>
+                  <a:pt x="384630" y="2201091"/>
+                </a:cubicBezTo>
+                <a:cubicBezTo>
+                  <a:pt x="683867" y="2612571"/>
+                  <a:pt x="1468848" y="2548345"/>
+                  <a:pt x="1795419" y="2488474"/>
+                </a:cubicBezTo>
+                <a:cubicBezTo>
+                  <a:pt x="2121990" y="2428603"/>
+                  <a:pt x="2261327" y="2256609"/>
+                  <a:pt x="2344059" y="1841863"/>
+                </a:cubicBezTo>
+                <a:cubicBezTo>
+                  <a:pt x="2426791" y="1427117"/>
+                  <a:pt x="2359299" y="713558"/>
+                  <a:pt x="2291808" y="0"/>
+                </a:cubicBezTo>
+              </a:path>
+            </a:pathLst>
+          </a:custGeom>
+          <a:noFill/>
+          <a:ln>
+            <a:solidFill>
+              <a:schemeClr val="accent3"/>
+            </a:solidFill>
+            <a:prstDash val="sysDash"/>
+            <a:headEnd type="none" w="med" len="med"/>
+            <a:tailEnd type="arrow" w="med" len="med"/>
+          </a:ln>
+        </p:spPr>
+        <p:style>
+          <a:lnRef idx="2">
+            <a:schemeClr val="accent1">
+              <a:shade val="50000"/>
+            </a:schemeClr>
+          </a:lnRef>
+          <a:fillRef idx="1">
+            <a:schemeClr val="accent1"/>
+          </a:fillRef>
+          <a:effectRef idx="0">
+            <a:schemeClr val="accent1"/>
+          </a:effectRef>
+          <a:fontRef idx="minor">
+            <a:schemeClr val="lt1"/>
+          </a:fontRef>
+        </p:style>
+        <p:txBody>
+          <a:bodyPr rtlCol="0" anchor="ctr"/>
+          <a:lstStyle/>
+          <a:p>
+            <a:pPr algn="ctr"/>
+            <a:endParaRPr lang="fr-FR"/>
+          </a:p>
+        </p:txBody>
+      </p:sp>
+      <p:grpSp>
+        <p:nvGrpSpPr>
+          <p:cNvPr id="32" name="Groupe 31">
+            <a:extLst>
+              <a:ext uri="{FF2B5EF4-FFF2-40B4-BE49-F238E27FC236}">
+                <a16:creationId xmlns:a16="http://schemas.microsoft.com/office/drawing/2014/main" id="{F7DD1873-5835-D249-92B0-385AC4CF8052}"/>
+              </a:ext>
+            </a:extLst>
+          </p:cNvPr>
+          <p:cNvGrpSpPr/>
+          <p:nvPr/>
+        </p:nvGrpSpPr>
+        <p:grpSpPr>
+          <a:xfrm>
+            <a:off x="10050406" y="2503587"/>
+            <a:ext cx="1668586" cy="681620"/>
+            <a:chOff x="4467540" y="4051953"/>
+            <a:chExt cx="3047084" cy="1244741"/>
+          </a:xfrm>
+        </p:grpSpPr>
+        <p:grpSp>
+          <p:nvGrpSpPr>
+            <p:cNvPr id="33" name="Groupe 32">
+              <a:extLst>
+                <a:ext uri="{FF2B5EF4-FFF2-40B4-BE49-F238E27FC236}">
+                  <a16:creationId xmlns:a16="http://schemas.microsoft.com/office/drawing/2014/main" id="{A9C28895-0B76-E743-9340-4830EF9A20BB}"/>
+                </a:ext>
+              </a:extLst>
+            </p:cNvPr>
+            <p:cNvGrpSpPr/>
+            <p:nvPr/>
+          </p:nvGrpSpPr>
+          <p:grpSpPr>
+            <a:xfrm>
+              <a:off x="4886162" y="4051953"/>
+              <a:ext cx="2628462" cy="1244741"/>
+              <a:chOff x="4139926" y="2291668"/>
+              <a:chExt cx="3068600" cy="1453173"/>
+            </a:xfrm>
+          </p:grpSpPr>
+          <p:sp>
+            <p:nvSpPr>
+              <p:cNvPr id="38" name="Forme libre 37">
+                <a:extLst>
+                  <a:ext uri="{FF2B5EF4-FFF2-40B4-BE49-F238E27FC236}">
+                    <a16:creationId xmlns:a16="http://schemas.microsoft.com/office/drawing/2014/main" id="{3527E8FC-E1D3-5E43-B392-E1C4A7AC9D4C}"/>
+                  </a:ext>
+                </a:extLst>
+              </p:cNvPr>
+              <p:cNvSpPr/>
+              <p:nvPr/>
+            </p:nvSpPr>
+            <p:spPr>
+              <a:xfrm>
+                <a:off x="4445421" y="2291668"/>
+                <a:ext cx="2552170" cy="1453173"/>
+              </a:xfrm>
+              <a:custGeom>
+                <a:avLst/>
+                <a:gdLst>
+                  <a:gd name="connsiteX0" fmla="*/ 1884783 w 3023118"/>
+                  <a:gd name="connsiteY0" fmla="*/ 615821 h 2286000"/>
+                  <a:gd name="connsiteX1" fmla="*/ 1847461 w 3023118"/>
+                  <a:gd name="connsiteY1" fmla="*/ 102637 h 2286000"/>
+                  <a:gd name="connsiteX2" fmla="*/ 1483567 w 3023118"/>
+                  <a:gd name="connsiteY2" fmla="*/ 494523 h 2286000"/>
+                  <a:gd name="connsiteX3" fmla="*/ 1138335 w 3023118"/>
+                  <a:gd name="connsiteY3" fmla="*/ 0 h 2286000"/>
+                  <a:gd name="connsiteX4" fmla="*/ 1063690 w 3023118"/>
+                  <a:gd name="connsiteY4" fmla="*/ 541176 h 2286000"/>
+                  <a:gd name="connsiteX5" fmla="*/ 569167 w 3023118"/>
+                  <a:gd name="connsiteY5" fmla="*/ 270588 h 2286000"/>
+                  <a:gd name="connsiteX6" fmla="*/ 811763 w 3023118"/>
+                  <a:gd name="connsiteY6" fmla="*/ 867747 h 2286000"/>
+                  <a:gd name="connsiteX7" fmla="*/ 158620 w 3023118"/>
+                  <a:gd name="connsiteY7" fmla="*/ 858417 h 2286000"/>
+                  <a:gd name="connsiteX8" fmla="*/ 485192 w 3023118"/>
+                  <a:gd name="connsiteY8" fmla="*/ 1156996 h 2286000"/>
+                  <a:gd name="connsiteX9" fmla="*/ 0 w 3023118"/>
+                  <a:gd name="connsiteY9" fmla="*/ 1399592 h 2286000"/>
+                  <a:gd name="connsiteX10" fmla="*/ 653143 w 3023118"/>
+                  <a:gd name="connsiteY10" fmla="*/ 1446245 h 2286000"/>
+                  <a:gd name="connsiteX11" fmla="*/ 130628 w 3023118"/>
+                  <a:gd name="connsiteY11" fmla="*/ 2099388 h 2286000"/>
+                  <a:gd name="connsiteX12" fmla="*/ 961053 w 3023118"/>
+                  <a:gd name="connsiteY12" fmla="*/ 1744825 h 2286000"/>
+                  <a:gd name="connsiteX13" fmla="*/ 933061 w 3023118"/>
+                  <a:gd name="connsiteY13" fmla="*/ 2286000 h 2286000"/>
+                  <a:gd name="connsiteX14" fmla="*/ 1324947 w 3023118"/>
+                  <a:gd name="connsiteY14" fmla="*/ 1884784 h 2286000"/>
+                  <a:gd name="connsiteX15" fmla="*/ 1511559 w 3023118"/>
+                  <a:gd name="connsiteY15" fmla="*/ 2202025 h 2286000"/>
+                  <a:gd name="connsiteX16" fmla="*/ 1604865 w 3023118"/>
+                  <a:gd name="connsiteY16" fmla="*/ 2006082 h 2286000"/>
+                  <a:gd name="connsiteX17" fmla="*/ 1819469 w 3023118"/>
+                  <a:gd name="connsiteY17" fmla="*/ 2155372 h 2286000"/>
+                  <a:gd name="connsiteX18" fmla="*/ 1847461 w 3023118"/>
+                  <a:gd name="connsiteY18" fmla="*/ 1763486 h 2286000"/>
+                  <a:gd name="connsiteX19" fmla="*/ 2332653 w 3023118"/>
+                  <a:gd name="connsiteY19" fmla="*/ 1959429 h 2286000"/>
+                  <a:gd name="connsiteX20" fmla="*/ 2118049 w 3023118"/>
+                  <a:gd name="connsiteY20" fmla="*/ 1548882 h 2286000"/>
+                  <a:gd name="connsiteX21" fmla="*/ 3023118 w 3023118"/>
+                  <a:gd name="connsiteY21" fmla="*/ 1548882 h 2286000"/>
+                  <a:gd name="connsiteX22" fmla="*/ 2369975 w 3023118"/>
+                  <a:gd name="connsiteY22" fmla="*/ 1194319 h 2286000"/>
+                  <a:gd name="connsiteX23" fmla="*/ 2873828 w 3023118"/>
+                  <a:gd name="connsiteY23" fmla="*/ 923731 h 2286000"/>
+                  <a:gd name="connsiteX24" fmla="*/ 2239347 w 3023118"/>
+                  <a:gd name="connsiteY24" fmla="*/ 886408 h 2286000"/>
+                  <a:gd name="connsiteX25" fmla="*/ 2481943 w 3023118"/>
+                  <a:gd name="connsiteY25" fmla="*/ 363894 h 2286000"/>
+                  <a:gd name="connsiteX26" fmla="*/ 1884783 w 3023118"/>
+                  <a:gd name="connsiteY26" fmla="*/ 615821 h 2286000"/>
+                </a:gdLst>
+                <a:ahLst/>
+                <a:cxnLst>
+                  <a:cxn ang="0">
+                    <a:pos x="connsiteX0" y="connsiteY0"/>
+                  </a:cxn>
+                  <a:cxn ang="0">
+                    <a:pos x="connsiteX1" y="connsiteY1"/>
+                  </a:cxn>
+                  <a:cxn ang="0">
+                    <a:pos x="connsiteX2" y="connsiteY2"/>
+                  </a:cxn>
+                  <a:cxn ang="0">
+                    <a:pos x="connsiteX3" y="connsiteY3"/>
+                  </a:cxn>
+                  <a:cxn ang="0">
+                    <a:pos x="connsiteX4" y="connsiteY4"/>
+                  </a:cxn>
+                  <a:cxn ang="0">
+                    <a:pos x="connsiteX5" y="connsiteY5"/>
+                  </a:cxn>
+                  <a:cxn ang="0">
+                    <a:pos x="connsiteX6" y="connsiteY6"/>
+                  </a:cxn>
+                  <a:cxn ang="0">
+                    <a:pos x="connsiteX7" y="connsiteY7"/>
+                  </a:cxn>
+                  <a:cxn ang="0">
+                    <a:pos x="connsiteX8" y="connsiteY8"/>
+                  </a:cxn>
+                  <a:cxn ang="0">
+                    <a:pos x="connsiteX9" y="connsiteY9"/>
+                  </a:cxn>
+                  <a:cxn ang="0">
+                    <a:pos x="connsiteX10" y="connsiteY10"/>
+                  </a:cxn>
+                  <a:cxn ang="0">
+                    <a:pos x="connsiteX11" y="connsiteY11"/>
+                  </a:cxn>
+                  <a:cxn ang="0">
+                    <a:pos x="connsiteX12" y="connsiteY12"/>
+                  </a:cxn>
+                  <a:cxn ang="0">
+                    <a:pos x="connsiteX13" y="connsiteY13"/>
+                  </a:cxn>
+                  <a:cxn ang="0">
+                    <a:pos x="connsiteX14" y="connsiteY14"/>
+                  </a:cxn>
+                  <a:cxn ang="0">
+                    <a:pos x="connsiteX15" y="connsiteY15"/>
+                  </a:cxn>
+                  <a:cxn ang="0">
+                    <a:pos x="connsiteX16" y="connsiteY16"/>
+                  </a:cxn>
+                  <a:cxn ang="0">
+                    <a:pos x="connsiteX17" y="connsiteY17"/>
+                  </a:cxn>
+                  <a:cxn ang="0">
+                    <a:pos x="connsiteX18" y="connsiteY18"/>
+                  </a:cxn>
+                  <a:cxn ang="0">
+                    <a:pos x="connsiteX19" y="connsiteY19"/>
+                  </a:cxn>
+                  <a:cxn ang="0">
+                    <a:pos x="connsiteX20" y="connsiteY20"/>
+                  </a:cxn>
+                  <a:cxn ang="0">
+                    <a:pos x="connsiteX21" y="connsiteY21"/>
+                  </a:cxn>
+                  <a:cxn ang="0">
+                    <a:pos x="connsiteX22" y="connsiteY22"/>
+                  </a:cxn>
+                  <a:cxn ang="0">
+                    <a:pos x="connsiteX23" y="connsiteY23"/>
+                  </a:cxn>
+                  <a:cxn ang="0">
+                    <a:pos x="connsiteX24" y="connsiteY24"/>
+                  </a:cxn>
+                  <a:cxn ang="0">
+                    <a:pos x="connsiteX25" y="connsiteY25"/>
+                  </a:cxn>
+                  <a:cxn ang="0">
+                    <a:pos x="connsiteX26" y="connsiteY26"/>
+                  </a:cxn>
+                </a:cxnLst>
+                <a:rect l="l" t="t" r="r" b="b"/>
+                <a:pathLst>
+                  <a:path w="3023118" h="2286000">
+                    <a:moveTo>
+                      <a:pt x="1884783" y="615821"/>
+                    </a:moveTo>
+                    <a:lnTo>
+                      <a:pt x="1847461" y="102637"/>
+                    </a:lnTo>
+                    <a:lnTo>
+                      <a:pt x="1483567" y="494523"/>
+                    </a:lnTo>
+                    <a:lnTo>
+                      <a:pt x="1138335" y="0"/>
+                    </a:lnTo>
+                    <a:lnTo>
+                      <a:pt x="1063690" y="541176"/>
+                    </a:lnTo>
+                    <a:lnTo>
+                      <a:pt x="569167" y="270588"/>
+                    </a:lnTo>
+                    <a:lnTo>
+                      <a:pt x="811763" y="867747"/>
+                    </a:lnTo>
+                    <a:lnTo>
+                      <a:pt x="158620" y="858417"/>
+                    </a:lnTo>
+                    <a:lnTo>
+                      <a:pt x="485192" y="1156996"/>
+                    </a:lnTo>
+                    <a:lnTo>
+                      <a:pt x="0" y="1399592"/>
+                    </a:lnTo>
+                    <a:lnTo>
+                      <a:pt x="653143" y="1446245"/>
+                    </a:lnTo>
+                    <a:lnTo>
+                      <a:pt x="130628" y="2099388"/>
+                    </a:lnTo>
+                    <a:lnTo>
+                      <a:pt x="961053" y="1744825"/>
+                    </a:lnTo>
+                    <a:lnTo>
+                      <a:pt x="933061" y="2286000"/>
+                    </a:lnTo>
+                    <a:lnTo>
+                      <a:pt x="1324947" y="1884784"/>
+                    </a:lnTo>
+                    <a:lnTo>
+                      <a:pt x="1511559" y="2202025"/>
+                    </a:lnTo>
+                    <a:lnTo>
+                      <a:pt x="1604865" y="2006082"/>
+                    </a:lnTo>
+                    <a:lnTo>
+                      <a:pt x="1819469" y="2155372"/>
+                    </a:lnTo>
+                    <a:lnTo>
+                      <a:pt x="1847461" y="1763486"/>
+                    </a:lnTo>
+                    <a:lnTo>
+                      <a:pt x="2332653" y="1959429"/>
+                    </a:lnTo>
+                    <a:lnTo>
+                      <a:pt x="2118049" y="1548882"/>
+                    </a:lnTo>
+                    <a:lnTo>
+                      <a:pt x="3023118" y="1548882"/>
+                    </a:lnTo>
+                    <a:lnTo>
+                      <a:pt x="2369975" y="1194319"/>
+                    </a:lnTo>
+                    <a:lnTo>
+                      <a:pt x="2873828" y="923731"/>
+                    </a:lnTo>
+                    <a:lnTo>
+                      <a:pt x="2239347" y="886408"/>
+                    </a:lnTo>
+                    <a:lnTo>
+                      <a:pt x="2481943" y="363894"/>
+                    </a:lnTo>
+                    <a:lnTo>
+                      <a:pt x="1884783" y="615821"/>
+                    </a:lnTo>
+                    <a:close/>
+                  </a:path>
+                </a:pathLst>
+              </a:custGeom>
+              <a:solidFill>
+                <a:srgbClr val="FFFF00"/>
+              </a:solidFill>
+              <a:ln>
+                <a:solidFill>
+                  <a:srgbClr val="FF0000"/>
+                </a:solidFill>
+              </a:ln>
+            </p:spPr>
+            <p:style>
+              <a:lnRef idx="2">
+                <a:schemeClr val="accent1">
+                  <a:shade val="50000"/>
+                </a:schemeClr>
+              </a:lnRef>
+              <a:fillRef idx="1">
+                <a:schemeClr val="accent1"/>
+              </a:fillRef>
+              <a:effectRef idx="0">
+                <a:schemeClr val="accent1"/>
+              </a:effectRef>
+              <a:fontRef idx="minor">
+                <a:schemeClr val="lt1"/>
+              </a:fontRef>
+            </p:style>
+            <p:txBody>
+              <a:bodyPr rtlCol="0" anchor="ctr"/>
+              <a:lstStyle/>
+              <a:p>
+                <a:pPr algn="ctr"/>
+                <a:endParaRPr lang="fr-FR" sz="900"/>
+              </a:p>
+            </p:txBody>
+          </p:sp>
+          <p:sp>
+            <p:nvSpPr>
+              <p:cNvPr id="39" name="Rectangle 38">
+                <a:extLst>
+                  <a:ext uri="{FF2B5EF4-FFF2-40B4-BE49-F238E27FC236}">
+                    <a16:creationId xmlns:a16="http://schemas.microsoft.com/office/drawing/2014/main" id="{442D49A0-6F58-4645-BF54-815FD8F896D1}"/>
+                  </a:ext>
+                </a:extLst>
+              </p:cNvPr>
+              <p:cNvSpPr/>
+              <p:nvPr/>
+            </p:nvSpPr>
+            <p:spPr>
+              <a:xfrm rot="21000827">
+                <a:off x="4139926" y="2595201"/>
+                <a:ext cx="3068600" cy="721777"/>
+              </a:xfrm>
+              <a:prstGeom prst="rect">
+                <a:avLst/>
+              </a:prstGeom>
+              <a:noFill/>
+            </p:spPr>
+            <p:txBody>
+              <a:bodyPr wrap="square" lIns="91440" tIns="45720" rIns="91440" bIns="45720">
+                <a:spAutoFit/>
+              </a:bodyPr>
+              <a:lstStyle/>
+              <a:p>
+                <a:pPr algn="ctr"/>
+                <a:r>
+                  <a:rPr lang="fr-FR" sz="1600" b="1" dirty="0">
+                    <a:ln w="12700">
+                      <a:noFill/>
+                      <a:prstDash val="solid"/>
+                    </a:ln>
+                    <a:effectLst>
+                      <a:outerShdw dist="38100" dir="2640000" algn="bl" rotWithShape="0">
+                        <a:schemeClr val="tx2">
+                          <a:lumMod val="75000"/>
+                        </a:schemeClr>
+                      </a:outerShdw>
+                    </a:effectLst>
+                  </a:rPr>
+                  <a:t>Evénement</a:t>
+                </a:r>
+              </a:p>
+            </p:txBody>
+          </p:sp>
+        </p:grpSp>
+        <p:grpSp>
+          <p:nvGrpSpPr>
+            <p:cNvPr id="34" name="Groupe 33">
+              <a:extLst>
+                <a:ext uri="{FF2B5EF4-FFF2-40B4-BE49-F238E27FC236}">
+                  <a16:creationId xmlns:a16="http://schemas.microsoft.com/office/drawing/2014/main" id="{6049FB0C-BD81-6744-89FA-30B75BAD963B}"/>
+                </a:ext>
+              </a:extLst>
+            </p:cNvPr>
+            <p:cNvGrpSpPr/>
+            <p:nvPr/>
+          </p:nvGrpSpPr>
+          <p:grpSpPr>
+            <a:xfrm>
+              <a:off x="4467540" y="4079457"/>
+              <a:ext cx="736611" cy="1100506"/>
+              <a:chOff x="3153747" y="2382820"/>
+              <a:chExt cx="736611" cy="1100506"/>
+            </a:xfrm>
+          </p:grpSpPr>
+          <p:sp>
+            <p:nvSpPr>
+              <p:cNvPr id="35" name="Arc 34">
+                <a:extLst>
+                  <a:ext uri="{FF2B5EF4-FFF2-40B4-BE49-F238E27FC236}">
+                    <a16:creationId xmlns:a16="http://schemas.microsoft.com/office/drawing/2014/main" id="{F666ACC0-FF61-1B46-AEFC-F2F7CF34B73D}"/>
+                  </a:ext>
+                </a:extLst>
+              </p:cNvPr>
+              <p:cNvSpPr/>
+              <p:nvPr/>
+            </p:nvSpPr>
+            <p:spPr>
+              <a:xfrm rot="18941501">
+                <a:off x="3153747" y="2382820"/>
+                <a:ext cx="736611" cy="736611"/>
+              </a:xfrm>
+              <a:prstGeom prst="arc">
+                <a:avLst/>
+              </a:prstGeom>
+              <a:ln w="28575">
+                <a:solidFill>
+                  <a:schemeClr val="tx1"/>
+                </a:solidFill>
+              </a:ln>
+            </p:spPr>
+            <p:style>
+              <a:lnRef idx="1">
+                <a:schemeClr val="accent1"/>
+              </a:lnRef>
+              <a:fillRef idx="0">
+                <a:schemeClr val="accent1"/>
+              </a:fillRef>
+              <a:effectRef idx="0">
+                <a:schemeClr val="accent1"/>
+              </a:effectRef>
+              <a:fontRef idx="minor">
+                <a:schemeClr val="tx1"/>
+              </a:fontRef>
+            </p:style>
+            <p:txBody>
+              <a:bodyPr rtlCol="0" anchor="ctr"/>
+              <a:lstStyle/>
+              <a:p>
+                <a:pPr algn="ctr"/>
+                <a:endParaRPr lang="fr-FR" sz="1000"/>
+              </a:p>
+            </p:txBody>
+          </p:sp>
+          <p:sp>
+            <p:nvSpPr>
+              <p:cNvPr id="36" name="Arc 35">
+                <a:extLst>
+                  <a:ext uri="{FF2B5EF4-FFF2-40B4-BE49-F238E27FC236}">
+                    <a16:creationId xmlns:a16="http://schemas.microsoft.com/office/drawing/2014/main" id="{0E09215A-89A9-344A-93D3-C254ADE7A6F7}"/>
+                  </a:ext>
+                </a:extLst>
+              </p:cNvPr>
+              <p:cNvSpPr/>
+              <p:nvPr/>
+            </p:nvSpPr>
+            <p:spPr>
+              <a:xfrm rot="18394680">
+                <a:off x="3153747" y="2550772"/>
+                <a:ext cx="736611" cy="736611"/>
+              </a:xfrm>
+              <a:prstGeom prst="arc">
+                <a:avLst/>
+              </a:prstGeom>
+              <a:ln w="28575">
+                <a:solidFill>
+                  <a:schemeClr val="tx1"/>
+                </a:solidFill>
+              </a:ln>
+            </p:spPr>
+            <p:style>
+              <a:lnRef idx="1">
+                <a:schemeClr val="accent1"/>
+              </a:lnRef>
+              <a:fillRef idx="0">
+                <a:schemeClr val="accent1"/>
+              </a:fillRef>
+              <a:effectRef idx="0">
+                <a:schemeClr val="accent1"/>
+              </a:effectRef>
+              <a:fontRef idx="minor">
+                <a:schemeClr val="tx1"/>
+              </a:fontRef>
+            </p:style>
+            <p:txBody>
+              <a:bodyPr rtlCol="0" anchor="ctr"/>
+              <a:lstStyle/>
+              <a:p>
+                <a:pPr algn="ctr"/>
+                <a:endParaRPr lang="fr-FR" sz="1000"/>
+              </a:p>
+            </p:txBody>
+          </p:sp>
+          <p:sp>
+            <p:nvSpPr>
+              <p:cNvPr id="37" name="Arc 36">
+                <a:extLst>
+                  <a:ext uri="{FF2B5EF4-FFF2-40B4-BE49-F238E27FC236}">
+                    <a16:creationId xmlns:a16="http://schemas.microsoft.com/office/drawing/2014/main" id="{8B72436B-F811-9B48-A13F-974B879A42C9}"/>
+                  </a:ext>
+                </a:extLst>
+              </p:cNvPr>
+              <p:cNvSpPr/>
+              <p:nvPr/>
+            </p:nvSpPr>
+            <p:spPr>
+              <a:xfrm rot="17674455">
+                <a:off x="3153747" y="2746715"/>
+                <a:ext cx="736611" cy="736611"/>
+              </a:xfrm>
+              <a:prstGeom prst="arc">
+                <a:avLst/>
+              </a:prstGeom>
+              <a:ln w="28575">
+                <a:solidFill>
+                  <a:schemeClr val="tx1"/>
+                </a:solidFill>
+              </a:ln>
+            </p:spPr>
+            <p:style>
+              <a:lnRef idx="1">
+                <a:schemeClr val="accent1"/>
+              </a:lnRef>
+              <a:fillRef idx="0">
+                <a:schemeClr val="accent1"/>
+              </a:fillRef>
+              <a:effectRef idx="0">
+                <a:schemeClr val="accent1"/>
+              </a:effectRef>
+              <a:fontRef idx="minor">
+                <a:schemeClr val="tx1"/>
+              </a:fontRef>
+            </p:style>
+            <p:txBody>
+              <a:bodyPr rtlCol="0" anchor="ctr"/>
+              <a:lstStyle/>
+              <a:p>
+                <a:pPr algn="ctr"/>
+                <a:endParaRPr lang="fr-FR" sz="1000"/>
+              </a:p>
+            </p:txBody>
+          </p:sp>
+        </p:grpSp>
+      </p:grpSp>
+      <p:sp>
+        <p:nvSpPr>
+          <p:cNvPr id="4" name="Rectangle 3">
+            <a:extLst>
+              <a:ext uri="{FF2B5EF4-FFF2-40B4-BE49-F238E27FC236}">
+                <a16:creationId xmlns:a16="http://schemas.microsoft.com/office/drawing/2014/main" id="{F87BE522-844D-1C4E-9B55-C1AA26B9024E}"/>
+              </a:ext>
+            </a:extLst>
+          </p:cNvPr>
+          <p:cNvSpPr/>
+          <p:nvPr/>
+        </p:nvSpPr>
+        <p:spPr>
+          <a:xfrm>
+            <a:off x="838200" y="1796363"/>
+            <a:ext cx="6358197" cy="3539430"/>
+          </a:xfrm>
+          <a:prstGeom prst="rect">
+            <a:avLst/>
+          </a:prstGeom>
+        </p:spPr>
+        <p:txBody>
+          <a:bodyPr wrap="square">
+            <a:spAutoFit/>
+          </a:bodyPr>
+          <a:lstStyle/>
+          <a:p>
+            <a:r>
+              <a:rPr lang="fr-BE" sz="2800" dirty="0"/>
+              <a:t>Lors du déclenchement d’un événement, le processus qui détermine quel </a:t>
+            </a:r>
+            <a:r>
+              <a:rPr lang="fr-BE" sz="2600" dirty="0" err="1">
+                <a:solidFill>
+                  <a:schemeClr val="accent4"/>
+                </a:solidFill>
+                <a:latin typeface="Consolas" panose="020B0609020204030204" pitchFamily="49" charset="0"/>
+                <a:cs typeface="Consolas" panose="020B0609020204030204" pitchFamily="49" charset="0"/>
+              </a:rPr>
+              <a:t>Node</a:t>
+            </a:r>
+            <a:r>
+              <a:rPr lang="fr-BE" sz="2800" dirty="0"/>
+              <a:t> traite l’événement se déroule en </a:t>
+            </a:r>
+            <a:r>
+              <a:rPr lang="fr-BE" sz="2800" dirty="0">
+                <a:solidFill>
+                  <a:schemeClr val="accent4"/>
+                </a:solidFill>
+              </a:rPr>
+              <a:t>deux phases</a:t>
+            </a:r>
+            <a:r>
+              <a:rPr lang="fr-BE" sz="2800" dirty="0">
+                <a:solidFill>
+                  <a:schemeClr val="accent2"/>
+                </a:solidFill>
+              </a:rPr>
+              <a:t> </a:t>
+            </a:r>
+            <a:r>
+              <a:rPr lang="fr-BE" sz="2800" dirty="0"/>
+              <a:t>: </a:t>
+            </a:r>
+          </a:p>
+          <a:p>
+            <a:endParaRPr lang="fr-BE" sz="2800" dirty="0"/>
+          </a:p>
+          <a:p>
+            <a:pPr marL="342900" indent="-342900">
+              <a:buFont typeface="Arial" panose="020B0604020202020204" pitchFamily="34" charset="0"/>
+              <a:buChar char="•"/>
+            </a:pPr>
+            <a:r>
+              <a:rPr lang="fr-BE" sz="2800" dirty="0" err="1"/>
+              <a:t>event</a:t>
+            </a:r>
+            <a:r>
+              <a:rPr lang="fr-BE" sz="2800" dirty="0"/>
+              <a:t> </a:t>
+            </a:r>
+            <a:r>
+              <a:rPr lang="fr-BE" sz="2800" dirty="0" err="1"/>
+              <a:t>capturing</a:t>
+            </a:r>
+            <a:r>
+              <a:rPr lang="fr-BE" sz="2800" dirty="0"/>
+              <a:t> (descente) </a:t>
+            </a:r>
+          </a:p>
+          <a:p>
+            <a:pPr marL="342900" indent="-342900">
+              <a:buFont typeface="Arial" panose="020B0604020202020204" pitchFamily="34" charset="0"/>
+              <a:buChar char="•"/>
+            </a:pPr>
+            <a:r>
+              <a:rPr lang="fr-BE" sz="2800" dirty="0" err="1"/>
+              <a:t>event</a:t>
+            </a:r>
+            <a:r>
+              <a:rPr lang="fr-BE" sz="2800" dirty="0"/>
+              <a:t> </a:t>
+            </a:r>
+            <a:r>
+              <a:rPr lang="fr-BE" sz="2800" dirty="0" err="1"/>
+              <a:t>bubbling</a:t>
+            </a:r>
+            <a:r>
+              <a:rPr lang="fr-BE" sz="2800" dirty="0"/>
+              <a:t> (remontée)</a:t>
+            </a:r>
+          </a:p>
+          <a:p>
+            <a:endParaRPr lang="fr-BE" sz="2800" dirty="0"/>
+          </a:p>
+        </p:txBody>
+      </p:sp>
+      <p:sp>
+        <p:nvSpPr>
+          <p:cNvPr id="5" name="Espace réservé du numéro de diapositive 4">
+            <a:extLst>
+              <a:ext uri="{FF2B5EF4-FFF2-40B4-BE49-F238E27FC236}">
+                <a16:creationId xmlns:a16="http://schemas.microsoft.com/office/drawing/2014/main" id="{981B6B8D-7392-04E5-DDCB-311362F5B76A}"/>
+              </a:ext>
+            </a:extLst>
+          </p:cNvPr>
+          <p:cNvSpPr>
+            <a:spLocks noGrp="1"/>
+          </p:cNvSpPr>
+          <p:nvPr>
+            <p:ph type="sldNum" sz="quarter" idx="4"/>
+          </p:nvPr>
+        </p:nvSpPr>
+        <p:spPr/>
+        <p:txBody>
+          <a:bodyPr/>
+          <a:lstStyle/>
+          <a:p>
+            <a:fld id="{33C783E2-4793-4F48-A271-51A73CC37D74}" type="slidenum">
+              <a:rPr lang="fr-FR" smtClean="0"/>
+              <a:t>31</a:t>
+            </a:fld>
+            <a:endParaRPr lang="fr-FR"/>
+          </a:p>
+        </p:txBody>
+      </p:sp>
+      <p:sp>
+        <p:nvSpPr>
+          <p:cNvPr id="6" name="Repere de section"/>
+          <p:cNvSpPr txBox="1"/>
+          <p:nvPr/>
+        </p:nvSpPr>
+        <p:spPr>
+          <a:xfrm>
+            <a:off x="6583680" y="6382512"/>
+            <a:ext cx="4480560" cy="320040"/>
+          </a:xfrm>
+          <a:prstGeom prst="rect">
+            <a:avLst/>
+          </a:prstGeom>
+          <a:noFill/>
+        </p:spPr>
+        <p:txBody>
+          <a:bodyPr wrap="none" tIns="0" bIns="0">
+            <a:spAutoFit/>
+          </a:bodyPr>
+          <a:lstStyle/>
+          <a:p>
+            <a:pPr algn="r"/>
+            <a:r>
+              <a:rPr sz="1100">
+                <a:solidFill>
+                  <a:srgbClr val="BCBEC4"/>
+                </a:solidFill>
+              </a:rPr>
+              <a:t>FX1 · </a:t>
+            </a:r>
+            <a:r>
+              <a:rPr sz="1100" b="1">
+                <a:solidFill>
+                  <a:schemeClr val="accent4"/>
+                </a:solidFill>
+              </a:rPr>
+              <a:t>5. La propagation</a:t>
+            </a:r>
+          </a:p>
+        </p:txBody>
+      </p:sp>
+    </p:spTree>
+  </p:cSld>
+  <p:clrMapOvr>
+    <a:masterClrMapping/>
+  </p:clrMapOvr>
+  <p:timing>
+    <p:tnLst>
+      <p:par>
+        <p:cTn id="1" dur="indefinite" restart="never" nodeType="tmRoot">
+          <p:childTnLst>
+            <p:seq concurrent="1" nextAc="seek">
+              <p:cTn id="2" dur="indefinite" nodeType="mainSeq">
+                <p:childTnLst>
+                  <p:par>
+                    <p:cTn id="3" fill="hold">
+                      <p:stCondLst>
+                        <p:cond delay="indefinite"/>
+                        <p:cond evt="onBegin" delay="0">
+                          <p:tn val="2"/>
+                        </p:cond>
+                      </p:stCondLst>
+                      <p:childTnLst>
+                        <p:par>
+                          <p:cTn id="4" fill="hold">
+                            <p:stCondLst>
+                              <p:cond delay="0"/>
+                            </p:stCondLst>
+                            <p:childTnLst>
+                              <p:par>
+                                <p:cTn id="5" presetID="22" presetClass="entr" presetSubtype="8" fill="hold" grpId="0" nodeType="afterEffect">
+                                  <p:stCondLst>
+                                    <p:cond delay="0"/>
+                                  </p:stCondLst>
+                                  <p:childTnLst>
+                                    <p:set>
+                                      <p:cBhvr>
+                                        <p:cTn id="6" dur="1" fill="hold">
+                                          <p:stCondLst>
+                                            <p:cond delay="0"/>
+                                          </p:stCondLst>
+                                        </p:cTn>
+                                        <p:tgtEl>
+                                          <p:spTgt spid="4">
+                                            <p:txEl>
+                                              <p:pRg st="0" end="0"/>
+                                            </p:txEl>
+                                          </p:spTgt>
+                                        </p:tgtEl>
+                                        <p:attrNameLst>
+                                          <p:attrName>style.visibility</p:attrName>
+                                        </p:attrNameLst>
+                                      </p:cBhvr>
+                                      <p:to>
+                                        <p:strVal val="visible"/>
+                                      </p:to>
+                                    </p:set>
+                                    <p:animEffect transition="in" filter="wipe(left)">
+                                      <p:cBhvr>
+                                        <p:cTn id="7" dur="500"/>
+                                        <p:tgtEl>
+                                          <p:spTgt spid="4">
+                                            <p:txEl>
+                                              <p:pRg st="0" end="0"/>
+                                            </p:txEl>
+                                          </p:spTgt>
+                                        </p:tgtEl>
+                                      </p:cBhvr>
+                                    </p:animEffect>
+                                  </p:childTnLst>
+                                </p:cTn>
+                              </p:par>
+                            </p:childTnLst>
+                          </p:cTn>
+                        </p:par>
+                      </p:childTnLst>
+                    </p:cTn>
+                  </p:par>
+                  <p:par>
+                    <p:cTn id="8" fill="hold">
+                      <p:stCondLst>
+                        <p:cond delay="indefinite"/>
+                      </p:stCondLst>
+                      <p:childTnLst>
+                        <p:par>
+                          <p:cTn id="9" fill="hold">
+                            <p:stCondLst>
+                              <p:cond delay="0"/>
+                            </p:stCondLst>
+                            <p:childTnLst>
+                              <p:par>
+                                <p:cTn id="10" presetID="22" presetClass="entr" presetSubtype="8" fill="hold" grpId="0" nodeType="clickEffect">
+                                  <p:stCondLst>
+                                    <p:cond delay="0"/>
+                                  </p:stCondLst>
+                                  <p:childTnLst>
+                                    <p:set>
+                                      <p:cBhvr>
+                                        <p:cTn id="11" dur="1" fill="hold">
+                                          <p:stCondLst>
+                                            <p:cond delay="0"/>
+                                          </p:stCondLst>
+                                        </p:cTn>
+                                        <p:tgtEl>
+                                          <p:spTgt spid="4">
+                                            <p:txEl>
+                                              <p:pRg st="2" end="2"/>
+                                            </p:txEl>
+                                          </p:spTgt>
+                                        </p:tgtEl>
+                                        <p:attrNameLst>
+                                          <p:attrName>style.visibility</p:attrName>
+                                        </p:attrNameLst>
+                                      </p:cBhvr>
+                                      <p:to>
+                                        <p:strVal val="visible"/>
+                                      </p:to>
+                                    </p:set>
+                                    <p:animEffect transition="in" filter="wipe(left)">
+                                      <p:cBhvr>
+                                        <p:cTn id="12" dur="500"/>
+                                        <p:tgtEl>
+                                          <p:spTgt spid="4">
+                                            <p:txEl>
+                                              <p:pRg st="2" end="2"/>
+                                            </p:txEl>
+                                          </p:spTgt>
+                                        </p:tgtEl>
+                                      </p:cBhvr>
+                                    </p:animEffect>
+                                  </p:childTnLst>
+                                </p:cTn>
+                              </p:par>
+                            </p:childTnLst>
+                          </p:cTn>
+                        </p:par>
+                      </p:childTnLst>
+                    </p:cTn>
+                  </p:par>
+                  <p:par>
+                    <p:cTn id="13" fill="hold">
+                      <p:stCondLst>
+                        <p:cond delay="indefinite"/>
+                      </p:stCondLst>
+                      <p:childTnLst>
+                        <p:par>
+                          <p:cTn id="14" fill="hold">
+                            <p:stCondLst>
+                              <p:cond delay="0"/>
+                            </p:stCondLst>
+                            <p:childTnLst>
+                              <p:par>
+                                <p:cTn id="15" presetID="22" presetClass="entr" presetSubtype="8" fill="hold" grpId="0" nodeType="clickEffect">
+                                  <p:stCondLst>
+                                    <p:cond delay="0"/>
+                                  </p:stCondLst>
+                                  <p:childTnLst>
+                                    <p:set>
+                                      <p:cBhvr>
+                                        <p:cTn id="16" dur="1" fill="hold">
+                                          <p:stCondLst>
+                                            <p:cond delay="0"/>
+                                          </p:stCondLst>
+                                        </p:cTn>
+                                        <p:tgtEl>
+                                          <p:spTgt spid="4">
+                                            <p:txEl>
+                                              <p:pRg st="3" end="3"/>
+                                            </p:txEl>
+                                          </p:spTgt>
+                                        </p:tgtEl>
+                                        <p:attrNameLst>
+                                          <p:attrName>style.visibility</p:attrName>
+                                        </p:attrNameLst>
+                                      </p:cBhvr>
+                                      <p:to>
+                                        <p:strVal val="visible"/>
+                                      </p:to>
+                                    </p:set>
+                                    <p:animEffect transition="in" filter="wipe(left)">
+                                      <p:cBhvr>
+                                        <p:cTn id="17" dur="500"/>
+                                        <p:tgtEl>
+                                          <p:spTgt spid="4">
+                                            <p:txEl>
+                                              <p:pRg st="3" end="3"/>
+                                            </p:txEl>
+                                          </p:spTgt>
+                                        </p:tgtEl>
+                                      </p:cBhvr>
+                                    </p:animEffect>
+                                  </p:childTnLst>
+                                </p:cTn>
+                              </p:par>
+                            </p:childTnLst>
+                          </p:cTn>
+                        </p:par>
+                      </p:childTnLst>
+                    </p:cTn>
+                  </p:par>
+                  <p:par>
+                    <p:cTn id="18" fill="hold">
+                      <p:stCondLst>
+                        <p:cond delay="indefinite"/>
+                      </p:stCondLst>
+                      <p:childTnLst>
+                        <p:par>
+                          <p:cTn id="19" fill="hold">
+                            <p:stCondLst>
+                              <p:cond delay="0"/>
+                            </p:stCondLst>
+                            <p:childTnLst>
+                              <p:par>
+                                <p:cTn id="20" presetID="10" presetClass="entr" presetSubtype="0" fill="hold" grpId="0" nodeType="clickEffect">
+                                  <p:stCondLst>
+                                    <p:cond delay="0"/>
+                                  </p:stCondLst>
+                                  <p:childTnLst>
+                                    <p:set>
+                                      <p:cBhvr>
+                                        <p:cTn id="21" dur="1" fill="hold">
+                                          <p:stCondLst>
+                                            <p:cond delay="0"/>
+                                          </p:stCondLst>
+                                        </p:cTn>
+                                        <p:tgtEl>
+                                          <p:spTgt spid="28"/>
+                                        </p:tgtEl>
+                                        <p:attrNameLst>
+                                          <p:attrName>style.visibility</p:attrName>
+                                        </p:attrNameLst>
+                                      </p:cBhvr>
+                                      <p:to>
+                                        <p:strVal val="visible"/>
+                                      </p:to>
+                                    </p:set>
+                                    <p:animEffect transition="in" filter="fade">
+                                      <p:cBhvr>
+                                        <p:cTn id="22" dur="500"/>
+                                        <p:tgtEl>
+                                          <p:spTgt spid="28"/>
+                                        </p:tgtEl>
+                                      </p:cBhvr>
+                                    </p:animEffect>
+                                  </p:childTnLst>
+                                </p:cTn>
+                              </p:par>
+                            </p:childTnLst>
+                          </p:cTn>
+                        </p:par>
+                      </p:childTnLst>
+                    </p:cTn>
+                  </p:par>
+                  <p:par>
+                    <p:cTn id="23" fill="hold">
+                      <p:stCondLst>
+                        <p:cond delay="indefinite"/>
+                      </p:stCondLst>
+                      <p:childTnLst>
+                        <p:par>
+                          <p:cTn id="24" fill="hold">
+                            <p:stCondLst>
+                              <p:cond delay="0"/>
+                            </p:stCondLst>
+                            <p:childTnLst>
+                              <p:par>
+                                <p:cTn id="25" presetID="1" presetClass="entr" presetSubtype="0" fill="hold" nodeType="clickEffect">
+                                  <p:stCondLst>
+                                    <p:cond delay="0"/>
+                                  </p:stCondLst>
+                                  <p:childTnLst>
+                                    <p:set>
+                                      <p:cBhvr>
+                                        <p:cTn id="26" dur="1" fill="hold">
+                                          <p:stCondLst>
+                                            <p:cond delay="0"/>
+                                          </p:stCondLst>
+                                        </p:cTn>
+                                        <p:tgtEl>
+                                          <p:spTgt spid="32"/>
+                                        </p:tgtEl>
+                                        <p:attrNameLst>
+                                          <p:attrName>style.visibility</p:attrName>
+                                        </p:attrNameLst>
+                                      </p:cBhvr>
+                                      <p:to>
+                                        <p:strVal val="visible"/>
+                                      </p:to>
+                                    </p:set>
+                                  </p:childTnLst>
+                                </p:cTn>
+                              </p:par>
+                              <p:par>
+                                <p:cTn id="27" presetID="0" presetClass="path" presetSubtype="0" accel="50000" decel="50000" fill="hold" nodeType="withEffect">
+                                  <p:stCondLst>
+                                    <p:cond delay="0"/>
+                                  </p:stCondLst>
+                                  <p:childTnLst>
+                                    <p:animMotion origin="layout" path="M -0.23815 -0.05833 C -0.23919 -0.06782 -0.21276 0.20209 -0.2099 0.25371 C -0.2069 0.34051 -0.01276 0.31829 0.00299 0.24445 C 0.00807 0.13843 0.00052 -0.02777 -0.00065 -0.06504 " pathEditMode="fixed" rAng="0" ptsTypes="AAAA">
+                                      <p:cBhvr>
+                                        <p:cTn id="28" dur="2000" fill="hold"/>
+                                        <p:tgtEl>
+                                          <p:spTgt spid="32"/>
+                                        </p:tgtEl>
+                                        <p:attrNameLst>
+                                          <p:attrName>ppt_x</p:attrName>
+                                          <p:attrName>ppt_y</p:attrName>
+                                        </p:attrNameLst>
+                                      </p:cBhvr>
+                                      <p:rCtr x="12135" y="18056"/>
+                                    </p:animMotion>
+                                  </p:childTnLst>
+                                </p:cTn>
+                              </p:par>
+                            </p:childTnLst>
+                          </p:cTn>
+                        </p:par>
+                      </p:childTnLst>
+                    </p:cTn>
+                  </p:par>
+                </p:childTnLst>
+              </p:cTn>
+              <p:prevCondLst>
+                <p:cond evt="onPrev" delay="0">
+                  <p:tgtEl>
+                    <p:sldTgt/>
+                  </p:tgtEl>
+                </p:cond>
+              </p:prevCondLst>
+              <p:nextCondLst>
+                <p:cond evt="onNext" delay="0">
+                  <p:tgtEl>
+                    <p:sldTgt/>
+                  </p:tgtEl>
+                </p:cond>
+              </p:nextCondLst>
+            </p:seq>
+          </p:childTnLst>
+        </p:cTn>
+      </p:par>
+    </p:tnLst>
+    <p:bldLst>
+      <p:bldP spid="28" grpId="0" animBg="1"/>
+      <p:bldP spid="4" grpId="0" uiExpand="1" build="p"/>
+    </p:bldLst>
+  </p:timing>
+</p:sld>
+</file>
+
+<file path=ppt/slides/slide32.xml><?xml version="1.0" encoding="utf-8"?>
+<p:sld xmlns:a="http://schemas.openxmlformats.org/drawingml/2006/main" xmlns:r="http://schemas.openxmlformats.org/officeDocument/2006/relationships" xmlns:p="http://schemas.openxmlformats.org/presentationml/2006/main">
+  <p:cSld>
+    <p:spTree>
+      <p:nvGrpSpPr>
+        <p:cNvPr id="1" name=""/>
+        <p:cNvGrpSpPr/>
+        <p:nvPr/>
+      </p:nvGrpSpPr>
+      <p:grpSpPr>
+        <a:xfrm>
+          <a:off x="0" y="0"/>
+          <a:ext cx="0" cy="0"/>
+          <a:chOff x="0" y="0"/>
+          <a:chExt cx="0" cy="0"/>
+        </a:xfrm>
+      </p:grpSpPr>
+      <p:sp>
+        <p:nvSpPr>
+          <p:cNvPr id="2" name="Titre 1">
+            <a:extLst>
+              <a:ext uri="{FF2B5EF4-FFF2-40B4-BE49-F238E27FC236}">
+                <a16:creationId xmlns:a16="http://schemas.microsoft.com/office/drawing/2014/main" id="{83DE6083-8256-154A-B26F-2269D186C987}"/>
+              </a:ext>
+            </a:extLst>
+          </p:cNvPr>
+          <p:cNvSpPr>
+            <a:spLocks noGrp="1"/>
+          </p:cNvSpPr>
+          <p:nvPr>
+            <p:ph type="title"/>
+          </p:nvPr>
+        </p:nvSpPr>
+        <p:spPr/>
+        <p:txBody>
+          <a:bodyPr/>
+          <a:lstStyle/>
+          <a:p>
+            <a:r>
+              <a:rPr lang="fr-FR" sz="4400" dirty="0" err="1">
+                <a:solidFill>
+                  <a:schemeClr val="accent4"/>
+                </a:solidFill>
+                <a:latin typeface="Consolas" panose="020B0609020204030204" pitchFamily="49" charset="0"/>
+                <a:cs typeface="Consolas" panose="020B0609020204030204" pitchFamily="49" charset="0"/>
+              </a:rPr>
+              <a:t>EventHandler</a:t>
+            </a:r>
+            <a:r>
+              <a:rPr lang="fr-FR" dirty="0"/>
+              <a:t> et </a:t>
+            </a:r>
+            <a:r>
+              <a:rPr lang="fr-FR" sz="4400" dirty="0" err="1">
+                <a:solidFill>
+                  <a:schemeClr val="accent4"/>
+                </a:solidFill>
+                <a:latin typeface="Consolas" panose="020B0609020204030204" pitchFamily="49" charset="0"/>
+                <a:cs typeface="Consolas" panose="020B0609020204030204" pitchFamily="49" charset="0"/>
+              </a:rPr>
+              <a:t>EventFilter</a:t>
+            </a:r>
+            <a:endParaRPr lang="fr-FR" sz="4400" dirty="0">
+              <a:solidFill>
+                <a:schemeClr val="accent4"/>
+              </a:solidFill>
+              <a:latin typeface="Consolas" panose="020B0609020204030204" pitchFamily="49" charset="0"/>
+              <a:cs typeface="Consolas" panose="020B0609020204030204" pitchFamily="49" charset="0"/>
+            </a:endParaRPr>
+          </a:p>
+        </p:txBody>
+      </p:sp>
+      <p:sp>
+        <p:nvSpPr>
+          <p:cNvPr id="3" name="Rectangle 2">
+            <a:extLst>
+              <a:ext uri="{FF2B5EF4-FFF2-40B4-BE49-F238E27FC236}">
+                <a16:creationId xmlns:a16="http://schemas.microsoft.com/office/drawing/2014/main" id="{790C4C52-7F42-2E4E-A436-82763CA856C4}"/>
+              </a:ext>
+            </a:extLst>
+          </p:cNvPr>
+          <p:cNvSpPr/>
+          <p:nvPr/>
+        </p:nvSpPr>
+        <p:spPr>
+          <a:xfrm>
+            <a:off x="841248" y="5870448"/>
+            <a:ext cx="5486400" cy="274320"/>
+          </a:xfrm>
+          <a:prstGeom prst="rect">
+            <a:avLst/>
+          </a:prstGeom>
+        </p:spPr>
+        <p:txBody>
+          <a:bodyPr wrap="square">
+            <a:spAutoFit/>
+          </a:bodyPr>
+          <a:lstStyle/>
+          <a:p>
+            <a:r>
+              <a:rPr lang="fr-FR" sz="1100" i="1" dirty="0"/>
+              <a:t>Source : </a:t>
+            </a:r>
+            <a:r>
+              <a:rPr sz="1100">
+                <a:hlinkClick r:id="rId3"/>
+              </a:rPr>
+              <a:t>Stack Overflow, question 25740103</a:t>
+            </a:r>
+            <a:endParaRPr lang="fr-FR" sz="1200" i="1" dirty="0"/>
+          </a:p>
+        </p:txBody>
+      </p:sp>
+      <p:grpSp>
+        <p:nvGrpSpPr>
+          <p:cNvPr id="13" name="Groupe 12">
+            <a:extLst>
+              <a:ext uri="{FF2B5EF4-FFF2-40B4-BE49-F238E27FC236}">
+                <a16:creationId xmlns:a16="http://schemas.microsoft.com/office/drawing/2014/main" id="{73E26F97-7D94-2143-B907-8C837FC3BD12}"/>
+              </a:ext>
+            </a:extLst>
+          </p:cNvPr>
+          <p:cNvGrpSpPr/>
+          <p:nvPr/>
+        </p:nvGrpSpPr>
+        <p:grpSpPr>
+          <a:xfrm>
+            <a:off x="3603171" y="2949180"/>
+            <a:ext cx="4005944" cy="3151241"/>
+            <a:chOff x="1665513" y="1772829"/>
+            <a:chExt cx="5018314" cy="3947613"/>
+          </a:xfrm>
+        </p:grpSpPr>
+        <p:sp>
+          <p:nvSpPr>
+            <p:cNvPr id="7" name="Rectangle : coins arrondis 6">
+              <a:extLst>
+                <a:ext uri="{FF2B5EF4-FFF2-40B4-BE49-F238E27FC236}">
+                  <a16:creationId xmlns:a16="http://schemas.microsoft.com/office/drawing/2014/main" id="{C164CF95-3D0A-8A47-BFBE-C85F0D5C7FB6}"/>
+                </a:ext>
+              </a:extLst>
+            </p:cNvPr>
+            <p:cNvSpPr/>
+            <p:nvPr/>
+          </p:nvSpPr>
+          <p:spPr>
+            <a:xfrm>
+              <a:off x="3287485" y="1772829"/>
+              <a:ext cx="1828800" cy="458742"/>
+            </a:xfrm>
+            <a:prstGeom prst="roundRect">
+              <a:avLst/>
+            </a:prstGeom>
+          </p:spPr>
+          <p:style>
+            <a:lnRef idx="2">
+              <a:schemeClr val="accent1">
+                <a:shade val="50000"/>
+              </a:schemeClr>
+            </a:lnRef>
+            <a:fillRef idx="1">
+              <a:schemeClr val="accent1"/>
+            </a:fillRef>
+            <a:effectRef idx="0">
+              <a:schemeClr val="accent1"/>
+            </a:effectRef>
+            <a:fontRef idx="minor">
+              <a:schemeClr val="lt1"/>
+            </a:fontRef>
+          </p:style>
+          <p:txBody>
+            <a:bodyPr rtlCol="0" anchor="ctr"/>
+            <a:lstStyle/>
+            <a:p>
+              <a:pPr algn="ctr"/>
+              <a:r>
+                <a:rPr lang="fr-FR" sz="1600" dirty="0">
+                  <a:latin typeface="Consolas" panose="020B0609020204030204" pitchFamily="49" charset="0"/>
+                  <a:cs typeface="Consolas" panose="020B0609020204030204" pitchFamily="49" charset="0"/>
+                </a:rPr>
+                <a:t>Stage</a:t>
+              </a:r>
+            </a:p>
+          </p:txBody>
+        </p:sp>
+        <p:sp>
+          <p:nvSpPr>
+            <p:cNvPr id="8" name="Rectangle : coins arrondis 7">
+              <a:extLst>
+                <a:ext uri="{FF2B5EF4-FFF2-40B4-BE49-F238E27FC236}">
+                  <a16:creationId xmlns:a16="http://schemas.microsoft.com/office/drawing/2014/main" id="{491234DF-841B-7F4F-A6FC-A0BFED02FBC3}"/>
+                </a:ext>
+              </a:extLst>
+            </p:cNvPr>
+            <p:cNvSpPr/>
+            <p:nvPr/>
+          </p:nvSpPr>
+          <p:spPr>
+            <a:xfrm>
+              <a:off x="3287485" y="2645047"/>
+              <a:ext cx="1828800" cy="458742"/>
+            </a:xfrm>
+            <a:prstGeom prst="roundRect">
+              <a:avLst/>
+            </a:prstGeom>
+          </p:spPr>
+          <p:style>
+            <a:lnRef idx="2">
+              <a:schemeClr val="accent1">
+                <a:shade val="50000"/>
+              </a:schemeClr>
+            </a:lnRef>
+            <a:fillRef idx="1">
+              <a:schemeClr val="accent1"/>
+            </a:fillRef>
+            <a:effectRef idx="0">
+              <a:schemeClr val="accent1"/>
+            </a:effectRef>
+            <a:fontRef idx="minor">
+              <a:schemeClr val="lt1"/>
+            </a:fontRef>
+          </p:style>
+          <p:txBody>
+            <a:bodyPr rtlCol="0" anchor="ctr"/>
+            <a:lstStyle/>
+            <a:p>
+              <a:pPr algn="ctr"/>
+              <a:r>
+                <a:rPr lang="fr-FR" sz="1600" dirty="0" err="1">
+                  <a:latin typeface="Consolas" panose="020B0609020204030204" pitchFamily="49" charset="0"/>
+                  <a:cs typeface="Consolas" panose="020B0609020204030204" pitchFamily="49" charset="0"/>
+                </a:rPr>
+                <a:t>Scene</a:t>
+              </a:r>
+              <a:endParaRPr lang="fr-FR" sz="1600" dirty="0">
+                <a:latin typeface="Consolas" panose="020B0609020204030204" pitchFamily="49" charset="0"/>
+                <a:cs typeface="Consolas" panose="020B0609020204030204" pitchFamily="49" charset="0"/>
+              </a:endParaRPr>
+            </a:p>
+          </p:txBody>
+        </p:sp>
+        <p:sp>
+          <p:nvSpPr>
+            <p:cNvPr id="9" name="Rectangle : coins arrondis 8">
+              <a:extLst>
+                <a:ext uri="{FF2B5EF4-FFF2-40B4-BE49-F238E27FC236}">
+                  <a16:creationId xmlns:a16="http://schemas.microsoft.com/office/drawing/2014/main" id="{9E81C4B6-1051-9B4E-8ECB-EDCA0F0A503B}"/>
+                </a:ext>
+              </a:extLst>
+            </p:cNvPr>
+            <p:cNvSpPr/>
+            <p:nvPr/>
+          </p:nvSpPr>
+          <p:spPr>
+            <a:xfrm>
+              <a:off x="3287485" y="3517265"/>
+              <a:ext cx="1828800" cy="458742"/>
+            </a:xfrm>
+            <a:prstGeom prst="roundRect">
+              <a:avLst/>
+            </a:prstGeom>
+          </p:spPr>
+          <p:style>
+            <a:lnRef idx="2">
+              <a:schemeClr val="accent1">
+                <a:shade val="50000"/>
+              </a:schemeClr>
+            </a:lnRef>
+            <a:fillRef idx="1">
+              <a:schemeClr val="accent1"/>
+            </a:fillRef>
+            <a:effectRef idx="0">
+              <a:schemeClr val="accent1"/>
+            </a:effectRef>
+            <a:fontRef idx="minor">
+              <a:schemeClr val="lt1"/>
+            </a:fontRef>
+          </p:style>
+          <p:txBody>
+            <a:bodyPr rtlCol="0" anchor="ctr"/>
+            <a:lstStyle/>
+            <a:p>
+              <a:pPr algn="ctr"/>
+              <a:r>
+                <a:rPr lang="fr-FR" sz="1600" dirty="0" err="1">
+                  <a:latin typeface="Consolas" panose="020B0609020204030204" pitchFamily="49" charset="0"/>
+                  <a:cs typeface="Consolas" panose="020B0609020204030204" pitchFamily="49" charset="0"/>
+                </a:rPr>
+                <a:t>BorderPane</a:t>
+              </a:r>
+              <a:endParaRPr lang="fr-FR" sz="1600" dirty="0">
+                <a:latin typeface="Consolas" panose="020B0609020204030204" pitchFamily="49" charset="0"/>
+                <a:cs typeface="Consolas" panose="020B0609020204030204" pitchFamily="49" charset="0"/>
+              </a:endParaRPr>
+            </a:p>
+          </p:txBody>
+        </p:sp>
+        <p:sp>
+          <p:nvSpPr>
+            <p:cNvPr id="10" name="Rectangle : coins arrondis 9">
+              <a:extLst>
+                <a:ext uri="{FF2B5EF4-FFF2-40B4-BE49-F238E27FC236}">
+                  <a16:creationId xmlns:a16="http://schemas.microsoft.com/office/drawing/2014/main" id="{A4D5A57C-C4A8-4745-9AB0-31AF2357FCAB}"/>
+                </a:ext>
+              </a:extLst>
+            </p:cNvPr>
+            <p:cNvSpPr/>
+            <p:nvPr/>
+          </p:nvSpPr>
+          <p:spPr>
+            <a:xfrm>
+              <a:off x="3287485" y="4389483"/>
+              <a:ext cx="1828800" cy="458742"/>
+            </a:xfrm>
+            <a:prstGeom prst="roundRect">
+              <a:avLst/>
+            </a:prstGeom>
+          </p:spPr>
+          <p:style>
+            <a:lnRef idx="2">
+              <a:schemeClr val="accent1">
+                <a:shade val="50000"/>
+              </a:schemeClr>
+            </a:lnRef>
+            <a:fillRef idx="1">
+              <a:schemeClr val="accent1"/>
+            </a:fillRef>
+            <a:effectRef idx="0">
+              <a:schemeClr val="accent1"/>
+            </a:effectRef>
+            <a:fontRef idx="minor">
+              <a:schemeClr val="lt1"/>
+            </a:fontRef>
+          </p:style>
+          <p:txBody>
+            <a:bodyPr rtlCol="0" anchor="ctr"/>
+            <a:lstStyle/>
+            <a:p>
+              <a:pPr algn="ctr"/>
+              <a:r>
+                <a:rPr lang="fr-FR" sz="1600" dirty="0">
+                  <a:latin typeface="Consolas" panose="020B0609020204030204" pitchFamily="49" charset="0"/>
+                  <a:cs typeface="Consolas" panose="020B0609020204030204" pitchFamily="49" charset="0"/>
+                </a:rPr>
+                <a:t>Pane</a:t>
+              </a:r>
+            </a:p>
+          </p:txBody>
+        </p:sp>
+        <p:sp>
+          <p:nvSpPr>
+            <p:cNvPr id="11" name="Rectangle : coins arrondis 10">
+              <a:extLst>
+                <a:ext uri="{FF2B5EF4-FFF2-40B4-BE49-F238E27FC236}">
+                  <a16:creationId xmlns:a16="http://schemas.microsoft.com/office/drawing/2014/main" id="{46BE3D6E-E636-DA41-8D9F-1AA64F0F6F00}"/>
+                </a:ext>
+              </a:extLst>
+            </p:cNvPr>
+            <p:cNvSpPr/>
+            <p:nvPr/>
+          </p:nvSpPr>
+          <p:spPr>
+            <a:xfrm>
+              <a:off x="1665513" y="5261700"/>
+              <a:ext cx="1828800" cy="458742"/>
+            </a:xfrm>
+            <a:prstGeom prst="roundRect">
+              <a:avLst/>
+            </a:prstGeom>
+          </p:spPr>
+          <p:style>
+            <a:lnRef idx="2">
+              <a:schemeClr val="accent1">
+                <a:shade val="50000"/>
+              </a:schemeClr>
+            </a:lnRef>
+            <a:fillRef idx="1">
+              <a:schemeClr val="accent1"/>
+            </a:fillRef>
+            <a:effectRef idx="0">
+              <a:schemeClr val="accent1"/>
+            </a:effectRef>
+            <a:fontRef idx="minor">
+              <a:schemeClr val="lt1"/>
+            </a:fontRef>
+          </p:style>
+          <p:txBody>
+            <a:bodyPr rtlCol="0" anchor="ctr"/>
+            <a:lstStyle/>
+            <a:p>
+              <a:pPr algn="ctr"/>
+              <a:r>
+                <a:rPr lang="fr-FR" sz="1600" dirty="0">
+                  <a:latin typeface="Consolas" panose="020B0609020204030204" pitchFamily="49" charset="0"/>
+                  <a:cs typeface="Consolas" panose="020B0609020204030204" pitchFamily="49" charset="0"/>
+                </a:rPr>
+                <a:t>Rectangle</a:t>
+              </a:r>
+            </a:p>
+          </p:txBody>
+        </p:sp>
+        <p:sp>
+          <p:nvSpPr>
+            <p:cNvPr id="12" name="Rectangle : coins arrondis 11">
+              <a:extLst>
+                <a:ext uri="{FF2B5EF4-FFF2-40B4-BE49-F238E27FC236}">
+                  <a16:creationId xmlns:a16="http://schemas.microsoft.com/office/drawing/2014/main" id="{71EC6A08-A8AF-3746-8A0C-EBE27F43EC0C}"/>
+                </a:ext>
+              </a:extLst>
+            </p:cNvPr>
+            <p:cNvSpPr/>
+            <p:nvPr/>
+          </p:nvSpPr>
+          <p:spPr>
+            <a:xfrm>
+              <a:off x="4855027" y="5261700"/>
+              <a:ext cx="1828800" cy="458742"/>
+            </a:xfrm>
+            <a:prstGeom prst="roundRect">
+              <a:avLst/>
+            </a:prstGeom>
+          </p:spPr>
+          <p:style>
+            <a:lnRef idx="2">
+              <a:schemeClr val="accent1">
+                <a:shade val="50000"/>
+              </a:schemeClr>
+            </a:lnRef>
+            <a:fillRef idx="1">
+              <a:schemeClr val="accent1"/>
+            </a:fillRef>
+            <a:effectRef idx="0">
+              <a:schemeClr val="accent1"/>
+            </a:effectRef>
+            <a:fontRef idx="minor">
+              <a:schemeClr val="lt1"/>
+            </a:fontRef>
+          </p:style>
+          <p:txBody>
+            <a:bodyPr rtlCol="0" anchor="ctr"/>
+            <a:lstStyle/>
+            <a:p>
+              <a:pPr algn="ctr"/>
+              <a:r>
+                <a:rPr lang="fr-FR" sz="1600" dirty="0">
+                  <a:latin typeface="Consolas" panose="020B0609020204030204" pitchFamily="49" charset="0"/>
+                  <a:cs typeface="Consolas" panose="020B0609020204030204" pitchFamily="49" charset="0"/>
+                </a:rPr>
+                <a:t>Circle</a:t>
+              </a:r>
+            </a:p>
+          </p:txBody>
+        </p:sp>
+      </p:grpSp>
+      <p:grpSp>
+        <p:nvGrpSpPr>
+          <p:cNvPr id="16" name="Groupe 15">
+            <a:extLst>
+              <a:ext uri="{FF2B5EF4-FFF2-40B4-BE49-F238E27FC236}">
+                <a16:creationId xmlns:a16="http://schemas.microsoft.com/office/drawing/2014/main" id="{4F168DFA-5D85-D543-BB5A-7BAB16FFC9A6}"/>
+              </a:ext>
+            </a:extLst>
+          </p:cNvPr>
+          <p:cNvGrpSpPr/>
+          <p:nvPr/>
+        </p:nvGrpSpPr>
+        <p:grpSpPr>
+          <a:xfrm>
+            <a:off x="7609115" y="5664133"/>
+            <a:ext cx="2617560" cy="301752"/>
+            <a:chOff x="6085115" y="4474029"/>
+            <a:chExt cx="2617560" cy="301752"/>
+          </a:xfrm>
+        </p:grpSpPr>
+        <p:sp>
+          <p:nvSpPr>
+            <p:cNvPr id="14" name="Terminaison 13">
+              <a:extLst>
+                <a:ext uri="{FF2B5EF4-FFF2-40B4-BE49-F238E27FC236}">
+                  <a16:creationId xmlns:a16="http://schemas.microsoft.com/office/drawing/2014/main" id="{D4A57323-E62E-D74E-8CCE-D59AB9DA5E4E}"/>
+                </a:ext>
+              </a:extLst>
+            </p:cNvPr>
+            <p:cNvSpPr/>
+            <p:nvPr/>
+          </p:nvSpPr>
+          <p:spPr>
+            <a:xfrm>
+              <a:off x="6890657" y="4474029"/>
+              <a:ext cx="1812018" cy="301752"/>
+            </a:xfrm>
+            <a:prstGeom prst="flowChartTerminator">
+              <a:avLst/>
+            </a:prstGeom>
+            <a:solidFill>
+              <a:schemeClr val="accent3"/>
+            </a:solidFill>
+            <a:ln>
+              <a:solidFill>
+                <a:schemeClr val="accent3">
+                  <a:lumMod val="50000"/>
+                </a:schemeClr>
+              </a:solidFill>
+            </a:ln>
+          </p:spPr>
+          <p:style>
+            <a:lnRef idx="2">
+              <a:schemeClr val="accent1">
+                <a:shade val="50000"/>
+              </a:schemeClr>
+            </a:lnRef>
+            <a:fillRef idx="1">
+              <a:schemeClr val="accent1"/>
+            </a:fillRef>
+            <a:effectRef idx="0">
+              <a:schemeClr val="accent1"/>
+            </a:effectRef>
+            <a:fontRef idx="minor">
+              <a:schemeClr val="lt1"/>
+            </a:fontRef>
+          </p:style>
+          <p:txBody>
+            <a:bodyPr rtlCol="0" anchor="ctr"/>
+            <a:lstStyle/>
+            <a:p>
+              <a:pPr algn="ctr"/>
+              <a:r>
+                <a:rPr lang="fr-FR" sz="1600" dirty="0" err="1">
+                  <a:latin typeface="Consolas" panose="020B0609020204030204" pitchFamily="49" charset="0"/>
+                  <a:cs typeface="Consolas" panose="020B0609020204030204" pitchFamily="49" charset="0"/>
+                </a:rPr>
+                <a:t>EventHandler</a:t>
+              </a:r>
+              <a:endParaRPr lang="fr-FR" sz="1600" dirty="0">
+                <a:latin typeface="Consolas" panose="020B0609020204030204" pitchFamily="49" charset="0"/>
+                <a:cs typeface="Consolas" panose="020B0609020204030204" pitchFamily="49" charset="0"/>
+              </a:endParaRPr>
+            </a:p>
+          </p:txBody>
+        </p:sp>
+        <p:cxnSp>
+          <p:nvCxnSpPr>
+            <p:cNvPr id="17" name="Connecteur droit 16">
+              <a:extLst>
+                <a:ext uri="{FF2B5EF4-FFF2-40B4-BE49-F238E27FC236}">
+                  <a16:creationId xmlns:a16="http://schemas.microsoft.com/office/drawing/2014/main" id="{7BD7D9B6-4181-6D42-A43A-EC0A5AFF0F12}"/>
+                </a:ext>
+              </a:extLst>
+            </p:cNvPr>
+            <p:cNvCxnSpPr>
+              <a:endCxn id="14" idx="1"/>
+            </p:cNvCxnSpPr>
+            <p:nvPr/>
+          </p:nvCxnSpPr>
+          <p:spPr>
+            <a:xfrm flipV="1">
+              <a:off x="6085115" y="4624905"/>
+              <a:ext cx="805542" cy="102312"/>
+            </a:xfrm>
+            <a:prstGeom prst="line">
+              <a:avLst/>
+            </a:prstGeom>
+            <a:ln>
+              <a:solidFill>
+                <a:schemeClr val="accent6"/>
+              </a:solidFill>
+            </a:ln>
+          </p:spPr>
+          <p:style>
+            <a:lnRef idx="1">
+              <a:schemeClr val="accent1"/>
+            </a:lnRef>
+            <a:fillRef idx="0">
+              <a:schemeClr val="accent1"/>
+            </a:fillRef>
+            <a:effectRef idx="0">
+              <a:schemeClr val="accent1"/>
+            </a:effectRef>
+            <a:fontRef idx="minor">
+              <a:schemeClr val="tx1"/>
+            </a:fontRef>
+          </p:style>
+        </p:cxnSp>
+      </p:grpSp>
+      <p:grpSp>
+        <p:nvGrpSpPr>
+          <p:cNvPr id="19" name="Groupe 18">
+            <a:extLst>
+              <a:ext uri="{FF2B5EF4-FFF2-40B4-BE49-F238E27FC236}">
+                <a16:creationId xmlns:a16="http://schemas.microsoft.com/office/drawing/2014/main" id="{0A266123-F455-684D-B17F-CE468002D782}"/>
+              </a:ext>
+            </a:extLst>
+          </p:cNvPr>
+          <p:cNvGrpSpPr/>
+          <p:nvPr/>
+        </p:nvGrpSpPr>
+        <p:grpSpPr>
+          <a:xfrm>
+            <a:off x="7609115" y="5917321"/>
+            <a:ext cx="2617560" cy="553032"/>
+            <a:chOff x="6085115" y="4985658"/>
+            <a:chExt cx="2617560" cy="553032"/>
+          </a:xfrm>
+        </p:grpSpPr>
+        <p:sp>
+          <p:nvSpPr>
+            <p:cNvPr id="15" name="Terminaison 14">
+              <a:extLst>
+                <a:ext uri="{FF2B5EF4-FFF2-40B4-BE49-F238E27FC236}">
+                  <a16:creationId xmlns:a16="http://schemas.microsoft.com/office/drawing/2014/main" id="{D03C91D6-B180-FB41-84DB-5CB998525D44}"/>
+                </a:ext>
+              </a:extLst>
+            </p:cNvPr>
+            <p:cNvSpPr/>
+            <p:nvPr/>
+          </p:nvSpPr>
+          <p:spPr>
+            <a:xfrm>
+              <a:off x="6890657" y="5236938"/>
+              <a:ext cx="1812018" cy="301752"/>
+            </a:xfrm>
+            <a:prstGeom prst="flowChartTerminator">
+              <a:avLst/>
+            </a:prstGeom>
+            <a:solidFill>
+              <a:schemeClr val="accent3"/>
+            </a:solidFill>
+            <a:ln>
+              <a:solidFill>
+                <a:schemeClr val="accent3">
+                  <a:lumMod val="50000"/>
+                </a:schemeClr>
+              </a:solidFill>
+            </a:ln>
+          </p:spPr>
+          <p:style>
+            <a:lnRef idx="2">
+              <a:schemeClr val="accent1">
+                <a:shade val="50000"/>
+              </a:schemeClr>
+            </a:lnRef>
+            <a:fillRef idx="1">
+              <a:schemeClr val="accent1"/>
+            </a:fillRef>
+            <a:effectRef idx="0">
+              <a:schemeClr val="accent1"/>
+            </a:effectRef>
+            <a:fontRef idx="minor">
+              <a:schemeClr val="lt1"/>
+            </a:fontRef>
+          </p:style>
+          <p:txBody>
+            <a:bodyPr rtlCol="0" anchor="ctr"/>
+            <a:lstStyle/>
+            <a:p>
+              <a:pPr algn="ctr"/>
+              <a:r>
+                <a:rPr lang="fr-FR" sz="1600" dirty="0" err="1">
+                  <a:latin typeface="Consolas" panose="020B0609020204030204" pitchFamily="49" charset="0"/>
+                  <a:cs typeface="Consolas" panose="020B0609020204030204" pitchFamily="49" charset="0"/>
+                </a:rPr>
+                <a:t>EventHandler</a:t>
+              </a:r>
+              <a:endParaRPr lang="fr-FR" sz="1600" dirty="0">
+                <a:latin typeface="Consolas" panose="020B0609020204030204" pitchFamily="49" charset="0"/>
+                <a:cs typeface="Consolas" panose="020B0609020204030204" pitchFamily="49" charset="0"/>
+              </a:endParaRPr>
+            </a:p>
+          </p:txBody>
+        </p:sp>
+        <p:cxnSp>
+          <p:nvCxnSpPr>
+            <p:cNvPr id="18" name="Connecteur droit 17">
+              <a:extLst>
+                <a:ext uri="{FF2B5EF4-FFF2-40B4-BE49-F238E27FC236}">
+                  <a16:creationId xmlns:a16="http://schemas.microsoft.com/office/drawing/2014/main" id="{582DA460-6A02-4941-B33F-B4C0C8D0EA0A}"/>
+                </a:ext>
+              </a:extLst>
+            </p:cNvPr>
+            <p:cNvCxnSpPr>
+              <a:cxnSpLocks/>
+              <a:stCxn id="12" idx="3"/>
+              <a:endCxn id="15" idx="1"/>
+            </p:cNvCxnSpPr>
+            <p:nvPr/>
+          </p:nvCxnSpPr>
+          <p:spPr>
+            <a:xfrm>
+              <a:off x="6085115" y="4985658"/>
+              <a:ext cx="805542" cy="402156"/>
+            </a:xfrm>
+            <a:prstGeom prst="line">
+              <a:avLst/>
+            </a:prstGeom>
+            <a:ln>
+              <a:solidFill>
+                <a:schemeClr val="accent6"/>
+              </a:solidFill>
+            </a:ln>
+          </p:spPr>
+          <p:style>
+            <a:lnRef idx="1">
+              <a:schemeClr val="accent1"/>
+            </a:lnRef>
+            <a:fillRef idx="0">
+              <a:schemeClr val="accent1"/>
+            </a:fillRef>
+            <a:effectRef idx="0">
+              <a:schemeClr val="accent1"/>
+            </a:effectRef>
+            <a:fontRef idx="minor">
+              <a:schemeClr val="tx1"/>
+            </a:fontRef>
+          </p:style>
+        </p:cxnSp>
+      </p:grpSp>
+      <p:sp>
+        <p:nvSpPr>
+          <p:cNvPr id="21" name="Légende sans bordure 1 20">
+            <a:extLst>
+              <a:ext uri="{FF2B5EF4-FFF2-40B4-BE49-F238E27FC236}">
+                <a16:creationId xmlns:a16="http://schemas.microsoft.com/office/drawing/2014/main" id="{E1F975EF-7275-4E43-97F6-F2E34D4321BD}"/>
+              </a:ext>
+            </a:extLst>
+          </p:cNvPr>
+          <p:cNvSpPr/>
+          <p:nvPr/>
+        </p:nvSpPr>
+        <p:spPr>
+          <a:xfrm>
+            <a:off x="7506154" y="4664730"/>
+            <a:ext cx="2095047" cy="301752"/>
+          </a:xfrm>
+          <a:prstGeom prst="callout1">
+            <a:avLst>
+              <a:gd name="adj1" fmla="val 98115"/>
+              <a:gd name="adj2" fmla="val 19725"/>
+              <a:gd name="adj3" fmla="val 372240"/>
+              <a:gd name="adj4" fmla="val 25057"/>
+            </a:avLst>
+          </a:prstGeom>
+          <a:noFill/>
+          <a:ln w="12700">
+            <a:solidFill>
+              <a:schemeClr val="accent6"/>
+            </a:solidFill>
+            <a:headEnd type="none" w="med" len="med"/>
+            <a:tailEnd type="arrow" w="med" len="med"/>
+          </a:ln>
+        </p:spPr>
+        <p:style>
+          <a:lnRef idx="2">
+            <a:schemeClr val="accent1">
+              <a:shade val="50000"/>
+            </a:schemeClr>
+          </a:lnRef>
+          <a:fillRef idx="1">
+            <a:schemeClr val="accent1"/>
+          </a:fillRef>
+          <a:effectRef idx="0">
+            <a:schemeClr val="accent1"/>
+          </a:effectRef>
+          <a:fontRef idx="minor">
+            <a:schemeClr val="lt1"/>
+          </a:fontRef>
+        </p:style>
+        <p:txBody>
+          <a:bodyPr rtlCol="0" anchor="ctr"/>
+          <a:lstStyle/>
+          <a:p>
+            <a:pPr algn="ctr"/>
+            <a:r>
+              <a:rPr lang="fr-FR" sz="1600" dirty="0" err="1">
+                <a:solidFill>
+                  <a:schemeClr val="accent3"/>
+                </a:solidFill>
+                <a:latin typeface="Consolas" panose="020B0609020204030204" pitchFamily="49" charset="0"/>
+                <a:cs typeface="Consolas" panose="020B0609020204030204" pitchFamily="49" charset="0"/>
+              </a:rPr>
+              <a:t>addEventHandler</a:t>
+            </a:r>
+            <a:endParaRPr lang="fr-FR" sz="1600" dirty="0">
+              <a:solidFill>
+                <a:schemeClr val="accent3"/>
+              </a:solidFill>
+              <a:latin typeface="Consolas" panose="020B0609020204030204" pitchFamily="49" charset="0"/>
+              <a:cs typeface="Consolas" panose="020B0609020204030204" pitchFamily="49" charset="0"/>
+            </a:endParaRPr>
+          </a:p>
+        </p:txBody>
+      </p:sp>
+      <p:cxnSp>
+        <p:nvCxnSpPr>
+          <p:cNvPr id="22" name="Connecteur droit 21">
+            <a:extLst>
+              <a:ext uri="{FF2B5EF4-FFF2-40B4-BE49-F238E27FC236}">
+                <a16:creationId xmlns:a16="http://schemas.microsoft.com/office/drawing/2014/main" id="{6596CF2D-3C72-024B-9D14-6B019FC961C7}"/>
+              </a:ext>
+            </a:extLst>
+          </p:cNvPr>
+          <p:cNvCxnSpPr>
+            <a:cxnSpLocks/>
+            <a:endCxn id="8" idx="0"/>
+          </p:cNvCxnSpPr>
+          <p:nvPr/>
+        </p:nvCxnSpPr>
+        <p:spPr>
+          <a:xfrm>
+            <a:off x="5627868" y="3315378"/>
+            <a:ext cx="1" cy="330063"/>
+          </a:xfrm>
+          <a:prstGeom prst="line">
+            <a:avLst/>
+          </a:prstGeom>
+          <a:ln>
+            <a:solidFill>
+              <a:schemeClr val="accent6"/>
+            </a:solidFill>
+          </a:ln>
+        </p:spPr>
+        <p:style>
+          <a:lnRef idx="1">
+            <a:schemeClr val="accent1"/>
+          </a:lnRef>
+          <a:fillRef idx="0">
+            <a:schemeClr val="accent1"/>
+          </a:fillRef>
+          <a:effectRef idx="0">
+            <a:schemeClr val="accent1"/>
+          </a:effectRef>
+          <a:fontRef idx="minor">
+            <a:schemeClr val="tx1"/>
+          </a:fontRef>
+        </p:style>
+      </p:cxnSp>
+      <p:cxnSp>
+        <p:nvCxnSpPr>
+          <p:cNvPr id="25" name="Connecteur droit 24">
+            <a:extLst>
+              <a:ext uri="{FF2B5EF4-FFF2-40B4-BE49-F238E27FC236}">
+                <a16:creationId xmlns:a16="http://schemas.microsoft.com/office/drawing/2014/main" id="{C918552C-264B-114B-9486-6A2C5EE70EB4}"/>
+              </a:ext>
+            </a:extLst>
+          </p:cNvPr>
+          <p:cNvCxnSpPr>
+            <a:cxnSpLocks/>
+          </p:cNvCxnSpPr>
+          <p:nvPr/>
+        </p:nvCxnSpPr>
+        <p:spPr>
+          <a:xfrm>
+            <a:off x="5627868" y="4002413"/>
+            <a:ext cx="1" cy="330063"/>
+          </a:xfrm>
+          <a:prstGeom prst="line">
+            <a:avLst/>
+          </a:prstGeom>
+          <a:ln>
+            <a:solidFill>
+              <a:schemeClr val="accent6"/>
+            </a:solidFill>
+          </a:ln>
+        </p:spPr>
+        <p:style>
+          <a:lnRef idx="1">
+            <a:schemeClr val="accent1"/>
+          </a:lnRef>
+          <a:fillRef idx="0">
+            <a:schemeClr val="accent1"/>
+          </a:fillRef>
+          <a:effectRef idx="0">
+            <a:schemeClr val="accent1"/>
+          </a:effectRef>
+          <a:fontRef idx="minor">
+            <a:schemeClr val="tx1"/>
+          </a:fontRef>
+        </p:style>
+      </p:cxnSp>
+      <p:cxnSp>
+        <p:nvCxnSpPr>
+          <p:cNvPr id="26" name="Connecteur droit 25">
+            <a:extLst>
+              <a:ext uri="{FF2B5EF4-FFF2-40B4-BE49-F238E27FC236}">
+                <a16:creationId xmlns:a16="http://schemas.microsoft.com/office/drawing/2014/main" id="{B7C96B72-01CC-6F44-A843-F9F764DE7E1B}"/>
+              </a:ext>
+            </a:extLst>
+          </p:cNvPr>
+          <p:cNvCxnSpPr>
+            <a:cxnSpLocks/>
+          </p:cNvCxnSpPr>
+          <p:nvPr/>
+        </p:nvCxnSpPr>
+        <p:spPr>
+          <a:xfrm>
+            <a:off x="5627868" y="4709220"/>
+            <a:ext cx="1" cy="330063"/>
+          </a:xfrm>
+          <a:prstGeom prst="line">
+            <a:avLst/>
+          </a:prstGeom>
+          <a:ln>
+            <a:solidFill>
+              <a:schemeClr val="accent6"/>
+            </a:solidFill>
+          </a:ln>
+        </p:spPr>
+        <p:style>
+          <a:lnRef idx="1">
+            <a:schemeClr val="accent1"/>
+          </a:lnRef>
+          <a:fillRef idx="0">
+            <a:schemeClr val="accent1"/>
+          </a:fillRef>
+          <a:effectRef idx="0">
+            <a:schemeClr val="accent1"/>
+          </a:effectRef>
+          <a:fontRef idx="minor">
+            <a:schemeClr val="tx1"/>
+          </a:fontRef>
+        </p:style>
+      </p:cxnSp>
+      <p:cxnSp>
+        <p:nvCxnSpPr>
+          <p:cNvPr id="27" name="Connecteur droit 26">
+            <a:extLst>
+              <a:ext uri="{FF2B5EF4-FFF2-40B4-BE49-F238E27FC236}">
+                <a16:creationId xmlns:a16="http://schemas.microsoft.com/office/drawing/2014/main" id="{29157CA7-6F1D-B34F-8D9F-5A7F4EA69ECB}"/>
+              </a:ext>
+            </a:extLst>
+          </p:cNvPr>
+          <p:cNvCxnSpPr>
+            <a:cxnSpLocks/>
+            <a:endCxn id="12" idx="0"/>
+          </p:cNvCxnSpPr>
+          <p:nvPr/>
+        </p:nvCxnSpPr>
+        <p:spPr>
+          <a:xfrm>
+            <a:off x="5627868" y="5411084"/>
+            <a:ext cx="1251315" cy="323139"/>
+          </a:xfrm>
+          <a:prstGeom prst="line">
+            <a:avLst/>
+          </a:prstGeom>
+          <a:ln>
+            <a:solidFill>
+              <a:schemeClr val="accent6"/>
+            </a:solidFill>
+          </a:ln>
+        </p:spPr>
+        <p:style>
+          <a:lnRef idx="1">
+            <a:schemeClr val="accent1"/>
+          </a:lnRef>
+          <a:fillRef idx="0">
+            <a:schemeClr val="accent1"/>
+          </a:fillRef>
+          <a:effectRef idx="0">
+            <a:schemeClr val="accent1"/>
+          </a:effectRef>
+          <a:fontRef idx="minor">
+            <a:schemeClr val="tx1"/>
+          </a:fontRef>
+        </p:style>
+      </p:cxnSp>
+      <p:cxnSp>
+        <p:nvCxnSpPr>
+          <p:cNvPr id="29" name="Connecteur droit 28">
+            <a:extLst>
+              <a:ext uri="{FF2B5EF4-FFF2-40B4-BE49-F238E27FC236}">
+                <a16:creationId xmlns:a16="http://schemas.microsoft.com/office/drawing/2014/main" id="{4CE0640D-ACFF-6244-90AC-66482A5F4CD9}"/>
+              </a:ext>
+            </a:extLst>
+          </p:cNvPr>
+          <p:cNvCxnSpPr>
+            <a:cxnSpLocks/>
+            <a:endCxn id="11" idx="0"/>
+          </p:cNvCxnSpPr>
+          <p:nvPr/>
+        </p:nvCxnSpPr>
+        <p:spPr>
+          <a:xfrm flipH="1">
+            <a:off x="4333105" y="5411084"/>
+            <a:ext cx="1294762" cy="323139"/>
+          </a:xfrm>
+          <a:prstGeom prst="line">
+            <a:avLst/>
+          </a:prstGeom>
+          <a:ln>
+            <a:solidFill>
+              <a:schemeClr val="accent6"/>
+            </a:solidFill>
+          </a:ln>
+        </p:spPr>
+        <p:style>
+          <a:lnRef idx="1">
+            <a:schemeClr val="accent1"/>
+          </a:lnRef>
+          <a:fillRef idx="0">
+            <a:schemeClr val="accent1"/>
+          </a:fillRef>
+          <a:effectRef idx="0">
+            <a:schemeClr val="accent1"/>
+          </a:effectRef>
+          <a:fontRef idx="minor">
+            <a:schemeClr val="tx1"/>
+          </a:fontRef>
+        </p:style>
+      </p:cxnSp>
+      <p:grpSp>
+        <p:nvGrpSpPr>
+          <p:cNvPr id="5" name="Groupe 4">
+            <a:extLst>
+              <a:ext uri="{FF2B5EF4-FFF2-40B4-BE49-F238E27FC236}">
+                <a16:creationId xmlns:a16="http://schemas.microsoft.com/office/drawing/2014/main" id="{51C9A90E-EA2D-1041-BABE-B92AB349766A}"/>
+              </a:ext>
+            </a:extLst>
+          </p:cNvPr>
+          <p:cNvGrpSpPr/>
+          <p:nvPr/>
+        </p:nvGrpSpPr>
+        <p:grpSpPr>
+          <a:xfrm>
+            <a:off x="2697162" y="4441122"/>
+            <a:ext cx="2200772" cy="1341095"/>
+            <a:chOff x="1173162" y="3251017"/>
+            <a:chExt cx="2200772" cy="1341095"/>
+          </a:xfrm>
+        </p:grpSpPr>
+        <p:sp>
+          <p:nvSpPr>
+            <p:cNvPr id="41" name="Terminaison 40">
+              <a:extLst>
+                <a:ext uri="{FF2B5EF4-FFF2-40B4-BE49-F238E27FC236}">
+                  <a16:creationId xmlns:a16="http://schemas.microsoft.com/office/drawing/2014/main" id="{684816CC-1209-EA42-9D76-F6E25BFC0BFD}"/>
+                </a:ext>
+              </a:extLst>
+            </p:cNvPr>
+            <p:cNvSpPr/>
+            <p:nvPr/>
+          </p:nvSpPr>
+          <p:spPr>
+            <a:xfrm>
+              <a:off x="1173162" y="3251017"/>
+              <a:ext cx="1812018" cy="301752"/>
+            </a:xfrm>
+            <a:prstGeom prst="flowChartTerminator">
+              <a:avLst/>
+            </a:prstGeom>
+            <a:solidFill>
+              <a:schemeClr val="accent5">
+                <a:lumMod val="60000"/>
+                <a:lumOff val="40000"/>
+              </a:schemeClr>
+            </a:solidFill>
+            <a:ln>
+              <a:solidFill>
+                <a:schemeClr val="accent5">
+                  <a:lumMod val="75000"/>
+                </a:schemeClr>
+              </a:solidFill>
+            </a:ln>
+          </p:spPr>
+          <p:style>
+            <a:lnRef idx="2">
+              <a:schemeClr val="accent1">
+                <a:shade val="50000"/>
+              </a:schemeClr>
+            </a:lnRef>
+            <a:fillRef idx="1">
+              <a:schemeClr val="accent1"/>
+            </a:fillRef>
+            <a:effectRef idx="0">
+              <a:schemeClr val="accent1"/>
+            </a:effectRef>
+            <a:fontRef idx="minor">
+              <a:schemeClr val="lt1"/>
+            </a:fontRef>
+          </p:style>
+          <p:txBody>
+            <a:bodyPr rtlCol="0" anchor="ctr"/>
+            <a:lstStyle/>
+            <a:p>
+              <a:pPr algn="ctr"/>
+              <a:r>
+                <a:rPr lang="fr-FR" sz="1600" dirty="0" err="1">
+                  <a:solidFill>
+                    <a:schemeClr val="accent5">
+                      <a:lumMod val="50000"/>
+                    </a:schemeClr>
+                  </a:solidFill>
+                  <a:latin typeface="Consolas" panose="020B0609020204030204" pitchFamily="49" charset="0"/>
+                  <a:cs typeface="Consolas" panose="020B0609020204030204" pitchFamily="49" charset="0"/>
+                </a:rPr>
+                <a:t>EventFilter</a:t>
+              </a:r>
+              <a:endParaRPr lang="fr-FR" sz="1600" dirty="0">
+                <a:solidFill>
+                  <a:schemeClr val="accent5">
+                    <a:lumMod val="50000"/>
+                  </a:schemeClr>
+                </a:solidFill>
+                <a:latin typeface="Consolas" panose="020B0609020204030204" pitchFamily="49" charset="0"/>
+                <a:cs typeface="Consolas" panose="020B0609020204030204" pitchFamily="49" charset="0"/>
+              </a:endParaRPr>
+            </a:p>
+          </p:txBody>
+        </p:sp>
+        <p:cxnSp>
+          <p:nvCxnSpPr>
+            <p:cNvPr id="43" name="Connecteur droit 42">
+              <a:extLst>
+                <a:ext uri="{FF2B5EF4-FFF2-40B4-BE49-F238E27FC236}">
+                  <a16:creationId xmlns:a16="http://schemas.microsoft.com/office/drawing/2014/main" id="{9BA9A2D5-A1E4-6146-B596-E738FE87E43C}"/>
+                </a:ext>
+              </a:extLst>
+            </p:cNvPr>
+            <p:cNvCxnSpPr>
+              <a:cxnSpLocks/>
+              <a:endCxn id="9" idx="1"/>
+            </p:cNvCxnSpPr>
+            <p:nvPr/>
+          </p:nvCxnSpPr>
+          <p:spPr>
+            <a:xfrm flipV="1">
+              <a:off x="2985180" y="4524800"/>
+              <a:ext cx="388754" cy="67312"/>
+            </a:xfrm>
+            <a:prstGeom prst="line">
+              <a:avLst/>
+            </a:prstGeom>
+            <a:ln>
+              <a:solidFill>
+                <a:schemeClr val="accent5">
+                  <a:lumMod val="75000"/>
+                </a:schemeClr>
+              </a:solidFill>
+            </a:ln>
+          </p:spPr>
+          <p:style>
+            <a:lnRef idx="1">
+              <a:schemeClr val="accent1"/>
+            </a:lnRef>
+            <a:fillRef idx="0">
+              <a:schemeClr val="accent1"/>
+            </a:fillRef>
+            <a:effectRef idx="0">
+              <a:schemeClr val="accent1"/>
+            </a:effectRef>
+            <a:fontRef idx="minor">
+              <a:schemeClr val="tx1"/>
+            </a:fontRef>
+          </p:style>
+        </p:cxnSp>
+      </p:grpSp>
+      <p:sp>
+        <p:nvSpPr>
+          <p:cNvPr id="44" name="Légende sans bordure 1 43">
+            <a:extLst>
+              <a:ext uri="{FF2B5EF4-FFF2-40B4-BE49-F238E27FC236}">
+                <a16:creationId xmlns:a16="http://schemas.microsoft.com/office/drawing/2014/main" id="{401C1FBD-B0E4-B346-B324-7EAACF07D758}"/>
+              </a:ext>
+            </a:extLst>
+          </p:cNvPr>
+          <p:cNvSpPr/>
+          <p:nvPr/>
+        </p:nvSpPr>
+        <p:spPr>
+          <a:xfrm>
+            <a:off x="2555648" y="3441718"/>
+            <a:ext cx="2095047" cy="301752"/>
+          </a:xfrm>
+          <a:prstGeom prst="callout1">
+            <a:avLst>
+              <a:gd name="adj1" fmla="val 95433"/>
+              <a:gd name="adj2" fmla="val 82683"/>
+              <a:gd name="adj3" fmla="val 352888"/>
+              <a:gd name="adj4" fmla="val 100246"/>
+            </a:avLst>
+          </a:prstGeom>
+          <a:noFill/>
+          <a:ln w="12700">
+            <a:solidFill>
+              <a:schemeClr val="accent6"/>
+            </a:solidFill>
+            <a:headEnd type="none" w="med" len="med"/>
+            <a:tailEnd type="arrow" w="med" len="med"/>
+          </a:ln>
+        </p:spPr>
+        <p:style>
+          <a:lnRef idx="2">
+            <a:schemeClr val="accent1">
+              <a:shade val="50000"/>
+            </a:schemeClr>
+          </a:lnRef>
+          <a:fillRef idx="1">
+            <a:schemeClr val="accent1"/>
+          </a:fillRef>
+          <a:effectRef idx="0">
+            <a:schemeClr val="accent1"/>
+          </a:effectRef>
+          <a:fontRef idx="minor">
+            <a:schemeClr val="lt1"/>
+          </a:fontRef>
+        </p:style>
+        <p:txBody>
+          <a:bodyPr rtlCol="0" anchor="ctr"/>
+          <a:lstStyle/>
+          <a:p>
+            <a:pPr algn="ctr"/>
+            <a:r>
+              <a:rPr lang="fr-FR" sz="1600" dirty="0" err="1">
+                <a:solidFill>
+                  <a:srgbClr val="9DC3E7"/>
+                </a:solidFill>
+                <a:latin typeface="Consolas" panose="020B0609020204030204" pitchFamily="49" charset="0"/>
+                <a:cs typeface="Consolas" panose="020B0609020204030204" pitchFamily="49" charset="0"/>
+              </a:rPr>
+              <a:t>addEventFilter</a:t>
+            </a:r>
+            <a:endParaRPr lang="fr-FR" sz="1600" dirty="0">
+              <a:solidFill>
+                <a:srgbClr val="9DC3E7"/>
+              </a:solidFill>
+              <a:latin typeface="Consolas" panose="020B0609020204030204" pitchFamily="49" charset="0"/>
+              <a:cs typeface="Consolas" panose="020B0609020204030204" pitchFamily="49" charset="0"/>
+            </a:endParaRPr>
+          </a:p>
+        </p:txBody>
+      </p:sp>
+      <p:grpSp>
+        <p:nvGrpSpPr>
+          <p:cNvPr id="32" name="Groupe 31">
+            <a:extLst>
+              <a:ext uri="{FF2B5EF4-FFF2-40B4-BE49-F238E27FC236}">
+                <a16:creationId xmlns:a16="http://schemas.microsoft.com/office/drawing/2014/main" id="{F7DD1873-5835-D249-92B0-385AC4CF8052}"/>
+              </a:ext>
+            </a:extLst>
+          </p:cNvPr>
+          <p:cNvGrpSpPr/>
+          <p:nvPr/>
+        </p:nvGrpSpPr>
+        <p:grpSpPr>
+          <a:xfrm>
+            <a:off x="7849277" y="3082040"/>
+            <a:ext cx="1668586" cy="681620"/>
+            <a:chOff x="4467540" y="4051953"/>
+            <a:chExt cx="3047084" cy="1244741"/>
+          </a:xfrm>
+        </p:grpSpPr>
+        <p:grpSp>
+          <p:nvGrpSpPr>
+            <p:cNvPr id="33" name="Groupe 32">
+              <a:extLst>
+                <a:ext uri="{FF2B5EF4-FFF2-40B4-BE49-F238E27FC236}">
+                  <a16:creationId xmlns:a16="http://schemas.microsoft.com/office/drawing/2014/main" id="{A9C28895-0B76-E743-9340-4830EF9A20BB}"/>
+                </a:ext>
+              </a:extLst>
+            </p:cNvPr>
+            <p:cNvGrpSpPr/>
+            <p:nvPr/>
+          </p:nvGrpSpPr>
+          <p:grpSpPr>
+            <a:xfrm>
+              <a:off x="4886162" y="4051953"/>
+              <a:ext cx="2628462" cy="1244741"/>
+              <a:chOff x="4139926" y="2291668"/>
+              <a:chExt cx="3068600" cy="1453173"/>
+            </a:xfrm>
+          </p:grpSpPr>
+          <p:sp>
+            <p:nvSpPr>
+              <p:cNvPr id="38" name="Forme libre 37">
+                <a:extLst>
+                  <a:ext uri="{FF2B5EF4-FFF2-40B4-BE49-F238E27FC236}">
+                    <a16:creationId xmlns:a16="http://schemas.microsoft.com/office/drawing/2014/main" id="{3527E8FC-E1D3-5E43-B392-E1C4A7AC9D4C}"/>
+                  </a:ext>
+                </a:extLst>
+              </p:cNvPr>
+              <p:cNvSpPr/>
+              <p:nvPr/>
+            </p:nvSpPr>
+            <p:spPr>
+              <a:xfrm>
+                <a:off x="4445421" y="2291668"/>
+                <a:ext cx="2552170" cy="1453173"/>
+              </a:xfrm>
+              <a:custGeom>
+                <a:avLst/>
+                <a:gdLst>
+                  <a:gd name="connsiteX0" fmla="*/ 1884783 w 3023118"/>
+                  <a:gd name="connsiteY0" fmla="*/ 615821 h 2286000"/>
+                  <a:gd name="connsiteX1" fmla="*/ 1847461 w 3023118"/>
+                  <a:gd name="connsiteY1" fmla="*/ 102637 h 2286000"/>
+                  <a:gd name="connsiteX2" fmla="*/ 1483567 w 3023118"/>
+                  <a:gd name="connsiteY2" fmla="*/ 494523 h 2286000"/>
+                  <a:gd name="connsiteX3" fmla="*/ 1138335 w 3023118"/>
+                  <a:gd name="connsiteY3" fmla="*/ 0 h 2286000"/>
+                  <a:gd name="connsiteX4" fmla="*/ 1063690 w 3023118"/>
+                  <a:gd name="connsiteY4" fmla="*/ 541176 h 2286000"/>
+                  <a:gd name="connsiteX5" fmla="*/ 569167 w 3023118"/>
+                  <a:gd name="connsiteY5" fmla="*/ 270588 h 2286000"/>
+                  <a:gd name="connsiteX6" fmla="*/ 811763 w 3023118"/>
+                  <a:gd name="connsiteY6" fmla="*/ 867747 h 2286000"/>
+                  <a:gd name="connsiteX7" fmla="*/ 158620 w 3023118"/>
+                  <a:gd name="connsiteY7" fmla="*/ 858417 h 2286000"/>
+                  <a:gd name="connsiteX8" fmla="*/ 485192 w 3023118"/>
+                  <a:gd name="connsiteY8" fmla="*/ 1156996 h 2286000"/>
+                  <a:gd name="connsiteX9" fmla="*/ 0 w 3023118"/>
+                  <a:gd name="connsiteY9" fmla="*/ 1399592 h 2286000"/>
+                  <a:gd name="connsiteX10" fmla="*/ 653143 w 3023118"/>
+                  <a:gd name="connsiteY10" fmla="*/ 1446245 h 2286000"/>
+                  <a:gd name="connsiteX11" fmla="*/ 130628 w 3023118"/>
+                  <a:gd name="connsiteY11" fmla="*/ 2099388 h 2286000"/>
+                  <a:gd name="connsiteX12" fmla="*/ 961053 w 3023118"/>
+                  <a:gd name="connsiteY12" fmla="*/ 1744825 h 2286000"/>
+                  <a:gd name="connsiteX13" fmla="*/ 933061 w 3023118"/>
+                  <a:gd name="connsiteY13" fmla="*/ 2286000 h 2286000"/>
+                  <a:gd name="connsiteX14" fmla="*/ 1324947 w 3023118"/>
+                  <a:gd name="connsiteY14" fmla="*/ 1884784 h 2286000"/>
+                  <a:gd name="connsiteX15" fmla="*/ 1511559 w 3023118"/>
+                  <a:gd name="connsiteY15" fmla="*/ 2202025 h 2286000"/>
+                  <a:gd name="connsiteX16" fmla="*/ 1604865 w 3023118"/>
+                  <a:gd name="connsiteY16" fmla="*/ 2006082 h 2286000"/>
+                  <a:gd name="connsiteX17" fmla="*/ 1819469 w 3023118"/>
+                  <a:gd name="connsiteY17" fmla="*/ 2155372 h 2286000"/>
+                  <a:gd name="connsiteX18" fmla="*/ 1847461 w 3023118"/>
+                  <a:gd name="connsiteY18" fmla="*/ 1763486 h 2286000"/>
+                  <a:gd name="connsiteX19" fmla="*/ 2332653 w 3023118"/>
+                  <a:gd name="connsiteY19" fmla="*/ 1959429 h 2286000"/>
+                  <a:gd name="connsiteX20" fmla="*/ 2118049 w 3023118"/>
+                  <a:gd name="connsiteY20" fmla="*/ 1548882 h 2286000"/>
+                  <a:gd name="connsiteX21" fmla="*/ 3023118 w 3023118"/>
+                  <a:gd name="connsiteY21" fmla="*/ 1548882 h 2286000"/>
+                  <a:gd name="connsiteX22" fmla="*/ 2369975 w 3023118"/>
+                  <a:gd name="connsiteY22" fmla="*/ 1194319 h 2286000"/>
+                  <a:gd name="connsiteX23" fmla="*/ 2873828 w 3023118"/>
+                  <a:gd name="connsiteY23" fmla="*/ 923731 h 2286000"/>
+                  <a:gd name="connsiteX24" fmla="*/ 2239347 w 3023118"/>
+                  <a:gd name="connsiteY24" fmla="*/ 886408 h 2286000"/>
+                  <a:gd name="connsiteX25" fmla="*/ 2481943 w 3023118"/>
+                  <a:gd name="connsiteY25" fmla="*/ 363894 h 2286000"/>
+                  <a:gd name="connsiteX26" fmla="*/ 1884783 w 3023118"/>
+                  <a:gd name="connsiteY26" fmla="*/ 615821 h 2286000"/>
+                </a:gdLst>
+                <a:ahLst/>
+                <a:cxnLst>
+                  <a:cxn ang="0">
+                    <a:pos x="connsiteX0" y="connsiteY0"/>
+                  </a:cxn>
+                  <a:cxn ang="0">
+                    <a:pos x="connsiteX1" y="connsiteY1"/>
+                  </a:cxn>
+                  <a:cxn ang="0">
+                    <a:pos x="connsiteX2" y="connsiteY2"/>
+                  </a:cxn>
+                  <a:cxn ang="0">
+                    <a:pos x="connsiteX3" y="connsiteY3"/>
+                  </a:cxn>
+                  <a:cxn ang="0">
+                    <a:pos x="connsiteX4" y="connsiteY4"/>
+                  </a:cxn>
+                  <a:cxn ang="0">
+                    <a:pos x="connsiteX5" y="connsiteY5"/>
+                  </a:cxn>
+                  <a:cxn ang="0">
+                    <a:pos x="connsiteX6" y="connsiteY6"/>
+                  </a:cxn>
+                  <a:cxn ang="0">
+                    <a:pos x="connsiteX7" y="connsiteY7"/>
+                  </a:cxn>
+                  <a:cxn ang="0">
+                    <a:pos x="connsiteX8" y="connsiteY8"/>
+                  </a:cxn>
+                  <a:cxn ang="0">
+                    <a:pos x="connsiteX9" y="connsiteY9"/>
+                  </a:cxn>
+                  <a:cxn ang="0">
+                    <a:pos x="connsiteX10" y="connsiteY10"/>
+                  </a:cxn>
+                  <a:cxn ang="0">
+                    <a:pos x="connsiteX11" y="connsiteY11"/>
+                  </a:cxn>
+                  <a:cxn ang="0">
+                    <a:pos x="connsiteX12" y="connsiteY12"/>
+                  </a:cxn>
+                  <a:cxn ang="0">
+                    <a:pos x="connsiteX13" y="connsiteY13"/>
+                  </a:cxn>
+                  <a:cxn ang="0">
+                    <a:pos x="connsiteX14" y="connsiteY14"/>
+                  </a:cxn>
+                  <a:cxn ang="0">
+                    <a:pos x="connsiteX15" y="connsiteY15"/>
+                  </a:cxn>
+                  <a:cxn ang="0">
+                    <a:pos x="connsiteX16" y="connsiteY16"/>
+                  </a:cxn>
+                  <a:cxn ang="0">
+                    <a:pos x="connsiteX17" y="connsiteY17"/>
+                  </a:cxn>
+                  <a:cxn ang="0">
+                    <a:pos x="connsiteX18" y="connsiteY18"/>
+                  </a:cxn>
+                  <a:cxn ang="0">
+                    <a:pos x="connsiteX19" y="connsiteY19"/>
+                  </a:cxn>
+                  <a:cxn ang="0">
+                    <a:pos x="connsiteX20" y="connsiteY20"/>
+                  </a:cxn>
+                  <a:cxn ang="0">
+                    <a:pos x="connsiteX21" y="connsiteY21"/>
+                  </a:cxn>
+                  <a:cxn ang="0">
+                    <a:pos x="connsiteX22" y="connsiteY22"/>
+                  </a:cxn>
+                  <a:cxn ang="0">
+                    <a:pos x="connsiteX23" y="connsiteY23"/>
+                  </a:cxn>
+                  <a:cxn ang="0">
+                    <a:pos x="connsiteX24" y="connsiteY24"/>
+                  </a:cxn>
+                  <a:cxn ang="0">
+                    <a:pos x="connsiteX25" y="connsiteY25"/>
+                  </a:cxn>
+                  <a:cxn ang="0">
+                    <a:pos x="connsiteX26" y="connsiteY26"/>
+                  </a:cxn>
+                </a:cxnLst>
+                <a:rect l="l" t="t" r="r" b="b"/>
+                <a:pathLst>
+                  <a:path w="3023118" h="2286000">
+                    <a:moveTo>
+                      <a:pt x="1884783" y="615821"/>
+                    </a:moveTo>
+                    <a:lnTo>
+                      <a:pt x="1847461" y="102637"/>
+                    </a:lnTo>
+                    <a:lnTo>
+                      <a:pt x="1483567" y="494523"/>
+                    </a:lnTo>
+                    <a:lnTo>
+                      <a:pt x="1138335" y="0"/>
+                    </a:lnTo>
+                    <a:lnTo>
+                      <a:pt x="1063690" y="541176"/>
+                    </a:lnTo>
+                    <a:lnTo>
+                      <a:pt x="569167" y="270588"/>
+                    </a:lnTo>
+                    <a:lnTo>
+                      <a:pt x="811763" y="867747"/>
+                    </a:lnTo>
+                    <a:lnTo>
+                      <a:pt x="158620" y="858417"/>
+                    </a:lnTo>
+                    <a:lnTo>
+                      <a:pt x="485192" y="1156996"/>
+                    </a:lnTo>
+                    <a:lnTo>
+                      <a:pt x="0" y="1399592"/>
+                    </a:lnTo>
+                    <a:lnTo>
+                      <a:pt x="653143" y="1446245"/>
+                    </a:lnTo>
+                    <a:lnTo>
+                      <a:pt x="130628" y="2099388"/>
+                    </a:lnTo>
+                    <a:lnTo>
+                      <a:pt x="961053" y="1744825"/>
+                    </a:lnTo>
+                    <a:lnTo>
+                      <a:pt x="933061" y="2286000"/>
+                    </a:lnTo>
+                    <a:lnTo>
+                      <a:pt x="1324947" y="1884784"/>
+                    </a:lnTo>
+                    <a:lnTo>
+                      <a:pt x="1511559" y="2202025"/>
+                    </a:lnTo>
+                    <a:lnTo>
+                      <a:pt x="1604865" y="2006082"/>
+                    </a:lnTo>
+                    <a:lnTo>
+                      <a:pt x="1819469" y="2155372"/>
+                    </a:lnTo>
+                    <a:lnTo>
+                      <a:pt x="1847461" y="1763486"/>
+                    </a:lnTo>
+                    <a:lnTo>
+                      <a:pt x="2332653" y="1959429"/>
+                    </a:lnTo>
+                    <a:lnTo>
+                      <a:pt x="2118049" y="1548882"/>
+                    </a:lnTo>
+                    <a:lnTo>
+                      <a:pt x="3023118" y="1548882"/>
+                    </a:lnTo>
+                    <a:lnTo>
+                      <a:pt x="2369975" y="1194319"/>
+                    </a:lnTo>
+                    <a:lnTo>
+                      <a:pt x="2873828" y="923731"/>
+                    </a:lnTo>
+                    <a:lnTo>
+                      <a:pt x="2239347" y="886408"/>
+                    </a:lnTo>
+                    <a:lnTo>
+                      <a:pt x="2481943" y="363894"/>
+                    </a:lnTo>
+                    <a:lnTo>
+                      <a:pt x="1884783" y="615821"/>
+                    </a:lnTo>
+                    <a:close/>
+                  </a:path>
+                </a:pathLst>
+              </a:custGeom>
+              <a:solidFill>
+                <a:srgbClr val="FFFF00"/>
+              </a:solidFill>
+              <a:ln>
+                <a:solidFill>
+                  <a:srgbClr val="FF0000"/>
+                </a:solidFill>
+              </a:ln>
+            </p:spPr>
+            <p:style>
+              <a:lnRef idx="2">
+                <a:schemeClr val="accent1">
+                  <a:shade val="50000"/>
+                </a:schemeClr>
+              </a:lnRef>
+              <a:fillRef idx="1">
+                <a:schemeClr val="accent1"/>
+              </a:fillRef>
+              <a:effectRef idx="0">
+                <a:schemeClr val="accent1"/>
+              </a:effectRef>
+              <a:fontRef idx="minor">
+                <a:schemeClr val="lt1"/>
+              </a:fontRef>
+            </p:style>
+            <p:txBody>
+              <a:bodyPr rtlCol="0" anchor="ctr"/>
+              <a:lstStyle/>
+              <a:p>
+                <a:pPr algn="ctr"/>
+                <a:endParaRPr lang="fr-FR" sz="900"/>
+              </a:p>
+            </p:txBody>
+          </p:sp>
+          <p:sp>
+            <p:nvSpPr>
+              <p:cNvPr id="39" name="Rectangle 38">
+                <a:extLst>
+                  <a:ext uri="{FF2B5EF4-FFF2-40B4-BE49-F238E27FC236}">
+                    <a16:creationId xmlns:a16="http://schemas.microsoft.com/office/drawing/2014/main" id="{442D49A0-6F58-4645-BF54-815FD8F896D1}"/>
+                  </a:ext>
+                </a:extLst>
+              </p:cNvPr>
+              <p:cNvSpPr/>
+              <p:nvPr/>
+            </p:nvSpPr>
+            <p:spPr>
+              <a:xfrm rot="21000827">
+                <a:off x="4139926" y="2595201"/>
+                <a:ext cx="3068600" cy="721777"/>
+              </a:xfrm>
+              <a:prstGeom prst="rect">
+                <a:avLst/>
+              </a:prstGeom>
+              <a:noFill/>
+            </p:spPr>
+            <p:txBody>
+              <a:bodyPr wrap="square" lIns="91440" tIns="45720" rIns="91440" bIns="45720">
+                <a:spAutoFit/>
+              </a:bodyPr>
+              <a:lstStyle/>
+              <a:p>
+                <a:pPr algn="ctr"/>
+                <a:r>
+                  <a:rPr lang="fr-FR" sz="1600" b="1" dirty="0">
+                    <a:ln w="12700">
+                      <a:noFill/>
+                      <a:prstDash val="solid"/>
+                    </a:ln>
+                    <a:effectLst>
+                      <a:outerShdw dist="38100" dir="2640000" algn="bl" rotWithShape="0">
+                        <a:schemeClr val="tx2">
+                          <a:lumMod val="75000"/>
+                        </a:schemeClr>
+                      </a:outerShdw>
+                    </a:effectLst>
+                  </a:rPr>
+                  <a:t>Evénement</a:t>
+                </a:r>
+              </a:p>
+            </p:txBody>
+          </p:sp>
+        </p:grpSp>
+        <p:grpSp>
+          <p:nvGrpSpPr>
+            <p:cNvPr id="34" name="Groupe 33">
+              <a:extLst>
+                <a:ext uri="{FF2B5EF4-FFF2-40B4-BE49-F238E27FC236}">
+                  <a16:creationId xmlns:a16="http://schemas.microsoft.com/office/drawing/2014/main" id="{6049FB0C-BD81-6744-89FA-30B75BAD963B}"/>
+                </a:ext>
+              </a:extLst>
+            </p:cNvPr>
+            <p:cNvGrpSpPr/>
+            <p:nvPr/>
+          </p:nvGrpSpPr>
+          <p:grpSpPr>
+            <a:xfrm>
+              <a:off x="4467540" y="4079457"/>
+              <a:ext cx="736611" cy="1100506"/>
+              <a:chOff x="3153747" y="2382820"/>
+              <a:chExt cx="736611" cy="1100506"/>
+            </a:xfrm>
+          </p:grpSpPr>
+          <p:sp>
+            <p:nvSpPr>
+              <p:cNvPr id="35" name="Arc 34">
+                <a:extLst>
+                  <a:ext uri="{FF2B5EF4-FFF2-40B4-BE49-F238E27FC236}">
+                    <a16:creationId xmlns:a16="http://schemas.microsoft.com/office/drawing/2014/main" id="{F666ACC0-FF61-1B46-AEFC-F2F7CF34B73D}"/>
+                  </a:ext>
+                </a:extLst>
+              </p:cNvPr>
+              <p:cNvSpPr/>
+              <p:nvPr/>
+            </p:nvSpPr>
+            <p:spPr>
+              <a:xfrm rot="18941501">
+                <a:off x="3153747" y="2382820"/>
+                <a:ext cx="736611" cy="736611"/>
+              </a:xfrm>
+              <a:prstGeom prst="arc">
+                <a:avLst/>
+              </a:prstGeom>
+              <a:ln w="28575">
+                <a:solidFill>
+                  <a:schemeClr val="tx1"/>
+                </a:solidFill>
+              </a:ln>
+            </p:spPr>
+            <p:style>
+              <a:lnRef idx="1">
+                <a:schemeClr val="accent1"/>
+              </a:lnRef>
+              <a:fillRef idx="0">
+                <a:schemeClr val="accent1"/>
+              </a:fillRef>
+              <a:effectRef idx="0">
+                <a:schemeClr val="accent1"/>
+              </a:effectRef>
+              <a:fontRef idx="minor">
+                <a:schemeClr val="tx1"/>
+              </a:fontRef>
+            </p:style>
+            <p:txBody>
+              <a:bodyPr rtlCol="0" anchor="ctr"/>
+              <a:lstStyle/>
+              <a:p>
+                <a:pPr algn="ctr"/>
+                <a:endParaRPr lang="fr-FR" sz="1000"/>
+              </a:p>
+            </p:txBody>
+          </p:sp>
+          <p:sp>
+            <p:nvSpPr>
+              <p:cNvPr id="36" name="Arc 35">
+                <a:extLst>
+                  <a:ext uri="{FF2B5EF4-FFF2-40B4-BE49-F238E27FC236}">
+                    <a16:creationId xmlns:a16="http://schemas.microsoft.com/office/drawing/2014/main" id="{0E09215A-89A9-344A-93D3-C254ADE7A6F7}"/>
+                  </a:ext>
+                </a:extLst>
+              </p:cNvPr>
+              <p:cNvSpPr/>
+              <p:nvPr/>
+            </p:nvSpPr>
+            <p:spPr>
+              <a:xfrm rot="18394680">
+                <a:off x="3153747" y="2550772"/>
+                <a:ext cx="736611" cy="736611"/>
+              </a:xfrm>
+              <a:prstGeom prst="arc">
+                <a:avLst/>
+              </a:prstGeom>
+              <a:ln w="28575">
+                <a:solidFill>
+                  <a:schemeClr val="tx1"/>
+                </a:solidFill>
+              </a:ln>
+            </p:spPr>
+            <p:style>
+              <a:lnRef idx="1">
+                <a:schemeClr val="accent1"/>
+              </a:lnRef>
+              <a:fillRef idx="0">
+                <a:schemeClr val="accent1"/>
+              </a:fillRef>
+              <a:effectRef idx="0">
+                <a:schemeClr val="accent1"/>
+              </a:effectRef>
+              <a:fontRef idx="minor">
+                <a:schemeClr val="tx1"/>
+              </a:fontRef>
+            </p:style>
+            <p:txBody>
+              <a:bodyPr rtlCol="0" anchor="ctr"/>
+              <a:lstStyle/>
+              <a:p>
+                <a:pPr algn="ctr"/>
+                <a:endParaRPr lang="fr-FR" sz="1000"/>
+              </a:p>
+            </p:txBody>
+          </p:sp>
+          <p:sp>
+            <p:nvSpPr>
+              <p:cNvPr id="37" name="Arc 36">
+                <a:extLst>
+                  <a:ext uri="{FF2B5EF4-FFF2-40B4-BE49-F238E27FC236}">
+                    <a16:creationId xmlns:a16="http://schemas.microsoft.com/office/drawing/2014/main" id="{8B72436B-F811-9B48-A13F-974B879A42C9}"/>
+                  </a:ext>
+                </a:extLst>
+              </p:cNvPr>
+              <p:cNvSpPr/>
+              <p:nvPr/>
+            </p:nvSpPr>
+            <p:spPr>
+              <a:xfrm rot="17674455">
+                <a:off x="3153747" y="2746715"/>
+                <a:ext cx="736611" cy="736611"/>
+              </a:xfrm>
+              <a:prstGeom prst="arc">
+                <a:avLst/>
+              </a:prstGeom>
+              <a:ln w="28575">
+                <a:solidFill>
+                  <a:schemeClr val="tx1"/>
+                </a:solidFill>
+              </a:ln>
+            </p:spPr>
+            <p:style>
+              <a:lnRef idx="1">
+                <a:schemeClr val="accent1"/>
+              </a:lnRef>
+              <a:fillRef idx="0">
+                <a:schemeClr val="accent1"/>
+              </a:fillRef>
+              <a:effectRef idx="0">
+                <a:schemeClr val="accent1"/>
+              </a:effectRef>
+              <a:fontRef idx="minor">
+                <a:schemeClr val="tx1"/>
+              </a:fontRef>
+            </p:style>
+            <p:txBody>
+              <a:bodyPr rtlCol="0" anchor="ctr"/>
+              <a:lstStyle/>
+              <a:p>
+                <a:pPr algn="ctr"/>
+                <a:endParaRPr lang="fr-FR" sz="1000"/>
+              </a:p>
+            </p:txBody>
+          </p:sp>
+        </p:grpSp>
+      </p:grpSp>
+      <p:grpSp>
+        <p:nvGrpSpPr>
+          <p:cNvPr id="45" name="Groupe 44">
+            <a:extLst>
+              <a:ext uri="{FF2B5EF4-FFF2-40B4-BE49-F238E27FC236}">
+                <a16:creationId xmlns:a16="http://schemas.microsoft.com/office/drawing/2014/main" id="{336DFE2A-089F-3940-A9BA-F47DFCB2D085}"/>
+              </a:ext>
+            </a:extLst>
+          </p:cNvPr>
+          <p:cNvGrpSpPr/>
+          <p:nvPr/>
+        </p:nvGrpSpPr>
+        <p:grpSpPr>
+          <a:xfrm>
+            <a:off x="7849277" y="3082040"/>
+            <a:ext cx="1668586" cy="681620"/>
+            <a:chOff x="4467540" y="4051953"/>
+            <a:chExt cx="3047084" cy="1244741"/>
+          </a:xfrm>
+        </p:grpSpPr>
+        <p:grpSp>
+          <p:nvGrpSpPr>
+            <p:cNvPr id="46" name="Groupe 45">
+              <a:extLst>
+                <a:ext uri="{FF2B5EF4-FFF2-40B4-BE49-F238E27FC236}">
+                  <a16:creationId xmlns:a16="http://schemas.microsoft.com/office/drawing/2014/main" id="{84216C77-FFF8-AA4E-9B57-12443E691790}"/>
+                </a:ext>
+              </a:extLst>
+            </p:cNvPr>
+            <p:cNvGrpSpPr/>
+            <p:nvPr/>
+          </p:nvGrpSpPr>
+          <p:grpSpPr>
+            <a:xfrm>
+              <a:off x="4886162" y="4051953"/>
+              <a:ext cx="2628462" cy="1244741"/>
+              <a:chOff x="4139926" y="2291668"/>
+              <a:chExt cx="3068600" cy="1453173"/>
+            </a:xfrm>
+          </p:grpSpPr>
+          <p:sp>
+            <p:nvSpPr>
+              <p:cNvPr id="51" name="Forme libre 50">
+                <a:extLst>
+                  <a:ext uri="{FF2B5EF4-FFF2-40B4-BE49-F238E27FC236}">
+                    <a16:creationId xmlns:a16="http://schemas.microsoft.com/office/drawing/2014/main" id="{9E47AE38-D9DA-984C-BA31-56A193DA4763}"/>
+                  </a:ext>
+                </a:extLst>
+              </p:cNvPr>
+              <p:cNvSpPr/>
+              <p:nvPr/>
+            </p:nvSpPr>
+            <p:spPr>
+              <a:xfrm>
+                <a:off x="4445421" y="2291668"/>
+                <a:ext cx="2552170" cy="1453173"/>
+              </a:xfrm>
+              <a:custGeom>
+                <a:avLst/>
+                <a:gdLst>
+                  <a:gd name="connsiteX0" fmla="*/ 1884783 w 3023118"/>
+                  <a:gd name="connsiteY0" fmla="*/ 615821 h 2286000"/>
+                  <a:gd name="connsiteX1" fmla="*/ 1847461 w 3023118"/>
+                  <a:gd name="connsiteY1" fmla="*/ 102637 h 2286000"/>
+                  <a:gd name="connsiteX2" fmla="*/ 1483567 w 3023118"/>
+                  <a:gd name="connsiteY2" fmla="*/ 494523 h 2286000"/>
+                  <a:gd name="connsiteX3" fmla="*/ 1138335 w 3023118"/>
+                  <a:gd name="connsiteY3" fmla="*/ 0 h 2286000"/>
+                  <a:gd name="connsiteX4" fmla="*/ 1063690 w 3023118"/>
+                  <a:gd name="connsiteY4" fmla="*/ 541176 h 2286000"/>
+                  <a:gd name="connsiteX5" fmla="*/ 569167 w 3023118"/>
+                  <a:gd name="connsiteY5" fmla="*/ 270588 h 2286000"/>
+                  <a:gd name="connsiteX6" fmla="*/ 811763 w 3023118"/>
+                  <a:gd name="connsiteY6" fmla="*/ 867747 h 2286000"/>
+                  <a:gd name="connsiteX7" fmla="*/ 158620 w 3023118"/>
+                  <a:gd name="connsiteY7" fmla="*/ 858417 h 2286000"/>
+                  <a:gd name="connsiteX8" fmla="*/ 485192 w 3023118"/>
+                  <a:gd name="connsiteY8" fmla="*/ 1156996 h 2286000"/>
+                  <a:gd name="connsiteX9" fmla="*/ 0 w 3023118"/>
+                  <a:gd name="connsiteY9" fmla="*/ 1399592 h 2286000"/>
+                  <a:gd name="connsiteX10" fmla="*/ 653143 w 3023118"/>
+                  <a:gd name="connsiteY10" fmla="*/ 1446245 h 2286000"/>
+                  <a:gd name="connsiteX11" fmla="*/ 130628 w 3023118"/>
+                  <a:gd name="connsiteY11" fmla="*/ 2099388 h 2286000"/>
+                  <a:gd name="connsiteX12" fmla="*/ 961053 w 3023118"/>
+                  <a:gd name="connsiteY12" fmla="*/ 1744825 h 2286000"/>
+                  <a:gd name="connsiteX13" fmla="*/ 933061 w 3023118"/>
+                  <a:gd name="connsiteY13" fmla="*/ 2286000 h 2286000"/>
+                  <a:gd name="connsiteX14" fmla="*/ 1324947 w 3023118"/>
+                  <a:gd name="connsiteY14" fmla="*/ 1884784 h 2286000"/>
+                  <a:gd name="connsiteX15" fmla="*/ 1511559 w 3023118"/>
+                  <a:gd name="connsiteY15" fmla="*/ 2202025 h 2286000"/>
+                  <a:gd name="connsiteX16" fmla="*/ 1604865 w 3023118"/>
+                  <a:gd name="connsiteY16" fmla="*/ 2006082 h 2286000"/>
+                  <a:gd name="connsiteX17" fmla="*/ 1819469 w 3023118"/>
+                  <a:gd name="connsiteY17" fmla="*/ 2155372 h 2286000"/>
+                  <a:gd name="connsiteX18" fmla="*/ 1847461 w 3023118"/>
+                  <a:gd name="connsiteY18" fmla="*/ 1763486 h 2286000"/>
+                  <a:gd name="connsiteX19" fmla="*/ 2332653 w 3023118"/>
+                  <a:gd name="connsiteY19" fmla="*/ 1959429 h 2286000"/>
+                  <a:gd name="connsiteX20" fmla="*/ 2118049 w 3023118"/>
+                  <a:gd name="connsiteY20" fmla="*/ 1548882 h 2286000"/>
+                  <a:gd name="connsiteX21" fmla="*/ 3023118 w 3023118"/>
+                  <a:gd name="connsiteY21" fmla="*/ 1548882 h 2286000"/>
+                  <a:gd name="connsiteX22" fmla="*/ 2369975 w 3023118"/>
+                  <a:gd name="connsiteY22" fmla="*/ 1194319 h 2286000"/>
+                  <a:gd name="connsiteX23" fmla="*/ 2873828 w 3023118"/>
+                  <a:gd name="connsiteY23" fmla="*/ 923731 h 2286000"/>
+                  <a:gd name="connsiteX24" fmla="*/ 2239347 w 3023118"/>
+                  <a:gd name="connsiteY24" fmla="*/ 886408 h 2286000"/>
+                  <a:gd name="connsiteX25" fmla="*/ 2481943 w 3023118"/>
+                  <a:gd name="connsiteY25" fmla="*/ 363894 h 2286000"/>
+                  <a:gd name="connsiteX26" fmla="*/ 1884783 w 3023118"/>
+                  <a:gd name="connsiteY26" fmla="*/ 615821 h 2286000"/>
+                </a:gdLst>
+                <a:ahLst/>
+                <a:cxnLst>
+                  <a:cxn ang="0">
+                    <a:pos x="connsiteX0" y="connsiteY0"/>
+                  </a:cxn>
+                  <a:cxn ang="0">
+                    <a:pos x="connsiteX1" y="connsiteY1"/>
+                  </a:cxn>
+                  <a:cxn ang="0">
+                    <a:pos x="connsiteX2" y="connsiteY2"/>
+                  </a:cxn>
+                  <a:cxn ang="0">
+                    <a:pos x="connsiteX3" y="connsiteY3"/>
+                  </a:cxn>
+                  <a:cxn ang="0">
+                    <a:pos x="connsiteX4" y="connsiteY4"/>
+                  </a:cxn>
+                  <a:cxn ang="0">
+                    <a:pos x="connsiteX5" y="connsiteY5"/>
+                  </a:cxn>
+                  <a:cxn ang="0">
+                    <a:pos x="connsiteX6" y="connsiteY6"/>
+                  </a:cxn>
+                  <a:cxn ang="0">
+                    <a:pos x="connsiteX7" y="connsiteY7"/>
+                  </a:cxn>
+                  <a:cxn ang="0">
+                    <a:pos x="connsiteX8" y="connsiteY8"/>
+                  </a:cxn>
+                  <a:cxn ang="0">
+                    <a:pos x="connsiteX9" y="connsiteY9"/>
+                  </a:cxn>
+                  <a:cxn ang="0">
+                    <a:pos x="connsiteX10" y="connsiteY10"/>
+                  </a:cxn>
+                  <a:cxn ang="0">
+                    <a:pos x="connsiteX11" y="connsiteY11"/>
+                  </a:cxn>
+                  <a:cxn ang="0">
+                    <a:pos x="connsiteX12" y="connsiteY12"/>
+                  </a:cxn>
+                  <a:cxn ang="0">
+                    <a:pos x="connsiteX13" y="connsiteY13"/>
+                  </a:cxn>
+                  <a:cxn ang="0">
+                    <a:pos x="connsiteX14" y="connsiteY14"/>
+                  </a:cxn>
+                  <a:cxn ang="0">
+                    <a:pos x="connsiteX15" y="connsiteY15"/>
+                  </a:cxn>
+                  <a:cxn ang="0">
+                    <a:pos x="connsiteX16" y="connsiteY16"/>
+                  </a:cxn>
+                  <a:cxn ang="0">
+                    <a:pos x="connsiteX17" y="connsiteY17"/>
+                  </a:cxn>
+                  <a:cxn ang="0">
+                    <a:pos x="connsiteX18" y="connsiteY18"/>
+                  </a:cxn>
+                  <a:cxn ang="0">
+                    <a:pos x="connsiteX19" y="connsiteY19"/>
+                  </a:cxn>
+                  <a:cxn ang="0">
+                    <a:pos x="connsiteX20" y="connsiteY20"/>
+                  </a:cxn>
+                  <a:cxn ang="0">
+                    <a:pos x="connsiteX21" y="connsiteY21"/>
+                  </a:cxn>
+                  <a:cxn ang="0">
+                    <a:pos x="connsiteX22" y="connsiteY22"/>
+                  </a:cxn>
+                  <a:cxn ang="0">
+                    <a:pos x="connsiteX23" y="connsiteY23"/>
+                  </a:cxn>
+                  <a:cxn ang="0">
+                    <a:pos x="connsiteX24" y="connsiteY24"/>
+                  </a:cxn>
+                  <a:cxn ang="0">
+                    <a:pos x="connsiteX25" y="connsiteY25"/>
+                  </a:cxn>
+                  <a:cxn ang="0">
+                    <a:pos x="connsiteX26" y="connsiteY26"/>
+                  </a:cxn>
+                </a:cxnLst>
+                <a:rect l="l" t="t" r="r" b="b"/>
+                <a:pathLst>
+                  <a:path w="3023118" h="2286000">
+                    <a:moveTo>
+                      <a:pt x="1884783" y="615821"/>
+                    </a:moveTo>
+                    <a:lnTo>
+                      <a:pt x="1847461" y="102637"/>
+                    </a:lnTo>
+                    <a:lnTo>
+                      <a:pt x="1483567" y="494523"/>
+                    </a:lnTo>
+                    <a:lnTo>
+                      <a:pt x="1138335" y="0"/>
+                    </a:lnTo>
+                    <a:lnTo>
+                      <a:pt x="1063690" y="541176"/>
+                    </a:lnTo>
+                    <a:lnTo>
+                      <a:pt x="569167" y="270588"/>
+                    </a:lnTo>
+                    <a:lnTo>
+                      <a:pt x="811763" y="867747"/>
+                    </a:lnTo>
+                    <a:lnTo>
+                      <a:pt x="158620" y="858417"/>
+                    </a:lnTo>
+                    <a:lnTo>
+                      <a:pt x="485192" y="1156996"/>
+                    </a:lnTo>
+                    <a:lnTo>
+                      <a:pt x="0" y="1399592"/>
+                    </a:lnTo>
+                    <a:lnTo>
+                      <a:pt x="653143" y="1446245"/>
+                    </a:lnTo>
+                    <a:lnTo>
+                      <a:pt x="130628" y="2099388"/>
+                    </a:lnTo>
+                    <a:lnTo>
+                      <a:pt x="961053" y="1744825"/>
+                    </a:lnTo>
+                    <a:lnTo>
+                      <a:pt x="933061" y="2286000"/>
+                    </a:lnTo>
+                    <a:lnTo>
+                      <a:pt x="1324947" y="1884784"/>
+                    </a:lnTo>
+                    <a:lnTo>
+                      <a:pt x="1511559" y="2202025"/>
+                    </a:lnTo>
+                    <a:lnTo>
+                      <a:pt x="1604865" y="2006082"/>
+                    </a:lnTo>
+                    <a:lnTo>
+                      <a:pt x="1819469" y="2155372"/>
+                    </a:lnTo>
+                    <a:lnTo>
+                      <a:pt x="1847461" y="1763486"/>
+                    </a:lnTo>
+                    <a:lnTo>
+                      <a:pt x="2332653" y="1959429"/>
+                    </a:lnTo>
+                    <a:lnTo>
+                      <a:pt x="2118049" y="1548882"/>
+                    </a:lnTo>
+                    <a:lnTo>
+                      <a:pt x="3023118" y="1548882"/>
+                    </a:lnTo>
+                    <a:lnTo>
+                      <a:pt x="2369975" y="1194319"/>
+                    </a:lnTo>
+                    <a:lnTo>
+                      <a:pt x="2873828" y="923731"/>
+                    </a:lnTo>
+                    <a:lnTo>
+                      <a:pt x="2239347" y="886408"/>
+                    </a:lnTo>
+                    <a:lnTo>
+                      <a:pt x="2481943" y="363894"/>
+                    </a:lnTo>
+                    <a:lnTo>
+                      <a:pt x="1884783" y="615821"/>
+                    </a:lnTo>
+                    <a:close/>
+                  </a:path>
+                </a:pathLst>
+              </a:custGeom>
+              <a:solidFill>
+                <a:srgbClr val="FFFF00"/>
+              </a:solidFill>
+              <a:ln>
+                <a:solidFill>
+                  <a:srgbClr val="FF0000"/>
+                </a:solidFill>
+              </a:ln>
+            </p:spPr>
+            <p:style>
+              <a:lnRef idx="2">
+                <a:schemeClr val="accent1">
+                  <a:shade val="50000"/>
+                </a:schemeClr>
+              </a:lnRef>
+              <a:fillRef idx="1">
+                <a:schemeClr val="accent1"/>
+              </a:fillRef>
+              <a:effectRef idx="0">
+                <a:schemeClr val="accent1"/>
+              </a:effectRef>
+              <a:fontRef idx="minor">
+                <a:schemeClr val="lt1"/>
+              </a:fontRef>
+            </p:style>
+            <p:txBody>
+              <a:bodyPr rtlCol="0" anchor="ctr"/>
+              <a:lstStyle/>
+              <a:p>
+                <a:pPr algn="ctr"/>
+                <a:endParaRPr lang="fr-FR" sz="900"/>
+              </a:p>
+            </p:txBody>
+          </p:sp>
+          <p:sp>
+            <p:nvSpPr>
+              <p:cNvPr id="52" name="Rectangle 51">
+                <a:extLst>
+                  <a:ext uri="{FF2B5EF4-FFF2-40B4-BE49-F238E27FC236}">
+                    <a16:creationId xmlns:a16="http://schemas.microsoft.com/office/drawing/2014/main" id="{F6861F44-D1C3-8F4A-9926-9AC339FD6171}"/>
+                  </a:ext>
+                </a:extLst>
+              </p:cNvPr>
+              <p:cNvSpPr/>
+              <p:nvPr/>
+            </p:nvSpPr>
+            <p:spPr>
+              <a:xfrm rot="21000827">
+                <a:off x="4139926" y="2595201"/>
+                <a:ext cx="3068600" cy="721777"/>
+              </a:xfrm>
+              <a:prstGeom prst="rect">
+                <a:avLst/>
+              </a:prstGeom>
+              <a:noFill/>
+            </p:spPr>
+            <p:txBody>
+              <a:bodyPr wrap="square" lIns="91440" tIns="45720" rIns="91440" bIns="45720">
+                <a:spAutoFit/>
+              </a:bodyPr>
+              <a:lstStyle/>
+              <a:p>
+                <a:pPr algn="ctr"/>
+                <a:r>
+                  <a:rPr lang="fr-FR" sz="1600" b="1" dirty="0">
+                    <a:ln w="12700">
+                      <a:noFill/>
+                      <a:prstDash val="solid"/>
+                    </a:ln>
+                    <a:effectLst>
+                      <a:outerShdw dist="38100" dir="2640000" algn="bl" rotWithShape="0">
+                        <a:schemeClr val="tx2">
+                          <a:lumMod val="75000"/>
+                        </a:schemeClr>
+                      </a:outerShdw>
+                    </a:effectLst>
+                  </a:rPr>
+                  <a:t>Evénement</a:t>
+                </a:r>
+              </a:p>
+            </p:txBody>
+          </p:sp>
+        </p:grpSp>
+        <p:grpSp>
+          <p:nvGrpSpPr>
+            <p:cNvPr id="47" name="Groupe 46">
+              <a:extLst>
+                <a:ext uri="{FF2B5EF4-FFF2-40B4-BE49-F238E27FC236}">
+                  <a16:creationId xmlns:a16="http://schemas.microsoft.com/office/drawing/2014/main" id="{8AC65626-F48B-AC43-8913-7CBBFBDEC8F0}"/>
+                </a:ext>
+              </a:extLst>
+            </p:cNvPr>
+            <p:cNvGrpSpPr/>
+            <p:nvPr/>
+          </p:nvGrpSpPr>
+          <p:grpSpPr>
+            <a:xfrm>
+              <a:off x="4467540" y="4079457"/>
+              <a:ext cx="736611" cy="1100506"/>
+              <a:chOff x="3153747" y="2382820"/>
+              <a:chExt cx="736611" cy="1100506"/>
+            </a:xfrm>
+          </p:grpSpPr>
+          <p:sp>
+            <p:nvSpPr>
+              <p:cNvPr id="48" name="Arc 47">
+                <a:extLst>
+                  <a:ext uri="{FF2B5EF4-FFF2-40B4-BE49-F238E27FC236}">
+                    <a16:creationId xmlns:a16="http://schemas.microsoft.com/office/drawing/2014/main" id="{7664E0B6-5DBE-F04C-B75F-93D63D35ECA8}"/>
+                  </a:ext>
+                </a:extLst>
+              </p:cNvPr>
+              <p:cNvSpPr/>
+              <p:nvPr/>
+            </p:nvSpPr>
+            <p:spPr>
+              <a:xfrm rot="18941501">
+                <a:off x="3153747" y="2382820"/>
+                <a:ext cx="736611" cy="736611"/>
+              </a:xfrm>
+              <a:prstGeom prst="arc">
+                <a:avLst/>
+              </a:prstGeom>
+              <a:ln w="28575">
+                <a:solidFill>
+                  <a:schemeClr val="tx1"/>
+                </a:solidFill>
+              </a:ln>
+            </p:spPr>
+            <p:style>
+              <a:lnRef idx="1">
+                <a:schemeClr val="accent1"/>
+              </a:lnRef>
+              <a:fillRef idx="0">
+                <a:schemeClr val="accent1"/>
+              </a:fillRef>
+              <a:effectRef idx="0">
+                <a:schemeClr val="accent1"/>
+              </a:effectRef>
+              <a:fontRef idx="minor">
+                <a:schemeClr val="tx1"/>
+              </a:fontRef>
+            </p:style>
+            <p:txBody>
+              <a:bodyPr rtlCol="0" anchor="ctr"/>
+              <a:lstStyle/>
+              <a:p>
+                <a:pPr algn="ctr"/>
+                <a:endParaRPr lang="fr-FR" sz="1000"/>
+              </a:p>
+            </p:txBody>
+          </p:sp>
+          <p:sp>
+            <p:nvSpPr>
+              <p:cNvPr id="49" name="Arc 48">
+                <a:extLst>
+                  <a:ext uri="{FF2B5EF4-FFF2-40B4-BE49-F238E27FC236}">
+                    <a16:creationId xmlns:a16="http://schemas.microsoft.com/office/drawing/2014/main" id="{24DDBC7D-A31D-6B47-808A-8D594148FFEC}"/>
+                  </a:ext>
+                </a:extLst>
+              </p:cNvPr>
+              <p:cNvSpPr/>
+              <p:nvPr/>
+            </p:nvSpPr>
+            <p:spPr>
+              <a:xfrm rot="18394680">
+                <a:off x="3153747" y="2550772"/>
+                <a:ext cx="736611" cy="736611"/>
+              </a:xfrm>
+              <a:prstGeom prst="arc">
+                <a:avLst/>
+              </a:prstGeom>
+              <a:ln w="28575">
+                <a:solidFill>
+                  <a:schemeClr val="tx1"/>
+                </a:solidFill>
+              </a:ln>
+            </p:spPr>
+            <p:style>
+              <a:lnRef idx="1">
+                <a:schemeClr val="accent1"/>
+              </a:lnRef>
+              <a:fillRef idx="0">
+                <a:schemeClr val="accent1"/>
+              </a:fillRef>
+              <a:effectRef idx="0">
+                <a:schemeClr val="accent1"/>
+              </a:effectRef>
+              <a:fontRef idx="minor">
+                <a:schemeClr val="tx1"/>
+              </a:fontRef>
+            </p:style>
+            <p:txBody>
+              <a:bodyPr rtlCol="0" anchor="ctr"/>
+              <a:lstStyle/>
+              <a:p>
+                <a:pPr algn="ctr"/>
+                <a:endParaRPr lang="fr-FR" sz="1000"/>
+              </a:p>
+            </p:txBody>
+          </p:sp>
+          <p:sp>
+            <p:nvSpPr>
+              <p:cNvPr id="50" name="Arc 49">
+                <a:extLst>
+                  <a:ext uri="{FF2B5EF4-FFF2-40B4-BE49-F238E27FC236}">
+                    <a16:creationId xmlns:a16="http://schemas.microsoft.com/office/drawing/2014/main" id="{AAB60A63-A43C-0C47-BB97-264A4E2DD0F1}"/>
+                  </a:ext>
+                </a:extLst>
+              </p:cNvPr>
+              <p:cNvSpPr/>
+              <p:nvPr/>
+            </p:nvSpPr>
+            <p:spPr>
+              <a:xfrm rot="17674455">
+                <a:off x="3153747" y="2746715"/>
+                <a:ext cx="736611" cy="736611"/>
+              </a:xfrm>
+              <a:prstGeom prst="arc">
+                <a:avLst/>
+              </a:prstGeom>
+              <a:ln w="28575">
+                <a:solidFill>
+                  <a:schemeClr val="tx1"/>
+                </a:solidFill>
+              </a:ln>
+            </p:spPr>
+            <p:style>
+              <a:lnRef idx="1">
+                <a:schemeClr val="accent1"/>
+              </a:lnRef>
+              <a:fillRef idx="0">
+                <a:schemeClr val="accent1"/>
+              </a:fillRef>
+              <a:effectRef idx="0">
+                <a:schemeClr val="accent1"/>
+              </a:effectRef>
+              <a:fontRef idx="minor">
+                <a:schemeClr val="tx1"/>
+              </a:fontRef>
+            </p:style>
+            <p:txBody>
+              <a:bodyPr rtlCol="0" anchor="ctr"/>
+              <a:lstStyle/>
+              <a:p>
+                <a:pPr algn="ctr"/>
+                <a:endParaRPr lang="fr-FR" sz="1000"/>
+              </a:p>
+            </p:txBody>
+          </p:sp>
+        </p:grpSp>
+      </p:grpSp>
+      <p:grpSp>
+        <p:nvGrpSpPr>
+          <p:cNvPr id="53" name="Groupe 52">
+            <a:extLst>
+              <a:ext uri="{FF2B5EF4-FFF2-40B4-BE49-F238E27FC236}">
+                <a16:creationId xmlns:a16="http://schemas.microsoft.com/office/drawing/2014/main" id="{11982EC3-F2A1-3A40-8E31-230E1EA19350}"/>
+              </a:ext>
+            </a:extLst>
+          </p:cNvPr>
+          <p:cNvGrpSpPr/>
+          <p:nvPr/>
+        </p:nvGrpSpPr>
+        <p:grpSpPr>
+          <a:xfrm>
+            <a:off x="7849277" y="3082040"/>
+            <a:ext cx="1668586" cy="681620"/>
+            <a:chOff x="4467540" y="4051953"/>
+            <a:chExt cx="3047084" cy="1244741"/>
+          </a:xfrm>
+        </p:grpSpPr>
+        <p:grpSp>
+          <p:nvGrpSpPr>
+            <p:cNvPr id="54" name="Groupe 53">
+              <a:extLst>
+                <a:ext uri="{FF2B5EF4-FFF2-40B4-BE49-F238E27FC236}">
+                  <a16:creationId xmlns:a16="http://schemas.microsoft.com/office/drawing/2014/main" id="{A77F2ED3-8187-7548-A160-45E5CF0193D7}"/>
+                </a:ext>
+              </a:extLst>
+            </p:cNvPr>
+            <p:cNvGrpSpPr/>
+            <p:nvPr/>
+          </p:nvGrpSpPr>
+          <p:grpSpPr>
+            <a:xfrm>
+              <a:off x="4886162" y="4051953"/>
+              <a:ext cx="2628462" cy="1244741"/>
+              <a:chOff x="4139926" y="2291668"/>
+              <a:chExt cx="3068600" cy="1453173"/>
+            </a:xfrm>
+          </p:grpSpPr>
+          <p:sp>
+            <p:nvSpPr>
+              <p:cNvPr id="59" name="Forme libre 58">
+                <a:extLst>
+                  <a:ext uri="{FF2B5EF4-FFF2-40B4-BE49-F238E27FC236}">
+                    <a16:creationId xmlns:a16="http://schemas.microsoft.com/office/drawing/2014/main" id="{B1DD00C3-27F5-404F-9E5D-111331CF5191}"/>
+                  </a:ext>
+                </a:extLst>
+              </p:cNvPr>
+              <p:cNvSpPr/>
+              <p:nvPr/>
+            </p:nvSpPr>
+            <p:spPr>
+              <a:xfrm>
+                <a:off x="4445421" y="2291668"/>
+                <a:ext cx="2552170" cy="1453173"/>
+              </a:xfrm>
+              <a:custGeom>
+                <a:avLst/>
+                <a:gdLst>
+                  <a:gd name="connsiteX0" fmla="*/ 1884783 w 3023118"/>
+                  <a:gd name="connsiteY0" fmla="*/ 615821 h 2286000"/>
+                  <a:gd name="connsiteX1" fmla="*/ 1847461 w 3023118"/>
+                  <a:gd name="connsiteY1" fmla="*/ 102637 h 2286000"/>
+                  <a:gd name="connsiteX2" fmla="*/ 1483567 w 3023118"/>
+                  <a:gd name="connsiteY2" fmla="*/ 494523 h 2286000"/>
+                  <a:gd name="connsiteX3" fmla="*/ 1138335 w 3023118"/>
+                  <a:gd name="connsiteY3" fmla="*/ 0 h 2286000"/>
+                  <a:gd name="connsiteX4" fmla="*/ 1063690 w 3023118"/>
+                  <a:gd name="connsiteY4" fmla="*/ 541176 h 2286000"/>
+                  <a:gd name="connsiteX5" fmla="*/ 569167 w 3023118"/>
+                  <a:gd name="connsiteY5" fmla="*/ 270588 h 2286000"/>
+                  <a:gd name="connsiteX6" fmla="*/ 811763 w 3023118"/>
+                  <a:gd name="connsiteY6" fmla="*/ 867747 h 2286000"/>
+                  <a:gd name="connsiteX7" fmla="*/ 158620 w 3023118"/>
+                  <a:gd name="connsiteY7" fmla="*/ 858417 h 2286000"/>
+                  <a:gd name="connsiteX8" fmla="*/ 485192 w 3023118"/>
+                  <a:gd name="connsiteY8" fmla="*/ 1156996 h 2286000"/>
+                  <a:gd name="connsiteX9" fmla="*/ 0 w 3023118"/>
+                  <a:gd name="connsiteY9" fmla="*/ 1399592 h 2286000"/>
+                  <a:gd name="connsiteX10" fmla="*/ 653143 w 3023118"/>
+                  <a:gd name="connsiteY10" fmla="*/ 1446245 h 2286000"/>
+                  <a:gd name="connsiteX11" fmla="*/ 130628 w 3023118"/>
+                  <a:gd name="connsiteY11" fmla="*/ 2099388 h 2286000"/>
+                  <a:gd name="connsiteX12" fmla="*/ 961053 w 3023118"/>
+                  <a:gd name="connsiteY12" fmla="*/ 1744825 h 2286000"/>
+                  <a:gd name="connsiteX13" fmla="*/ 933061 w 3023118"/>
+                  <a:gd name="connsiteY13" fmla="*/ 2286000 h 2286000"/>
+                  <a:gd name="connsiteX14" fmla="*/ 1324947 w 3023118"/>
+                  <a:gd name="connsiteY14" fmla="*/ 1884784 h 2286000"/>
+                  <a:gd name="connsiteX15" fmla="*/ 1511559 w 3023118"/>
+                  <a:gd name="connsiteY15" fmla="*/ 2202025 h 2286000"/>
+                  <a:gd name="connsiteX16" fmla="*/ 1604865 w 3023118"/>
+                  <a:gd name="connsiteY16" fmla="*/ 2006082 h 2286000"/>
+                  <a:gd name="connsiteX17" fmla="*/ 1819469 w 3023118"/>
+                  <a:gd name="connsiteY17" fmla="*/ 2155372 h 2286000"/>
+                  <a:gd name="connsiteX18" fmla="*/ 1847461 w 3023118"/>
+                  <a:gd name="connsiteY18" fmla="*/ 1763486 h 2286000"/>
+                  <a:gd name="connsiteX19" fmla="*/ 2332653 w 3023118"/>
+                  <a:gd name="connsiteY19" fmla="*/ 1959429 h 2286000"/>
+                  <a:gd name="connsiteX20" fmla="*/ 2118049 w 3023118"/>
+                  <a:gd name="connsiteY20" fmla="*/ 1548882 h 2286000"/>
+                  <a:gd name="connsiteX21" fmla="*/ 3023118 w 3023118"/>
+                  <a:gd name="connsiteY21" fmla="*/ 1548882 h 2286000"/>
+                  <a:gd name="connsiteX22" fmla="*/ 2369975 w 3023118"/>
+                  <a:gd name="connsiteY22" fmla="*/ 1194319 h 2286000"/>
+                  <a:gd name="connsiteX23" fmla="*/ 2873828 w 3023118"/>
+                  <a:gd name="connsiteY23" fmla="*/ 923731 h 2286000"/>
+                  <a:gd name="connsiteX24" fmla="*/ 2239347 w 3023118"/>
+                  <a:gd name="connsiteY24" fmla="*/ 886408 h 2286000"/>
+                  <a:gd name="connsiteX25" fmla="*/ 2481943 w 3023118"/>
+                  <a:gd name="connsiteY25" fmla="*/ 363894 h 2286000"/>
+                  <a:gd name="connsiteX26" fmla="*/ 1884783 w 3023118"/>
+                  <a:gd name="connsiteY26" fmla="*/ 615821 h 2286000"/>
+                </a:gdLst>
+                <a:ahLst/>
+                <a:cxnLst>
+                  <a:cxn ang="0">
+                    <a:pos x="connsiteX0" y="connsiteY0"/>
+                  </a:cxn>
+                  <a:cxn ang="0">
+                    <a:pos x="connsiteX1" y="connsiteY1"/>
+                  </a:cxn>
+                  <a:cxn ang="0">
+                    <a:pos x="connsiteX2" y="connsiteY2"/>
+                  </a:cxn>
+                  <a:cxn ang="0">
+                    <a:pos x="connsiteX3" y="connsiteY3"/>
+                  </a:cxn>
+                  <a:cxn ang="0">
+                    <a:pos x="connsiteX4" y="connsiteY4"/>
+                  </a:cxn>
+                  <a:cxn ang="0">
+                    <a:pos x="connsiteX5" y="connsiteY5"/>
+                  </a:cxn>
+                  <a:cxn ang="0">
+                    <a:pos x="connsiteX6" y="connsiteY6"/>
+                  </a:cxn>
+                  <a:cxn ang="0">
+                    <a:pos x="connsiteX7" y="connsiteY7"/>
+                  </a:cxn>
+                  <a:cxn ang="0">
+                    <a:pos x="connsiteX8" y="connsiteY8"/>
+                  </a:cxn>
+                  <a:cxn ang="0">
+                    <a:pos x="connsiteX9" y="connsiteY9"/>
+                  </a:cxn>
+                  <a:cxn ang="0">
+                    <a:pos x="connsiteX10" y="connsiteY10"/>
+                  </a:cxn>
+                  <a:cxn ang="0">
+                    <a:pos x="connsiteX11" y="connsiteY11"/>
+                  </a:cxn>
+                  <a:cxn ang="0">
+                    <a:pos x="connsiteX12" y="connsiteY12"/>
+                  </a:cxn>
+                  <a:cxn ang="0">
+                    <a:pos x="connsiteX13" y="connsiteY13"/>
+                  </a:cxn>
+                  <a:cxn ang="0">
+                    <a:pos x="connsiteX14" y="connsiteY14"/>
+                  </a:cxn>
+                  <a:cxn ang="0">
+                    <a:pos x="connsiteX15" y="connsiteY15"/>
+                  </a:cxn>
+                  <a:cxn ang="0">
+                    <a:pos x="connsiteX16" y="connsiteY16"/>
+                  </a:cxn>
+                  <a:cxn ang="0">
+                    <a:pos x="connsiteX17" y="connsiteY17"/>
+                  </a:cxn>
+                  <a:cxn ang="0">
+                    <a:pos x="connsiteX18" y="connsiteY18"/>
+                  </a:cxn>
+                  <a:cxn ang="0">
+                    <a:pos x="connsiteX19" y="connsiteY19"/>
+                  </a:cxn>
+                  <a:cxn ang="0">
+                    <a:pos x="connsiteX20" y="connsiteY20"/>
+                  </a:cxn>
+                  <a:cxn ang="0">
+                    <a:pos x="connsiteX21" y="connsiteY21"/>
+                  </a:cxn>
+                  <a:cxn ang="0">
+                    <a:pos x="connsiteX22" y="connsiteY22"/>
+                  </a:cxn>
+                  <a:cxn ang="0">
+                    <a:pos x="connsiteX23" y="connsiteY23"/>
+                  </a:cxn>
+                  <a:cxn ang="0">
+                    <a:pos x="connsiteX24" y="connsiteY24"/>
+                  </a:cxn>
+                  <a:cxn ang="0">
+                    <a:pos x="connsiteX25" y="connsiteY25"/>
+                  </a:cxn>
+                  <a:cxn ang="0">
+                    <a:pos x="connsiteX26" y="connsiteY26"/>
+                  </a:cxn>
+                </a:cxnLst>
+                <a:rect l="l" t="t" r="r" b="b"/>
+                <a:pathLst>
+                  <a:path w="3023118" h="2286000">
+                    <a:moveTo>
+                      <a:pt x="1884783" y="615821"/>
+                    </a:moveTo>
+                    <a:lnTo>
+                      <a:pt x="1847461" y="102637"/>
+                    </a:lnTo>
+                    <a:lnTo>
+                      <a:pt x="1483567" y="494523"/>
+                    </a:lnTo>
+                    <a:lnTo>
+                      <a:pt x="1138335" y="0"/>
+                    </a:lnTo>
+                    <a:lnTo>
+                      <a:pt x="1063690" y="541176"/>
+                    </a:lnTo>
+                    <a:lnTo>
+                      <a:pt x="569167" y="270588"/>
+                    </a:lnTo>
+                    <a:lnTo>
+                      <a:pt x="811763" y="867747"/>
+                    </a:lnTo>
+                    <a:lnTo>
+                      <a:pt x="158620" y="858417"/>
+                    </a:lnTo>
+                    <a:lnTo>
+                      <a:pt x="485192" y="1156996"/>
+                    </a:lnTo>
+                    <a:lnTo>
+                      <a:pt x="0" y="1399592"/>
+                    </a:lnTo>
+                    <a:lnTo>
+                      <a:pt x="653143" y="1446245"/>
+                    </a:lnTo>
+                    <a:lnTo>
+                      <a:pt x="130628" y="2099388"/>
+                    </a:lnTo>
+                    <a:lnTo>
+                      <a:pt x="961053" y="1744825"/>
+                    </a:lnTo>
+                    <a:lnTo>
+                      <a:pt x="933061" y="2286000"/>
+                    </a:lnTo>
+                    <a:lnTo>
+                      <a:pt x="1324947" y="1884784"/>
+                    </a:lnTo>
+                    <a:lnTo>
+                      <a:pt x="1511559" y="2202025"/>
+                    </a:lnTo>
+                    <a:lnTo>
+                      <a:pt x="1604865" y="2006082"/>
+                    </a:lnTo>
+                    <a:lnTo>
+                      <a:pt x="1819469" y="2155372"/>
+                    </a:lnTo>
+                    <a:lnTo>
+                      <a:pt x="1847461" y="1763486"/>
+                    </a:lnTo>
+                    <a:lnTo>
+                      <a:pt x="2332653" y="1959429"/>
+                    </a:lnTo>
+                    <a:lnTo>
+                      <a:pt x="2118049" y="1548882"/>
+                    </a:lnTo>
+                    <a:lnTo>
+                      <a:pt x="3023118" y="1548882"/>
+                    </a:lnTo>
+                    <a:lnTo>
+                      <a:pt x="2369975" y="1194319"/>
+                    </a:lnTo>
+                    <a:lnTo>
+                      <a:pt x="2873828" y="923731"/>
+                    </a:lnTo>
+                    <a:lnTo>
+                      <a:pt x="2239347" y="886408"/>
+                    </a:lnTo>
+                    <a:lnTo>
+                      <a:pt x="2481943" y="363894"/>
+                    </a:lnTo>
+                    <a:lnTo>
+                      <a:pt x="1884783" y="615821"/>
+                    </a:lnTo>
+                    <a:close/>
+                  </a:path>
+                </a:pathLst>
+              </a:custGeom>
+              <a:solidFill>
+                <a:srgbClr val="FFFF00"/>
+              </a:solidFill>
+              <a:ln>
+                <a:solidFill>
+                  <a:srgbClr val="FF0000"/>
+                </a:solidFill>
+              </a:ln>
+            </p:spPr>
+            <p:style>
+              <a:lnRef idx="2">
+                <a:schemeClr val="accent1">
+                  <a:shade val="50000"/>
+                </a:schemeClr>
+              </a:lnRef>
+              <a:fillRef idx="1">
+                <a:schemeClr val="accent1"/>
+              </a:fillRef>
+              <a:effectRef idx="0">
+                <a:schemeClr val="accent1"/>
+              </a:effectRef>
+              <a:fontRef idx="minor">
+                <a:schemeClr val="lt1"/>
+              </a:fontRef>
+            </p:style>
+            <p:txBody>
+              <a:bodyPr rtlCol="0" anchor="ctr"/>
+              <a:lstStyle/>
+              <a:p>
+                <a:pPr algn="ctr"/>
+                <a:endParaRPr lang="fr-FR" sz="900"/>
+              </a:p>
+            </p:txBody>
+          </p:sp>
+          <p:sp>
+            <p:nvSpPr>
+              <p:cNvPr id="60" name="Rectangle 59">
+                <a:extLst>
+                  <a:ext uri="{FF2B5EF4-FFF2-40B4-BE49-F238E27FC236}">
+                    <a16:creationId xmlns:a16="http://schemas.microsoft.com/office/drawing/2014/main" id="{87C991DA-8C48-E54D-95BD-D104FCB2FE4F}"/>
+                  </a:ext>
+                </a:extLst>
+              </p:cNvPr>
+              <p:cNvSpPr/>
+              <p:nvPr/>
+            </p:nvSpPr>
+            <p:spPr>
+              <a:xfrm rot="21000827">
+                <a:off x="4139926" y="2595201"/>
+                <a:ext cx="3068600" cy="721777"/>
+              </a:xfrm>
+              <a:prstGeom prst="rect">
+                <a:avLst/>
+              </a:prstGeom>
+              <a:noFill/>
+            </p:spPr>
+            <p:txBody>
+              <a:bodyPr wrap="square" lIns="91440" tIns="45720" rIns="91440" bIns="45720">
+                <a:spAutoFit/>
+              </a:bodyPr>
+              <a:lstStyle/>
+              <a:p>
+                <a:pPr algn="ctr"/>
+                <a:r>
+                  <a:rPr lang="fr-FR" sz="1600" b="1" dirty="0">
+                    <a:ln w="12700">
+                      <a:noFill/>
+                      <a:prstDash val="solid"/>
+                    </a:ln>
+                    <a:effectLst>
+                      <a:outerShdw dist="38100" dir="2640000" algn="bl" rotWithShape="0">
+                        <a:schemeClr val="tx2">
+                          <a:lumMod val="75000"/>
+                        </a:schemeClr>
+                      </a:outerShdw>
+                    </a:effectLst>
+                  </a:rPr>
+                  <a:t>Evénement</a:t>
+                </a:r>
+              </a:p>
+            </p:txBody>
+          </p:sp>
+        </p:grpSp>
+        <p:grpSp>
+          <p:nvGrpSpPr>
+            <p:cNvPr id="55" name="Groupe 54">
+              <a:extLst>
+                <a:ext uri="{FF2B5EF4-FFF2-40B4-BE49-F238E27FC236}">
+                  <a16:creationId xmlns:a16="http://schemas.microsoft.com/office/drawing/2014/main" id="{30366DF2-F1B0-4E46-B1A8-EFC62B5642A2}"/>
+                </a:ext>
+              </a:extLst>
+            </p:cNvPr>
+            <p:cNvGrpSpPr/>
+            <p:nvPr/>
+          </p:nvGrpSpPr>
+          <p:grpSpPr>
+            <a:xfrm>
+              <a:off x="4467540" y="4079457"/>
+              <a:ext cx="736611" cy="1100506"/>
+              <a:chOff x="3153747" y="2382820"/>
+              <a:chExt cx="736611" cy="1100506"/>
+            </a:xfrm>
+          </p:grpSpPr>
+          <p:sp>
+            <p:nvSpPr>
+              <p:cNvPr id="56" name="Arc 55">
+                <a:extLst>
+                  <a:ext uri="{FF2B5EF4-FFF2-40B4-BE49-F238E27FC236}">
+                    <a16:creationId xmlns:a16="http://schemas.microsoft.com/office/drawing/2014/main" id="{16FF8C9B-6D66-3C43-81CC-BE5B046A013F}"/>
+                  </a:ext>
+                </a:extLst>
+              </p:cNvPr>
+              <p:cNvSpPr/>
+              <p:nvPr/>
+            </p:nvSpPr>
+            <p:spPr>
+              <a:xfrm rot="18941501">
+                <a:off x="3153747" y="2382820"/>
+                <a:ext cx="736611" cy="736611"/>
+              </a:xfrm>
+              <a:prstGeom prst="arc">
+                <a:avLst/>
+              </a:prstGeom>
+              <a:ln w="28575">
+                <a:solidFill>
+                  <a:schemeClr val="tx1"/>
+                </a:solidFill>
+              </a:ln>
+            </p:spPr>
+            <p:style>
+              <a:lnRef idx="1">
+                <a:schemeClr val="accent1"/>
+              </a:lnRef>
+              <a:fillRef idx="0">
+                <a:schemeClr val="accent1"/>
+              </a:fillRef>
+              <a:effectRef idx="0">
+                <a:schemeClr val="accent1"/>
+              </a:effectRef>
+              <a:fontRef idx="minor">
+                <a:schemeClr val="tx1"/>
+              </a:fontRef>
+            </p:style>
+            <p:txBody>
+              <a:bodyPr rtlCol="0" anchor="ctr"/>
+              <a:lstStyle/>
+              <a:p>
+                <a:pPr algn="ctr"/>
+                <a:endParaRPr lang="fr-FR" sz="1000"/>
+              </a:p>
+            </p:txBody>
+          </p:sp>
+          <p:sp>
+            <p:nvSpPr>
+              <p:cNvPr id="57" name="Arc 56">
+                <a:extLst>
+                  <a:ext uri="{FF2B5EF4-FFF2-40B4-BE49-F238E27FC236}">
+                    <a16:creationId xmlns:a16="http://schemas.microsoft.com/office/drawing/2014/main" id="{E8CE18CB-AAED-E645-B9CC-3CF455F193D9}"/>
+                  </a:ext>
+                </a:extLst>
+              </p:cNvPr>
+              <p:cNvSpPr/>
+              <p:nvPr/>
+            </p:nvSpPr>
+            <p:spPr>
+              <a:xfrm rot="18394680">
+                <a:off x="3153747" y="2550772"/>
+                <a:ext cx="736611" cy="736611"/>
+              </a:xfrm>
+              <a:prstGeom prst="arc">
+                <a:avLst/>
+              </a:prstGeom>
+              <a:ln w="28575">
+                <a:solidFill>
+                  <a:schemeClr val="tx1"/>
+                </a:solidFill>
+              </a:ln>
+            </p:spPr>
+            <p:style>
+              <a:lnRef idx="1">
+                <a:schemeClr val="accent1"/>
+              </a:lnRef>
+              <a:fillRef idx="0">
+                <a:schemeClr val="accent1"/>
+              </a:fillRef>
+              <a:effectRef idx="0">
+                <a:schemeClr val="accent1"/>
+              </a:effectRef>
+              <a:fontRef idx="minor">
+                <a:schemeClr val="tx1"/>
+              </a:fontRef>
+            </p:style>
+            <p:txBody>
+              <a:bodyPr rtlCol="0" anchor="ctr"/>
+              <a:lstStyle/>
+              <a:p>
+                <a:pPr algn="ctr"/>
+                <a:endParaRPr lang="fr-FR" sz="1000"/>
+              </a:p>
+            </p:txBody>
+          </p:sp>
+          <p:sp>
+            <p:nvSpPr>
+              <p:cNvPr id="58" name="Arc 57">
+                <a:extLst>
+                  <a:ext uri="{FF2B5EF4-FFF2-40B4-BE49-F238E27FC236}">
+                    <a16:creationId xmlns:a16="http://schemas.microsoft.com/office/drawing/2014/main" id="{CBDA2549-9D07-DC4E-BF3B-D446B8912D95}"/>
+                  </a:ext>
+                </a:extLst>
+              </p:cNvPr>
+              <p:cNvSpPr/>
+              <p:nvPr/>
+            </p:nvSpPr>
+            <p:spPr>
+              <a:xfrm rot="17674455">
+                <a:off x="3153747" y="2746715"/>
+                <a:ext cx="736611" cy="736611"/>
+              </a:xfrm>
+              <a:prstGeom prst="arc">
+                <a:avLst/>
+              </a:prstGeom>
+              <a:ln w="28575">
+                <a:solidFill>
+                  <a:schemeClr val="tx1"/>
+                </a:solidFill>
+              </a:ln>
+            </p:spPr>
+            <p:style>
+              <a:lnRef idx="1">
+                <a:schemeClr val="accent1"/>
+              </a:lnRef>
+              <a:fillRef idx="0">
+                <a:schemeClr val="accent1"/>
+              </a:fillRef>
+              <a:effectRef idx="0">
+                <a:schemeClr val="accent1"/>
+              </a:effectRef>
+              <a:fontRef idx="minor">
+                <a:schemeClr val="tx1"/>
+              </a:fontRef>
+            </p:style>
+            <p:txBody>
+              <a:bodyPr rtlCol="0" anchor="ctr"/>
+              <a:lstStyle/>
+              <a:p>
+                <a:pPr algn="ctr"/>
+                <a:endParaRPr lang="fr-FR" sz="1000"/>
+              </a:p>
+            </p:txBody>
+          </p:sp>
+        </p:grpSp>
+      </p:grpSp>
+      <p:sp>
+        <p:nvSpPr>
+          <p:cNvPr id="66" name="Rectangle 65">
+            <a:extLst>
+              <a:ext uri="{FF2B5EF4-FFF2-40B4-BE49-F238E27FC236}">
+                <a16:creationId xmlns:a16="http://schemas.microsoft.com/office/drawing/2014/main" id="{B8F5FBA8-1010-EC43-9F18-AAC0BD06ECCD}"/>
+              </a:ext>
+            </a:extLst>
+          </p:cNvPr>
+          <p:cNvSpPr/>
+          <p:nvPr/>
+        </p:nvSpPr>
+        <p:spPr>
+          <a:xfrm>
+            <a:off x="838200" y="1460805"/>
+            <a:ext cx="6722563" cy="1815882"/>
+          </a:xfrm>
+          <a:prstGeom prst="rect">
+            <a:avLst/>
+          </a:prstGeom>
+        </p:spPr>
+        <p:txBody>
+          <a:bodyPr wrap="square">
+            <a:spAutoFit/>
+          </a:bodyPr>
+          <a:lstStyle/>
+          <a:p>
+            <a:r>
+              <a:rPr lang="fr-BE" sz="2000" dirty="0"/>
+              <a:t>Deux types d’objets traitent les </a:t>
+            </a:r>
+            <a:r>
+              <a:rPr lang="fr-BE" sz="1800" dirty="0">
+                <a:solidFill>
+                  <a:schemeClr val="accent4"/>
+                </a:solidFill>
+                <a:latin typeface="Consolas" panose="020B0609020204030204" pitchFamily="49" charset="0"/>
+                <a:cs typeface="Consolas" panose="020B0609020204030204" pitchFamily="49" charset="0"/>
+              </a:rPr>
+              <a:t>Event</a:t>
+            </a:r>
+            <a:r>
+              <a:rPr lang="fr-BE" sz="2000" dirty="0"/>
+              <a:t>:</a:t>
+            </a:r>
+          </a:p>
+          <a:p>
+            <a:pPr marL="342900" indent="-342900">
+              <a:buFont typeface="Arial" panose="020B0604020202020204" pitchFamily="34" charset="0"/>
+              <a:buChar char="•"/>
+            </a:pPr>
+            <a:r>
+              <a:rPr lang="fr-BE" sz="2000" dirty="0"/>
+              <a:t>Les </a:t>
+            </a:r>
+            <a:r>
+              <a:rPr lang="fr-BE" sz="1800" dirty="0" err="1">
+                <a:solidFill>
+                  <a:schemeClr val="accent4"/>
+                </a:solidFill>
+                <a:latin typeface="Consolas" panose="020B0609020204030204" pitchFamily="49" charset="0"/>
+                <a:cs typeface="Consolas" panose="020B0609020204030204" pitchFamily="49" charset="0"/>
+              </a:rPr>
+              <a:t>EventFilters</a:t>
+            </a:r>
+            <a:r>
+              <a:rPr lang="fr-BE" sz="2000" dirty="0"/>
+              <a:t> lors de la descente.</a:t>
+            </a:r>
+          </a:p>
+          <a:p>
+            <a:pPr marL="342900" indent="-342900">
+              <a:buFont typeface="Arial" panose="020B0604020202020204" pitchFamily="34" charset="0"/>
+              <a:buChar char="•"/>
+            </a:pPr>
+            <a:r>
+              <a:rPr lang="fr-BE" sz="2000" dirty="0"/>
+              <a:t>Les </a:t>
+            </a:r>
+            <a:r>
+              <a:rPr lang="fr-BE" sz="1800" dirty="0" err="1">
+                <a:solidFill>
+                  <a:schemeClr val="accent4"/>
+                </a:solidFill>
+                <a:latin typeface="Consolas" panose="020B0609020204030204" pitchFamily="49" charset="0"/>
+                <a:cs typeface="Consolas" panose="020B0609020204030204" pitchFamily="49" charset="0"/>
+              </a:rPr>
+              <a:t>EventHandlers</a:t>
+            </a:r>
+            <a:r>
+              <a:rPr lang="fr-BE" sz="2000" dirty="0"/>
+              <a:t> lors de la remontée. </a:t>
+            </a:r>
+          </a:p>
+          <a:p>
+            <a:endParaRPr lang="fr-FR" sz="2800" dirty="0"/>
+          </a:p>
+        </p:txBody>
+      </p:sp>
+      <p:grpSp>
+        <p:nvGrpSpPr>
+          <p:cNvPr id="69" name="Groupe 68">
+            <a:extLst>
+              <a:ext uri="{FF2B5EF4-FFF2-40B4-BE49-F238E27FC236}">
+                <a16:creationId xmlns:a16="http://schemas.microsoft.com/office/drawing/2014/main" id="{6B170D6E-10D3-6949-B6F4-421F955C7BCC}"/>
+              </a:ext>
+            </a:extLst>
+          </p:cNvPr>
+          <p:cNvGrpSpPr/>
+          <p:nvPr/>
+        </p:nvGrpSpPr>
+        <p:grpSpPr>
+          <a:xfrm>
+            <a:off x="7849277" y="3082040"/>
+            <a:ext cx="1668586" cy="681620"/>
+            <a:chOff x="4467540" y="4051953"/>
+            <a:chExt cx="3047084" cy="1244741"/>
+          </a:xfrm>
+        </p:grpSpPr>
+        <p:grpSp>
+          <p:nvGrpSpPr>
+            <p:cNvPr id="70" name="Groupe 69">
+              <a:extLst>
+                <a:ext uri="{FF2B5EF4-FFF2-40B4-BE49-F238E27FC236}">
+                  <a16:creationId xmlns:a16="http://schemas.microsoft.com/office/drawing/2014/main" id="{8C07C978-9AE5-174E-8EC8-8819C197FA4F}"/>
+                </a:ext>
+              </a:extLst>
+            </p:cNvPr>
+            <p:cNvGrpSpPr/>
+            <p:nvPr/>
+          </p:nvGrpSpPr>
+          <p:grpSpPr>
+            <a:xfrm>
+              <a:off x="4886162" y="4051953"/>
+              <a:ext cx="2628462" cy="1244741"/>
+              <a:chOff x="4139926" y="2291668"/>
+              <a:chExt cx="3068600" cy="1453173"/>
+            </a:xfrm>
+          </p:grpSpPr>
+          <p:sp>
+            <p:nvSpPr>
+              <p:cNvPr id="75" name="Forme libre 74">
+                <a:extLst>
+                  <a:ext uri="{FF2B5EF4-FFF2-40B4-BE49-F238E27FC236}">
+                    <a16:creationId xmlns:a16="http://schemas.microsoft.com/office/drawing/2014/main" id="{49D6EA01-875F-4D41-885E-472BE4AC6EC2}"/>
+                  </a:ext>
+                </a:extLst>
+              </p:cNvPr>
+              <p:cNvSpPr/>
+              <p:nvPr/>
+            </p:nvSpPr>
+            <p:spPr>
+              <a:xfrm>
+                <a:off x="4445421" y="2291668"/>
+                <a:ext cx="2552170" cy="1453173"/>
+              </a:xfrm>
+              <a:custGeom>
+                <a:avLst/>
+                <a:gdLst>
+                  <a:gd name="connsiteX0" fmla="*/ 1884783 w 3023118"/>
+                  <a:gd name="connsiteY0" fmla="*/ 615821 h 2286000"/>
+                  <a:gd name="connsiteX1" fmla="*/ 1847461 w 3023118"/>
+                  <a:gd name="connsiteY1" fmla="*/ 102637 h 2286000"/>
+                  <a:gd name="connsiteX2" fmla="*/ 1483567 w 3023118"/>
+                  <a:gd name="connsiteY2" fmla="*/ 494523 h 2286000"/>
+                  <a:gd name="connsiteX3" fmla="*/ 1138335 w 3023118"/>
+                  <a:gd name="connsiteY3" fmla="*/ 0 h 2286000"/>
+                  <a:gd name="connsiteX4" fmla="*/ 1063690 w 3023118"/>
+                  <a:gd name="connsiteY4" fmla="*/ 541176 h 2286000"/>
+                  <a:gd name="connsiteX5" fmla="*/ 569167 w 3023118"/>
+                  <a:gd name="connsiteY5" fmla="*/ 270588 h 2286000"/>
+                  <a:gd name="connsiteX6" fmla="*/ 811763 w 3023118"/>
+                  <a:gd name="connsiteY6" fmla="*/ 867747 h 2286000"/>
+                  <a:gd name="connsiteX7" fmla="*/ 158620 w 3023118"/>
+                  <a:gd name="connsiteY7" fmla="*/ 858417 h 2286000"/>
+                  <a:gd name="connsiteX8" fmla="*/ 485192 w 3023118"/>
+                  <a:gd name="connsiteY8" fmla="*/ 1156996 h 2286000"/>
+                  <a:gd name="connsiteX9" fmla="*/ 0 w 3023118"/>
+                  <a:gd name="connsiteY9" fmla="*/ 1399592 h 2286000"/>
+                  <a:gd name="connsiteX10" fmla="*/ 653143 w 3023118"/>
+                  <a:gd name="connsiteY10" fmla="*/ 1446245 h 2286000"/>
+                  <a:gd name="connsiteX11" fmla="*/ 130628 w 3023118"/>
+                  <a:gd name="connsiteY11" fmla="*/ 2099388 h 2286000"/>
+                  <a:gd name="connsiteX12" fmla="*/ 961053 w 3023118"/>
+                  <a:gd name="connsiteY12" fmla="*/ 1744825 h 2286000"/>
+                  <a:gd name="connsiteX13" fmla="*/ 933061 w 3023118"/>
+                  <a:gd name="connsiteY13" fmla="*/ 2286000 h 2286000"/>
+                  <a:gd name="connsiteX14" fmla="*/ 1324947 w 3023118"/>
+                  <a:gd name="connsiteY14" fmla="*/ 1884784 h 2286000"/>
+                  <a:gd name="connsiteX15" fmla="*/ 1511559 w 3023118"/>
+                  <a:gd name="connsiteY15" fmla="*/ 2202025 h 2286000"/>
+                  <a:gd name="connsiteX16" fmla="*/ 1604865 w 3023118"/>
+                  <a:gd name="connsiteY16" fmla="*/ 2006082 h 2286000"/>
+                  <a:gd name="connsiteX17" fmla="*/ 1819469 w 3023118"/>
+                  <a:gd name="connsiteY17" fmla="*/ 2155372 h 2286000"/>
+                  <a:gd name="connsiteX18" fmla="*/ 1847461 w 3023118"/>
+                  <a:gd name="connsiteY18" fmla="*/ 1763486 h 2286000"/>
+                  <a:gd name="connsiteX19" fmla="*/ 2332653 w 3023118"/>
+                  <a:gd name="connsiteY19" fmla="*/ 1959429 h 2286000"/>
+                  <a:gd name="connsiteX20" fmla="*/ 2118049 w 3023118"/>
+                  <a:gd name="connsiteY20" fmla="*/ 1548882 h 2286000"/>
+                  <a:gd name="connsiteX21" fmla="*/ 3023118 w 3023118"/>
+                  <a:gd name="connsiteY21" fmla="*/ 1548882 h 2286000"/>
+                  <a:gd name="connsiteX22" fmla="*/ 2369975 w 3023118"/>
+                  <a:gd name="connsiteY22" fmla="*/ 1194319 h 2286000"/>
+                  <a:gd name="connsiteX23" fmla="*/ 2873828 w 3023118"/>
+                  <a:gd name="connsiteY23" fmla="*/ 923731 h 2286000"/>
+                  <a:gd name="connsiteX24" fmla="*/ 2239347 w 3023118"/>
+                  <a:gd name="connsiteY24" fmla="*/ 886408 h 2286000"/>
+                  <a:gd name="connsiteX25" fmla="*/ 2481943 w 3023118"/>
+                  <a:gd name="connsiteY25" fmla="*/ 363894 h 2286000"/>
+                  <a:gd name="connsiteX26" fmla="*/ 1884783 w 3023118"/>
+                  <a:gd name="connsiteY26" fmla="*/ 615821 h 2286000"/>
+                </a:gdLst>
+                <a:ahLst/>
+                <a:cxnLst>
+                  <a:cxn ang="0">
+                    <a:pos x="connsiteX0" y="connsiteY0"/>
+                  </a:cxn>
+                  <a:cxn ang="0">
+                    <a:pos x="connsiteX1" y="connsiteY1"/>
+                  </a:cxn>
+                  <a:cxn ang="0">
+                    <a:pos x="connsiteX2" y="connsiteY2"/>
+                  </a:cxn>
+                  <a:cxn ang="0">
+                    <a:pos x="connsiteX3" y="connsiteY3"/>
+                  </a:cxn>
+                  <a:cxn ang="0">
+                    <a:pos x="connsiteX4" y="connsiteY4"/>
+                  </a:cxn>
+                  <a:cxn ang="0">
+                    <a:pos x="connsiteX5" y="connsiteY5"/>
+                  </a:cxn>
+                  <a:cxn ang="0">
+                    <a:pos x="connsiteX6" y="connsiteY6"/>
+                  </a:cxn>
+                  <a:cxn ang="0">
+                    <a:pos x="connsiteX7" y="connsiteY7"/>
+                  </a:cxn>
+                  <a:cxn ang="0">
+                    <a:pos x="connsiteX8" y="connsiteY8"/>
+                  </a:cxn>
+                  <a:cxn ang="0">
+                    <a:pos x="connsiteX9" y="connsiteY9"/>
+                  </a:cxn>
+                  <a:cxn ang="0">
+                    <a:pos x="connsiteX10" y="connsiteY10"/>
+                  </a:cxn>
+                  <a:cxn ang="0">
+                    <a:pos x="connsiteX11" y="connsiteY11"/>
+                  </a:cxn>
+                  <a:cxn ang="0">
+                    <a:pos x="connsiteX12" y="connsiteY12"/>
+                  </a:cxn>
+                  <a:cxn ang="0">
+                    <a:pos x="connsiteX13" y="connsiteY13"/>
+                  </a:cxn>
+                  <a:cxn ang="0">
+                    <a:pos x="connsiteX14" y="connsiteY14"/>
+                  </a:cxn>
+                  <a:cxn ang="0">
+                    <a:pos x="connsiteX15" y="connsiteY15"/>
+                  </a:cxn>
+                  <a:cxn ang="0">
+                    <a:pos x="connsiteX16" y="connsiteY16"/>
+                  </a:cxn>
+                  <a:cxn ang="0">
+                    <a:pos x="connsiteX17" y="connsiteY17"/>
+                  </a:cxn>
+                  <a:cxn ang="0">
+                    <a:pos x="connsiteX18" y="connsiteY18"/>
+                  </a:cxn>
+                  <a:cxn ang="0">
+                    <a:pos x="connsiteX19" y="connsiteY19"/>
+                  </a:cxn>
+                  <a:cxn ang="0">
+                    <a:pos x="connsiteX20" y="connsiteY20"/>
+                  </a:cxn>
+                  <a:cxn ang="0">
+                    <a:pos x="connsiteX21" y="connsiteY21"/>
+                  </a:cxn>
+                  <a:cxn ang="0">
+                    <a:pos x="connsiteX22" y="connsiteY22"/>
+                  </a:cxn>
+                  <a:cxn ang="0">
+                    <a:pos x="connsiteX23" y="connsiteY23"/>
+                  </a:cxn>
+                  <a:cxn ang="0">
+                    <a:pos x="connsiteX24" y="connsiteY24"/>
+                  </a:cxn>
+                  <a:cxn ang="0">
+                    <a:pos x="connsiteX25" y="connsiteY25"/>
+                  </a:cxn>
+                  <a:cxn ang="0">
+                    <a:pos x="connsiteX26" y="connsiteY26"/>
+                  </a:cxn>
+                </a:cxnLst>
+                <a:rect l="l" t="t" r="r" b="b"/>
+                <a:pathLst>
+                  <a:path w="3023118" h="2286000">
+                    <a:moveTo>
+                      <a:pt x="1884783" y="615821"/>
+                    </a:moveTo>
+                    <a:lnTo>
+                      <a:pt x="1847461" y="102637"/>
+                    </a:lnTo>
+                    <a:lnTo>
+                      <a:pt x="1483567" y="494523"/>
+                    </a:lnTo>
+                    <a:lnTo>
+                      <a:pt x="1138335" y="0"/>
+                    </a:lnTo>
+                    <a:lnTo>
+                      <a:pt x="1063690" y="541176"/>
+                    </a:lnTo>
+                    <a:lnTo>
+                      <a:pt x="569167" y="270588"/>
+                    </a:lnTo>
+                    <a:lnTo>
+                      <a:pt x="811763" y="867747"/>
+                    </a:lnTo>
+                    <a:lnTo>
+                      <a:pt x="158620" y="858417"/>
+                    </a:lnTo>
+                    <a:lnTo>
+                      <a:pt x="485192" y="1156996"/>
+                    </a:lnTo>
+                    <a:lnTo>
+                      <a:pt x="0" y="1399592"/>
+                    </a:lnTo>
+                    <a:lnTo>
+                      <a:pt x="653143" y="1446245"/>
+                    </a:lnTo>
+                    <a:lnTo>
+                      <a:pt x="130628" y="2099388"/>
+                    </a:lnTo>
+                    <a:lnTo>
+                      <a:pt x="961053" y="1744825"/>
+                    </a:lnTo>
+                    <a:lnTo>
+                      <a:pt x="933061" y="2286000"/>
+                    </a:lnTo>
+                    <a:lnTo>
+                      <a:pt x="1324947" y="1884784"/>
+                    </a:lnTo>
+                    <a:lnTo>
+                      <a:pt x="1511559" y="2202025"/>
+                    </a:lnTo>
+                    <a:lnTo>
+                      <a:pt x="1604865" y="2006082"/>
+                    </a:lnTo>
+                    <a:lnTo>
+                      <a:pt x="1819469" y="2155372"/>
+                    </a:lnTo>
+                    <a:lnTo>
+                      <a:pt x="1847461" y="1763486"/>
+                    </a:lnTo>
+                    <a:lnTo>
+                      <a:pt x="2332653" y="1959429"/>
+                    </a:lnTo>
+                    <a:lnTo>
+                      <a:pt x="2118049" y="1548882"/>
+                    </a:lnTo>
+                    <a:lnTo>
+                      <a:pt x="3023118" y="1548882"/>
+                    </a:lnTo>
+                    <a:lnTo>
+                      <a:pt x="2369975" y="1194319"/>
+                    </a:lnTo>
+                    <a:lnTo>
+                      <a:pt x="2873828" y="923731"/>
+                    </a:lnTo>
+                    <a:lnTo>
+                      <a:pt x="2239347" y="886408"/>
+                    </a:lnTo>
+                    <a:lnTo>
+                      <a:pt x="2481943" y="363894"/>
+                    </a:lnTo>
+                    <a:lnTo>
+                      <a:pt x="1884783" y="615821"/>
+                    </a:lnTo>
+                    <a:close/>
+                  </a:path>
+                </a:pathLst>
+              </a:custGeom>
+              <a:solidFill>
+                <a:srgbClr val="FFFF00"/>
+              </a:solidFill>
+              <a:ln>
+                <a:solidFill>
+                  <a:srgbClr val="FF0000"/>
+                </a:solidFill>
+              </a:ln>
+            </p:spPr>
+            <p:style>
+              <a:lnRef idx="2">
+                <a:schemeClr val="accent1">
+                  <a:shade val="50000"/>
+                </a:schemeClr>
+              </a:lnRef>
+              <a:fillRef idx="1">
+                <a:schemeClr val="accent1"/>
+              </a:fillRef>
+              <a:effectRef idx="0">
+                <a:schemeClr val="accent1"/>
+              </a:effectRef>
+              <a:fontRef idx="minor">
+                <a:schemeClr val="lt1"/>
+              </a:fontRef>
+            </p:style>
+            <p:txBody>
+              <a:bodyPr rtlCol="0" anchor="ctr"/>
+              <a:lstStyle/>
+              <a:p>
+                <a:pPr algn="ctr"/>
+                <a:endParaRPr lang="fr-FR" sz="900"/>
+              </a:p>
+            </p:txBody>
+          </p:sp>
+          <p:sp>
+            <p:nvSpPr>
+              <p:cNvPr id="76" name="Rectangle 75">
+                <a:extLst>
+                  <a:ext uri="{FF2B5EF4-FFF2-40B4-BE49-F238E27FC236}">
+                    <a16:creationId xmlns:a16="http://schemas.microsoft.com/office/drawing/2014/main" id="{DFB59E07-9628-974E-8523-834813FF0CBD}"/>
+                  </a:ext>
+                </a:extLst>
+              </p:cNvPr>
+              <p:cNvSpPr/>
+              <p:nvPr/>
+            </p:nvSpPr>
+            <p:spPr>
+              <a:xfrm rot="21000827">
+                <a:off x="4139926" y="2595201"/>
+                <a:ext cx="3068600" cy="721777"/>
+              </a:xfrm>
+              <a:prstGeom prst="rect">
+                <a:avLst/>
+              </a:prstGeom>
+              <a:noFill/>
+            </p:spPr>
+            <p:txBody>
+              <a:bodyPr wrap="square" lIns="91440" tIns="45720" rIns="91440" bIns="45720">
+                <a:spAutoFit/>
+              </a:bodyPr>
+              <a:lstStyle/>
+              <a:p>
+                <a:pPr algn="ctr"/>
+                <a:r>
+                  <a:rPr lang="fr-FR" sz="1600" b="1" dirty="0">
+                    <a:ln w="12700">
+                      <a:noFill/>
+                      <a:prstDash val="solid"/>
+                    </a:ln>
+                    <a:effectLst>
+                      <a:outerShdw dist="38100" dir="2640000" algn="bl" rotWithShape="0">
+                        <a:schemeClr val="tx2">
+                          <a:lumMod val="75000"/>
+                        </a:schemeClr>
+                      </a:outerShdw>
+                    </a:effectLst>
+                  </a:rPr>
+                  <a:t>Evénement</a:t>
+                </a:r>
+              </a:p>
+            </p:txBody>
+          </p:sp>
+        </p:grpSp>
+        <p:grpSp>
+          <p:nvGrpSpPr>
+            <p:cNvPr id="71" name="Groupe 70">
+              <a:extLst>
+                <a:ext uri="{FF2B5EF4-FFF2-40B4-BE49-F238E27FC236}">
+                  <a16:creationId xmlns:a16="http://schemas.microsoft.com/office/drawing/2014/main" id="{78D5BCAD-07D9-AC4B-B10D-6370E28E5FC5}"/>
+                </a:ext>
+              </a:extLst>
+            </p:cNvPr>
+            <p:cNvGrpSpPr/>
+            <p:nvPr/>
+          </p:nvGrpSpPr>
+          <p:grpSpPr>
+            <a:xfrm>
+              <a:off x="4467540" y="4079457"/>
+              <a:ext cx="736611" cy="1100506"/>
+              <a:chOff x="3153747" y="2382820"/>
+              <a:chExt cx="736611" cy="1100506"/>
+            </a:xfrm>
+          </p:grpSpPr>
+          <p:sp>
+            <p:nvSpPr>
+              <p:cNvPr id="72" name="Arc 71">
+                <a:extLst>
+                  <a:ext uri="{FF2B5EF4-FFF2-40B4-BE49-F238E27FC236}">
+                    <a16:creationId xmlns:a16="http://schemas.microsoft.com/office/drawing/2014/main" id="{B759F5E7-DC1B-CC45-971B-E88DA7605ED0}"/>
+                  </a:ext>
+                </a:extLst>
+              </p:cNvPr>
+              <p:cNvSpPr/>
+              <p:nvPr/>
+            </p:nvSpPr>
+            <p:spPr>
+              <a:xfrm rot="18941501">
+                <a:off x="3153747" y="2382820"/>
+                <a:ext cx="736611" cy="736611"/>
+              </a:xfrm>
+              <a:prstGeom prst="arc">
+                <a:avLst/>
+              </a:prstGeom>
+              <a:ln w="28575">
+                <a:solidFill>
+                  <a:schemeClr val="tx1"/>
+                </a:solidFill>
+              </a:ln>
+            </p:spPr>
+            <p:style>
+              <a:lnRef idx="1">
+                <a:schemeClr val="accent1"/>
+              </a:lnRef>
+              <a:fillRef idx="0">
+                <a:schemeClr val="accent1"/>
+              </a:fillRef>
+              <a:effectRef idx="0">
+                <a:schemeClr val="accent1"/>
+              </a:effectRef>
+              <a:fontRef idx="minor">
+                <a:schemeClr val="tx1"/>
+              </a:fontRef>
+            </p:style>
+            <p:txBody>
+              <a:bodyPr rtlCol="0" anchor="ctr"/>
+              <a:lstStyle/>
+              <a:p>
+                <a:pPr algn="ctr"/>
+                <a:endParaRPr lang="fr-FR" sz="1000"/>
+              </a:p>
+            </p:txBody>
+          </p:sp>
+          <p:sp>
+            <p:nvSpPr>
+              <p:cNvPr id="73" name="Arc 72">
+                <a:extLst>
+                  <a:ext uri="{FF2B5EF4-FFF2-40B4-BE49-F238E27FC236}">
+                    <a16:creationId xmlns:a16="http://schemas.microsoft.com/office/drawing/2014/main" id="{A0D54923-961D-5849-A36A-EB56FE4D3320}"/>
+                  </a:ext>
+                </a:extLst>
+              </p:cNvPr>
+              <p:cNvSpPr/>
+              <p:nvPr/>
+            </p:nvSpPr>
+            <p:spPr>
+              <a:xfrm rot="18394680">
+                <a:off x="3153747" y="2550772"/>
+                <a:ext cx="736611" cy="736611"/>
+              </a:xfrm>
+              <a:prstGeom prst="arc">
+                <a:avLst/>
+              </a:prstGeom>
+              <a:ln w="28575">
+                <a:solidFill>
+                  <a:schemeClr val="tx1"/>
+                </a:solidFill>
+              </a:ln>
+            </p:spPr>
+            <p:style>
+              <a:lnRef idx="1">
+                <a:schemeClr val="accent1"/>
+              </a:lnRef>
+              <a:fillRef idx="0">
+                <a:schemeClr val="accent1"/>
+              </a:fillRef>
+              <a:effectRef idx="0">
+                <a:schemeClr val="accent1"/>
+              </a:effectRef>
+              <a:fontRef idx="minor">
+                <a:schemeClr val="tx1"/>
+              </a:fontRef>
+            </p:style>
+            <p:txBody>
+              <a:bodyPr rtlCol="0" anchor="ctr"/>
+              <a:lstStyle/>
+              <a:p>
+                <a:pPr algn="ctr"/>
+                <a:endParaRPr lang="fr-FR" sz="1000"/>
+              </a:p>
+            </p:txBody>
+          </p:sp>
+          <p:sp>
+            <p:nvSpPr>
+              <p:cNvPr id="74" name="Arc 73">
+                <a:extLst>
+                  <a:ext uri="{FF2B5EF4-FFF2-40B4-BE49-F238E27FC236}">
+                    <a16:creationId xmlns:a16="http://schemas.microsoft.com/office/drawing/2014/main" id="{D3FBED7B-77F6-F940-9F68-4EB2FE223F22}"/>
+                  </a:ext>
+                </a:extLst>
+              </p:cNvPr>
+              <p:cNvSpPr/>
+              <p:nvPr/>
+            </p:nvSpPr>
+            <p:spPr>
+              <a:xfrm rot="17674455">
+                <a:off x="3153747" y="2746715"/>
+                <a:ext cx="736611" cy="736611"/>
+              </a:xfrm>
+              <a:prstGeom prst="arc">
+                <a:avLst/>
+              </a:prstGeom>
+              <a:ln w="28575">
+                <a:solidFill>
+                  <a:schemeClr val="tx1"/>
+                </a:solidFill>
+              </a:ln>
+            </p:spPr>
+            <p:style>
+              <a:lnRef idx="1">
+                <a:schemeClr val="accent1"/>
+              </a:lnRef>
+              <a:fillRef idx="0">
+                <a:schemeClr val="accent1"/>
+              </a:fillRef>
+              <a:effectRef idx="0">
+                <a:schemeClr val="accent1"/>
+              </a:effectRef>
+              <a:fontRef idx="minor">
+                <a:schemeClr val="tx1"/>
+              </a:fontRef>
+            </p:style>
+            <p:txBody>
+              <a:bodyPr rtlCol="0" anchor="ctr"/>
+              <a:lstStyle/>
+              <a:p>
+                <a:pPr algn="ctr"/>
+                <a:endParaRPr lang="fr-FR" sz="1000"/>
+              </a:p>
+            </p:txBody>
+          </p:sp>
+        </p:grpSp>
+      </p:grpSp>
+      <p:sp>
+        <p:nvSpPr>
+          <p:cNvPr id="4" name="Espace réservé du numéro de diapositive 3">
+            <a:extLst>
+              <a:ext uri="{FF2B5EF4-FFF2-40B4-BE49-F238E27FC236}">
+                <a16:creationId xmlns:a16="http://schemas.microsoft.com/office/drawing/2014/main" id="{34DE762E-FF86-2A05-168C-F951A8341FE8}"/>
+              </a:ext>
+            </a:extLst>
+          </p:cNvPr>
+          <p:cNvSpPr>
+            <a:spLocks noGrp="1"/>
+          </p:cNvSpPr>
+          <p:nvPr>
+            <p:ph type="sldNum" sz="quarter" idx="4"/>
+          </p:nvPr>
+        </p:nvSpPr>
+        <p:spPr/>
+        <p:txBody>
+          <a:bodyPr/>
+          <a:lstStyle/>
+          <a:p>
+            <a:fld id="{33C783E2-4793-4F48-A271-51A73CC37D74}" type="slidenum">
+              <a:rPr lang="fr-FR" smtClean="0"/>
+              <a:t>32</a:t>
+            </a:fld>
+            <a:endParaRPr lang="fr-FR"/>
+          </a:p>
+        </p:txBody>
+      </p:sp>
+      <p:cxnSp>
+        <p:nvCxnSpPr>
+          <p:cNvPr id="6" name="Connecteur droit 5">
+            <a:extLst>
+              <a:ext uri="{FF2B5EF4-FFF2-40B4-BE49-F238E27FC236}">
+                <a16:creationId xmlns:a16="http://schemas.microsoft.com/office/drawing/2014/main" id="{819ACE9E-A4C1-C88B-3D4A-0D1F217A5B57}"/>
+              </a:ext>
+            </a:extLst>
+          </p:cNvPr>
+          <p:cNvCxnSpPr>
+            <a:cxnSpLocks/>
+            <a:stCxn id="41" idx="3"/>
+            <a:endCxn id="9" idx="1"/>
+          </p:cNvCxnSpPr>
+          <p:nvPr/>
+        </p:nvCxnSpPr>
+        <p:spPr>
+          <a:xfrm flipV="1">
+            <a:off x="4509180" y="4524801"/>
+            <a:ext cx="388754" cy="67197"/>
+          </a:xfrm>
+          <a:prstGeom prst="line">
+            <a:avLst/>
+          </a:prstGeom>
+          <a:ln>
+            <a:solidFill>
+              <a:schemeClr val="accent6"/>
+            </a:solidFill>
+          </a:ln>
+        </p:spPr>
+        <p:style>
+          <a:lnRef idx="1">
+            <a:schemeClr val="accent1"/>
+          </a:lnRef>
+          <a:fillRef idx="0">
+            <a:schemeClr val="accent1"/>
+          </a:fillRef>
+          <a:effectRef idx="0">
+            <a:schemeClr val="accent1"/>
+          </a:effectRef>
+          <a:fontRef idx="minor">
+            <a:schemeClr val="tx1"/>
+          </a:fontRef>
+        </p:style>
+      </p:cxnSp>
+      <p:sp>
+        <p:nvSpPr>
+          <p:cNvPr id="20" name="Repere de section"/>
+          <p:cNvSpPr txBox="1"/>
+          <p:nvPr/>
+        </p:nvSpPr>
+        <p:spPr>
+          <a:xfrm>
+            <a:off x="6583680" y="6382512"/>
+            <a:ext cx="4480560" cy="320040"/>
+          </a:xfrm>
+          <a:prstGeom prst="rect">
+            <a:avLst/>
+          </a:prstGeom>
+          <a:noFill/>
+        </p:spPr>
+        <p:txBody>
+          <a:bodyPr wrap="none" tIns="0" bIns="0">
+            <a:spAutoFit/>
+          </a:bodyPr>
+          <a:lstStyle/>
+          <a:p>
+            <a:pPr algn="r"/>
+            <a:r>
+              <a:rPr sz="1100">
+                <a:solidFill>
+                  <a:srgbClr val="BCBEC4"/>
+                </a:solidFill>
+              </a:rPr>
+              <a:t>FX1 · </a:t>
+            </a:r>
+            <a:r>
+              <a:rPr sz="1100" b="1">
+                <a:solidFill>
+                  <a:schemeClr val="accent4"/>
+                </a:solidFill>
+              </a:rPr>
+              <a:t>5. La propagation</a:t>
+            </a:r>
+          </a:p>
+        </p:txBody>
+      </p:sp>
+    </p:spTree>
+  </p:cSld>
+  <p:clrMapOvr>
+    <a:masterClrMapping/>
+  </p:clrMapOvr>
+  <p:timing>
+    <p:tnLst>
+      <p:par>
+        <p:cTn id="1" dur="indefinite" restart="never" nodeType="tmRoot">
+          <p:childTnLst>
+            <p:seq concurrent="1" nextAc="seek">
+              <p:cTn id="2" dur="indefinite" nodeType="mainSeq">
+                <p:childTnLst>
+                  <p:par>
+                    <p:cTn id="3" fill="hold">
+                      <p:stCondLst>
+                        <p:cond delay="indefinite"/>
+                        <p:cond evt="onBegin" delay="0">
+                          <p:tn val="2"/>
+                        </p:cond>
+                      </p:stCondLst>
+                      <p:childTnLst>
+                        <p:par>
+                          <p:cTn id="4" fill="hold">
+                            <p:stCondLst>
+                              <p:cond delay="0"/>
+                            </p:stCondLst>
+                            <p:childTnLst>
+                              <p:par>
+                                <p:cTn id="5" presetID="22" presetClass="entr" presetSubtype="8" fill="hold" grpId="0" nodeType="afterEffect">
+                                  <p:stCondLst>
+                                    <p:cond delay="0"/>
+                                  </p:stCondLst>
+                                  <p:childTnLst>
+                                    <p:set>
+                                      <p:cBhvr>
+                                        <p:cTn id="6" dur="1" fill="hold">
+                                          <p:stCondLst>
+                                            <p:cond delay="0"/>
+                                          </p:stCondLst>
+                                        </p:cTn>
+                                        <p:tgtEl>
+                                          <p:spTgt spid="66">
+                                            <p:txEl>
+                                              <p:pRg st="0" end="0"/>
+                                            </p:txEl>
+                                          </p:spTgt>
+                                        </p:tgtEl>
+                                        <p:attrNameLst>
+                                          <p:attrName>style.visibility</p:attrName>
+                                        </p:attrNameLst>
+                                      </p:cBhvr>
+                                      <p:to>
+                                        <p:strVal val="visible"/>
+                                      </p:to>
+                                    </p:set>
+                                    <p:animEffect transition="in" filter="wipe(left)">
+                                      <p:cBhvr>
+                                        <p:cTn id="7" dur="500"/>
+                                        <p:tgtEl>
+                                          <p:spTgt spid="66">
+                                            <p:txEl>
+                                              <p:pRg st="0" end="0"/>
+                                            </p:txEl>
+                                          </p:spTgt>
+                                        </p:tgtEl>
+                                      </p:cBhvr>
+                                    </p:animEffect>
+                                  </p:childTnLst>
+                                </p:cTn>
+                              </p:par>
+                            </p:childTnLst>
+                          </p:cTn>
+                        </p:par>
+                      </p:childTnLst>
+                    </p:cTn>
+                  </p:par>
+                  <p:par>
+                    <p:cTn id="8" fill="hold">
+                      <p:stCondLst>
+                        <p:cond delay="indefinite"/>
+                      </p:stCondLst>
+                      <p:childTnLst>
+                        <p:par>
+                          <p:cTn id="9" fill="hold">
+                            <p:stCondLst>
+                              <p:cond delay="0"/>
+                            </p:stCondLst>
+                            <p:childTnLst>
+                              <p:par>
+                                <p:cTn id="10" presetID="22" presetClass="entr" presetSubtype="8" fill="hold" grpId="0" nodeType="clickEffect">
+                                  <p:stCondLst>
+                                    <p:cond delay="500"/>
+                                  </p:stCondLst>
+                                  <p:childTnLst>
+                                    <p:set>
+                                      <p:cBhvr>
+                                        <p:cTn id="11" dur="1" fill="hold">
+                                          <p:stCondLst>
+                                            <p:cond delay="0"/>
+                                          </p:stCondLst>
+                                        </p:cTn>
+                                        <p:tgtEl>
+                                          <p:spTgt spid="66">
+                                            <p:txEl>
+                                              <p:pRg st="1" end="1"/>
+                                            </p:txEl>
+                                          </p:spTgt>
+                                        </p:tgtEl>
+                                        <p:attrNameLst>
+                                          <p:attrName>style.visibility</p:attrName>
+                                        </p:attrNameLst>
+                                      </p:cBhvr>
+                                      <p:to>
+                                        <p:strVal val="visible"/>
+                                      </p:to>
+                                    </p:set>
+                                    <p:animEffect transition="in" filter="wipe(left)">
+                                      <p:cBhvr>
+                                        <p:cTn id="12" dur="500"/>
+                                        <p:tgtEl>
+                                          <p:spTgt spid="66">
+                                            <p:txEl>
+                                              <p:pRg st="1" end="1"/>
+                                            </p:txEl>
+                                          </p:spTgt>
+                                        </p:tgtEl>
+                                      </p:cBhvr>
+                                    </p:animEffect>
+                                  </p:childTnLst>
+                                </p:cTn>
+                              </p:par>
+                            </p:childTnLst>
+                          </p:cTn>
+                        </p:par>
+                        <p:par>
+                          <p:cTn id="13" fill="hold">
+                            <p:stCondLst>
+                              <p:cond delay="1000"/>
+                            </p:stCondLst>
+                            <p:childTnLst>
+                              <p:par>
+                                <p:cTn id="14" presetID="22" presetClass="entr" presetSubtype="8" fill="hold" grpId="0" nodeType="afterEffect">
+                                  <p:stCondLst>
+                                    <p:cond delay="500"/>
+                                  </p:stCondLst>
+                                  <p:childTnLst>
+                                    <p:set>
+                                      <p:cBhvr>
+                                        <p:cTn id="15" dur="1" fill="hold">
+                                          <p:stCondLst>
+                                            <p:cond delay="0"/>
+                                          </p:stCondLst>
+                                        </p:cTn>
+                                        <p:tgtEl>
+                                          <p:spTgt spid="66">
+                                            <p:txEl>
+                                              <p:pRg st="2" end="2"/>
+                                            </p:txEl>
+                                          </p:spTgt>
+                                        </p:tgtEl>
+                                        <p:attrNameLst>
+                                          <p:attrName>style.visibility</p:attrName>
+                                        </p:attrNameLst>
+                                      </p:cBhvr>
+                                      <p:to>
+                                        <p:strVal val="visible"/>
+                                      </p:to>
+                                    </p:set>
+                                    <p:animEffect transition="in" filter="wipe(left)">
+                                      <p:cBhvr>
+                                        <p:cTn id="16" dur="500"/>
+                                        <p:tgtEl>
+                                          <p:spTgt spid="66">
+                                            <p:txEl>
+                                              <p:pRg st="2" end="2"/>
+                                            </p:txEl>
+                                          </p:spTgt>
+                                        </p:tgtEl>
+                                      </p:cBhvr>
+                                    </p:animEffect>
+                                  </p:childTnLst>
+                                </p:cTn>
+                              </p:par>
+                            </p:childTnLst>
+                          </p:cTn>
+                        </p:par>
+                      </p:childTnLst>
+                    </p:cTn>
+                  </p:par>
+                  <p:par>
+                    <p:cTn id="17" fill="hold">
+                      <p:stCondLst>
+                        <p:cond delay="indefinite"/>
+                      </p:stCondLst>
+                      <p:childTnLst>
+                        <p:par>
+                          <p:cTn id="18" fill="hold">
+                            <p:stCondLst>
+                              <p:cond delay="0"/>
+                            </p:stCondLst>
+                            <p:childTnLst>
+                              <p:par>
+                                <p:cTn id="19" presetID="22" presetClass="entr" presetSubtype="2" fill="hold" nodeType="clickEffect">
+                                  <p:stCondLst>
+                                    <p:cond delay="0"/>
+                                  </p:stCondLst>
+                                  <p:childTnLst>
+                                    <p:set>
+                                      <p:cBhvr>
+                                        <p:cTn id="20" dur="1" fill="hold">
+                                          <p:stCondLst>
+                                            <p:cond delay="0"/>
+                                          </p:stCondLst>
+                                        </p:cTn>
+                                        <p:tgtEl>
+                                          <p:spTgt spid="19"/>
+                                        </p:tgtEl>
+                                        <p:attrNameLst>
+                                          <p:attrName>style.visibility</p:attrName>
+                                        </p:attrNameLst>
+                                      </p:cBhvr>
+                                      <p:to>
+                                        <p:strVal val="visible"/>
+                                      </p:to>
+                                    </p:set>
+                                    <p:animEffect transition="in" filter="wipe(right)">
+                                      <p:cBhvr>
+                                        <p:cTn id="21" dur="500"/>
+                                        <p:tgtEl>
+                                          <p:spTgt spid="19"/>
+                                        </p:tgtEl>
+                                      </p:cBhvr>
+                                    </p:animEffect>
+                                  </p:childTnLst>
+                                </p:cTn>
+                              </p:par>
+                            </p:childTnLst>
+                          </p:cTn>
+                        </p:par>
+                        <p:par>
+                          <p:cTn id="22" fill="hold">
+                            <p:stCondLst>
+                              <p:cond delay="500"/>
+                            </p:stCondLst>
+                            <p:childTnLst>
+                              <p:par>
+                                <p:cTn id="23" presetID="22" presetClass="entr" presetSubtype="2" fill="hold" nodeType="afterEffect">
+                                  <p:stCondLst>
+                                    <p:cond delay="0"/>
+                                  </p:stCondLst>
+                                  <p:childTnLst>
+                                    <p:set>
+                                      <p:cBhvr>
+                                        <p:cTn id="24" dur="1" fill="hold">
+                                          <p:stCondLst>
+                                            <p:cond delay="0"/>
+                                          </p:stCondLst>
+                                        </p:cTn>
+                                        <p:tgtEl>
+                                          <p:spTgt spid="16"/>
+                                        </p:tgtEl>
+                                        <p:attrNameLst>
+                                          <p:attrName>style.visibility</p:attrName>
+                                        </p:attrNameLst>
+                                      </p:cBhvr>
+                                      <p:to>
+                                        <p:strVal val="visible"/>
+                                      </p:to>
+                                    </p:set>
+                                    <p:animEffect transition="in" filter="wipe(right)">
+                                      <p:cBhvr>
+                                        <p:cTn id="25" dur="500"/>
+                                        <p:tgtEl>
+                                          <p:spTgt spid="16"/>
+                                        </p:tgtEl>
+                                      </p:cBhvr>
+                                    </p:animEffect>
+                                  </p:childTnLst>
+                                </p:cTn>
+                              </p:par>
+                            </p:childTnLst>
+                          </p:cTn>
+                        </p:par>
+                        <p:par>
+                          <p:cTn id="26" fill="hold">
+                            <p:stCondLst>
+                              <p:cond delay="1000"/>
+                            </p:stCondLst>
+                            <p:childTnLst>
+                              <p:par>
+                                <p:cTn id="27" presetID="12" presetClass="entr" presetSubtype="1" fill="hold" grpId="0" nodeType="afterEffect">
+                                  <p:stCondLst>
+                                    <p:cond delay="0"/>
+                                  </p:stCondLst>
+                                  <p:childTnLst>
+                                    <p:set>
+                                      <p:cBhvr>
+                                        <p:cTn id="28" dur="1" fill="hold">
+                                          <p:stCondLst>
+                                            <p:cond delay="0"/>
+                                          </p:stCondLst>
+                                        </p:cTn>
+                                        <p:tgtEl>
+                                          <p:spTgt spid="21"/>
+                                        </p:tgtEl>
+                                        <p:attrNameLst>
+                                          <p:attrName>style.visibility</p:attrName>
+                                        </p:attrNameLst>
+                                      </p:cBhvr>
+                                      <p:to>
+                                        <p:strVal val="visible"/>
+                                      </p:to>
+                                    </p:set>
+                                    <p:anim calcmode="lin" valueType="num">
+                                      <p:cBhvr additive="base">
+                                        <p:cTn id="29" dur="500"/>
+                                        <p:tgtEl>
+                                          <p:spTgt spid="21"/>
+                                        </p:tgtEl>
+                                        <p:attrNameLst>
+                                          <p:attrName>ppt_y</p:attrName>
+                                        </p:attrNameLst>
+                                      </p:cBhvr>
+                                      <p:tavLst>
+                                        <p:tav tm="0">
+                                          <p:val>
+                                            <p:strVal val="#ppt_y-#ppt_h*1.125000"/>
+                                          </p:val>
+                                        </p:tav>
+                                        <p:tav tm="100000">
+                                          <p:val>
+                                            <p:strVal val="#ppt_y"/>
+                                          </p:val>
+                                        </p:tav>
+                                      </p:tavLst>
+                                    </p:anim>
+                                    <p:animEffect transition="in" filter="wipe(down)">
+                                      <p:cBhvr>
+                                        <p:cTn id="30" dur="500"/>
+                                        <p:tgtEl>
+                                          <p:spTgt spid="21"/>
+                                        </p:tgtEl>
+                                      </p:cBhvr>
+                                    </p:animEffect>
+                                  </p:childTnLst>
+                                </p:cTn>
+                              </p:par>
+                            </p:childTnLst>
+                          </p:cTn>
+                        </p:par>
+                      </p:childTnLst>
+                    </p:cTn>
+                  </p:par>
+                  <p:par>
+                    <p:cTn id="31" fill="hold">
+                      <p:stCondLst>
+                        <p:cond delay="indefinite"/>
+                      </p:stCondLst>
+                      <p:childTnLst>
+                        <p:par>
+                          <p:cTn id="32" fill="hold">
+                            <p:stCondLst>
+                              <p:cond delay="0"/>
+                            </p:stCondLst>
+                            <p:childTnLst>
+                              <p:par>
+                                <p:cTn id="33" presetID="22" presetClass="entr" presetSubtype="8" fill="hold" nodeType="clickEffect">
+                                  <p:stCondLst>
+                                    <p:cond delay="0"/>
+                                  </p:stCondLst>
+                                  <p:childTnLst>
+                                    <p:set>
+                                      <p:cBhvr>
+                                        <p:cTn id="34" dur="1" fill="hold">
+                                          <p:stCondLst>
+                                            <p:cond delay="0"/>
+                                          </p:stCondLst>
+                                        </p:cTn>
+                                        <p:tgtEl>
+                                          <p:spTgt spid="5"/>
+                                        </p:tgtEl>
+                                        <p:attrNameLst>
+                                          <p:attrName>style.visibility</p:attrName>
+                                        </p:attrNameLst>
+                                      </p:cBhvr>
+                                      <p:to>
+                                        <p:strVal val="visible"/>
+                                      </p:to>
+                                    </p:set>
+                                    <p:animEffect transition="in" filter="wipe(left)">
+                                      <p:cBhvr>
+                                        <p:cTn id="35" dur="500"/>
+                                        <p:tgtEl>
+                                          <p:spTgt spid="5"/>
+                                        </p:tgtEl>
+                                      </p:cBhvr>
+                                    </p:animEffect>
+                                  </p:childTnLst>
+                                </p:cTn>
+                              </p:par>
+                              <p:par>
+                                <p:cTn id="36" presetID="10" presetClass="entr" presetSubtype="0" fill="hold" nodeType="withEffect">
+                                  <p:stCondLst>
+                                    <p:cond delay="0"/>
+                                  </p:stCondLst>
+                                  <p:childTnLst>
+                                    <p:set>
+                                      <p:cBhvr>
+                                        <p:cTn id="37" dur="1" fill="hold">
+                                          <p:stCondLst>
+                                            <p:cond delay="0"/>
+                                          </p:stCondLst>
+                                        </p:cTn>
+                                        <p:tgtEl>
+                                          <p:spTgt spid="6"/>
+                                        </p:tgtEl>
+                                        <p:attrNameLst>
+                                          <p:attrName>style.visibility</p:attrName>
+                                        </p:attrNameLst>
+                                      </p:cBhvr>
+                                      <p:to>
+                                        <p:strVal val="visible"/>
+                                      </p:to>
+                                    </p:set>
+                                    <p:animEffect transition="in" filter="fade">
+                                      <p:cBhvr>
+                                        <p:cTn id="38" dur="500"/>
+                                        <p:tgtEl>
+                                          <p:spTgt spid="6"/>
+                                        </p:tgtEl>
+                                      </p:cBhvr>
+                                    </p:animEffect>
+                                  </p:childTnLst>
+                                </p:cTn>
+                              </p:par>
+                            </p:childTnLst>
+                          </p:cTn>
+                        </p:par>
+                        <p:par>
+                          <p:cTn id="39" fill="hold">
+                            <p:stCondLst>
+                              <p:cond delay="500"/>
+                            </p:stCondLst>
+                            <p:childTnLst>
+                              <p:par>
+                                <p:cTn id="40" presetID="12" presetClass="entr" presetSubtype="1" fill="hold" grpId="0" nodeType="afterEffect">
+                                  <p:stCondLst>
+                                    <p:cond delay="0"/>
+                                  </p:stCondLst>
+                                  <p:childTnLst>
+                                    <p:set>
+                                      <p:cBhvr>
+                                        <p:cTn id="41" dur="1" fill="hold">
+                                          <p:stCondLst>
+                                            <p:cond delay="0"/>
+                                          </p:stCondLst>
+                                        </p:cTn>
+                                        <p:tgtEl>
+                                          <p:spTgt spid="44"/>
+                                        </p:tgtEl>
+                                        <p:attrNameLst>
+                                          <p:attrName>style.visibility</p:attrName>
+                                        </p:attrNameLst>
+                                      </p:cBhvr>
+                                      <p:to>
+                                        <p:strVal val="visible"/>
+                                      </p:to>
+                                    </p:set>
+                                    <p:anim calcmode="lin" valueType="num">
+                                      <p:cBhvr additive="base">
+                                        <p:cTn id="42" dur="500"/>
+                                        <p:tgtEl>
+                                          <p:spTgt spid="44"/>
+                                        </p:tgtEl>
+                                        <p:attrNameLst>
+                                          <p:attrName>ppt_y</p:attrName>
+                                        </p:attrNameLst>
+                                      </p:cBhvr>
+                                      <p:tavLst>
+                                        <p:tav tm="0">
+                                          <p:val>
+                                            <p:strVal val="#ppt_y-#ppt_h*1.125000"/>
+                                          </p:val>
+                                        </p:tav>
+                                        <p:tav tm="100000">
+                                          <p:val>
+                                            <p:strVal val="#ppt_y"/>
+                                          </p:val>
+                                        </p:tav>
+                                      </p:tavLst>
+                                    </p:anim>
+                                    <p:animEffect transition="in" filter="wipe(down)">
+                                      <p:cBhvr>
+                                        <p:cTn id="43" dur="500"/>
+                                        <p:tgtEl>
+                                          <p:spTgt spid="44"/>
+                                        </p:tgtEl>
+                                      </p:cBhvr>
+                                    </p:animEffect>
+                                  </p:childTnLst>
+                                </p:cTn>
+                              </p:par>
+                            </p:childTnLst>
+                          </p:cTn>
+                        </p:par>
+                      </p:childTnLst>
+                    </p:cTn>
+                  </p:par>
+                  <p:par>
+                    <p:cTn id="44" fill="hold">
+                      <p:stCondLst>
+                        <p:cond delay="indefinite"/>
+                      </p:stCondLst>
+                      <p:childTnLst>
+                        <p:par>
+                          <p:cTn id="45" fill="hold">
+                            <p:stCondLst>
+                              <p:cond delay="0"/>
+                            </p:stCondLst>
+                            <p:childTnLst>
+                              <p:par>
+                                <p:cTn id="46" presetID="1" presetClass="entr" presetSubtype="0" fill="hold" nodeType="clickEffect">
+                                  <p:stCondLst>
+                                    <p:cond delay="0"/>
+                                  </p:stCondLst>
+                                  <p:childTnLst>
+                                    <p:set>
+                                      <p:cBhvr>
+                                        <p:cTn id="47" dur="1" fill="hold">
+                                          <p:stCondLst>
+                                            <p:cond delay="0"/>
+                                          </p:stCondLst>
+                                        </p:cTn>
+                                        <p:tgtEl>
+                                          <p:spTgt spid="32"/>
+                                        </p:tgtEl>
+                                        <p:attrNameLst>
+                                          <p:attrName>style.visibility</p:attrName>
+                                        </p:attrNameLst>
+                                      </p:cBhvr>
+                                      <p:to>
+                                        <p:strVal val="visible"/>
+                                      </p:to>
+                                    </p:set>
+                                  </p:childTnLst>
+                                  <p:subTnLst>
+                                    <p:set>
+                                      <p:cBhvr override="childStyle">
+                                        <p:cTn dur="1" fill="hold" display="0" masterRel="nextClick" afterEffect="1"/>
+                                        <p:tgtEl>
+                                          <p:spTgt spid="32"/>
+                                        </p:tgtEl>
+                                        <p:attrNameLst>
+                                          <p:attrName>style.visibility</p:attrName>
+                                        </p:attrNameLst>
+                                      </p:cBhvr>
+                                      <p:to>
+                                        <p:strVal val="hidden"/>
+                                      </p:to>
+                                    </p:set>
+                                  </p:subTnLst>
+                                </p:cTn>
+                              </p:par>
+                              <p:par>
+                                <p:cTn id="48" presetID="0" presetClass="path" presetSubtype="0" accel="50000" decel="50000" fill="hold" nodeType="withEffect">
+                                  <p:stCondLst>
+                                    <p:cond delay="0"/>
+                                  </p:stCondLst>
+                                  <p:childTnLst>
+                                    <p:animMotion origin="layout" path="M -0.44322 -0.06482 C -0.4401 -0.02894 -0.42968 0.09884 -0.42447 0.15115 " pathEditMode="fixed" rAng="0" ptsTypes="AA">
+                                      <p:cBhvr>
+                                        <p:cTn id="49" dur="2000" fill="hold"/>
+                                        <p:tgtEl>
+                                          <p:spTgt spid="32"/>
+                                        </p:tgtEl>
+                                        <p:attrNameLst>
+                                          <p:attrName>ppt_x</p:attrName>
+                                          <p:attrName>ppt_y</p:attrName>
+                                        </p:attrNameLst>
+                                      </p:cBhvr>
+                                      <p:rCtr x="938" y="10787"/>
+                                    </p:animMotion>
+                                  </p:childTnLst>
+                                  <p:subTnLst>
+                                    <p:set>
+                                      <p:cBhvr override="childStyle">
+                                        <p:cTn dur="1" fill="hold" display="0" masterRel="nextClick" afterEffect="1"/>
+                                        <p:tgtEl>
+                                          <p:spTgt spid="32"/>
+                                        </p:tgtEl>
+                                        <p:attrNameLst>
+                                          <p:attrName>style.visibility</p:attrName>
+                                        </p:attrNameLst>
+                                      </p:cBhvr>
+                                      <p:to>
+                                        <p:strVal val="hidden"/>
+                                      </p:to>
+                                    </p:set>
+                                  </p:subTnLst>
+                                </p:cTn>
+                              </p:par>
+                            </p:childTnLst>
+                          </p:cTn>
+                        </p:par>
+                      </p:childTnLst>
+                    </p:cTn>
+                  </p:par>
+                  <p:par>
+                    <p:cTn id="50" fill="hold">
+                      <p:stCondLst>
+                        <p:cond delay="indefinite"/>
+                      </p:stCondLst>
+                      <p:childTnLst>
+                        <p:par>
+                          <p:cTn id="51" fill="hold">
+                            <p:stCondLst>
+                              <p:cond delay="0"/>
+                            </p:stCondLst>
+                            <p:childTnLst>
+                              <p:par>
+                                <p:cTn id="52" presetID="1" presetClass="entr" presetSubtype="0" fill="hold" nodeType="clickEffect">
+                                  <p:stCondLst>
+                                    <p:cond delay="0"/>
+                                  </p:stCondLst>
+                                  <p:childTnLst>
+                                    <p:set>
+                                      <p:cBhvr>
+                                        <p:cTn id="53" dur="1" fill="hold">
+                                          <p:stCondLst>
+                                            <p:cond delay="0"/>
+                                          </p:stCondLst>
+                                        </p:cTn>
+                                        <p:tgtEl>
+                                          <p:spTgt spid="45"/>
+                                        </p:tgtEl>
+                                        <p:attrNameLst>
+                                          <p:attrName>style.visibility</p:attrName>
+                                        </p:attrNameLst>
+                                      </p:cBhvr>
+                                      <p:to>
+                                        <p:strVal val="visible"/>
+                                      </p:to>
+                                    </p:set>
+                                  </p:childTnLst>
+                                </p:cTn>
+                              </p:par>
+                              <p:par>
+                                <p:cTn id="54" presetID="0" presetClass="path" presetSubtype="0" accel="50000" decel="50000" fill="hold" nodeType="withEffect">
+                                  <p:stCondLst>
+                                    <p:cond delay="0"/>
+                                  </p:stCondLst>
+                                  <p:childTnLst>
+                                    <p:animMotion origin="layout" path="M -0.42448 0.15115 C -0.41684 0.20138 -0.42084 0.19328 -0.41198 0.25231 C -0.39722 0.33865 -0.20851 0.43425 -0.05729 0.42986 C -0.0257 0.42777 -0.01893 0.39583 -0.0184 0.3956 " pathEditMode="fixed" rAng="0" ptsTypes="AAAA">
+                                      <p:cBhvr>
+                                        <p:cTn id="55" dur="2000" fill="hold"/>
+                                        <p:tgtEl>
+                                          <p:spTgt spid="45"/>
+                                        </p:tgtEl>
+                                        <p:attrNameLst>
+                                          <p:attrName>ppt_x</p:attrName>
+                                          <p:attrName>ppt_y</p:attrName>
+                                        </p:attrNameLst>
+                                      </p:cBhvr>
+                                      <p:rCtr x="20295" y="13935"/>
+                                    </p:animMotion>
+                                  </p:childTnLst>
+                                  <p:subTnLst>
+                                    <p:set>
+                                      <p:cBhvr override="childStyle">
+                                        <p:cTn dur="1" fill="hold" display="0" masterRel="nextClick" afterEffect="1"/>
+                                        <p:tgtEl>
+                                          <p:spTgt spid="45"/>
+                                        </p:tgtEl>
+                                        <p:attrNameLst>
+                                          <p:attrName>style.visibility</p:attrName>
+                                        </p:attrNameLst>
+                                      </p:cBhvr>
+                                      <p:to>
+                                        <p:strVal val="hidden"/>
+                                      </p:to>
+                                    </p:set>
+                                  </p:subTnLst>
+                                </p:cTn>
+                              </p:par>
+                            </p:childTnLst>
+                          </p:cTn>
+                        </p:par>
+                      </p:childTnLst>
+                    </p:cTn>
+                  </p:par>
+                  <p:par>
+                    <p:cTn id="56" fill="hold">
+                      <p:stCondLst>
+                        <p:cond delay="indefinite"/>
+                      </p:stCondLst>
+                      <p:childTnLst>
+                        <p:par>
+                          <p:cTn id="57" fill="hold">
+                            <p:stCondLst>
+                              <p:cond delay="0"/>
+                            </p:stCondLst>
+                            <p:childTnLst>
+                              <p:par>
+                                <p:cTn id="58" presetID="1" presetClass="entr" presetSubtype="0" fill="hold" nodeType="clickEffect">
+                                  <p:stCondLst>
+                                    <p:cond delay="0"/>
+                                  </p:stCondLst>
+                                  <p:childTnLst>
+                                    <p:set>
+                                      <p:cBhvr>
+                                        <p:cTn id="59" dur="1" fill="hold">
+                                          <p:stCondLst>
+                                            <p:cond delay="0"/>
+                                          </p:stCondLst>
+                                        </p:cTn>
+                                        <p:tgtEl>
+                                          <p:spTgt spid="69"/>
+                                        </p:tgtEl>
+                                        <p:attrNameLst>
+                                          <p:attrName>style.visibility</p:attrName>
+                                        </p:attrNameLst>
+                                      </p:cBhvr>
+                                      <p:to>
+                                        <p:strVal val="visible"/>
+                                      </p:to>
+                                    </p:set>
+                                  </p:childTnLst>
+                                </p:cTn>
+                              </p:par>
+                              <p:par>
+                                <p:cTn id="60" presetID="0" presetClass="path" presetSubtype="0" accel="50000" decel="50000" fill="hold" nodeType="withEffect">
+                                  <p:stCondLst>
+                                    <p:cond delay="0"/>
+                                  </p:stCondLst>
+                                  <p:childTnLst>
+                                    <p:animMotion origin="layout" path="M -0.01823 0.39746 C -0.01701 0.39398 -0.01892 0.32917 -0.01892 0.31551 " pathEditMode="fixed" rAng="0" ptsTypes="AA">
+                                      <p:cBhvr>
+                                        <p:cTn id="61" dur="2000" fill="hold"/>
+                                        <p:tgtEl>
+                                          <p:spTgt spid="69"/>
+                                        </p:tgtEl>
+                                        <p:attrNameLst>
+                                          <p:attrName>ppt_x</p:attrName>
+                                          <p:attrName>ppt_y</p:attrName>
+                                        </p:attrNameLst>
+                                      </p:cBhvr>
+                                      <p:rCtr x="-17" y="-4097"/>
+                                    </p:animMotion>
+                                  </p:childTnLst>
+                                  <p:subTnLst>
+                                    <p:set>
+                                      <p:cBhvr override="childStyle">
+                                        <p:cTn dur="1" fill="hold" display="0" masterRel="nextClick" afterEffect="1"/>
+                                        <p:tgtEl>
+                                          <p:spTgt spid="69"/>
+                                        </p:tgtEl>
+                                        <p:attrNameLst>
+                                          <p:attrName>style.visibility</p:attrName>
+                                        </p:attrNameLst>
+                                      </p:cBhvr>
+                                      <p:to>
+                                        <p:strVal val="hidden"/>
+                                      </p:to>
+                                    </p:set>
+                                  </p:subTnLst>
+                                </p:cTn>
+                              </p:par>
+                            </p:childTnLst>
+                          </p:cTn>
+                        </p:par>
+                      </p:childTnLst>
+                    </p:cTn>
+                  </p:par>
+                  <p:par>
+                    <p:cTn id="62" fill="hold">
+                      <p:stCondLst>
+                        <p:cond delay="indefinite"/>
+                      </p:stCondLst>
+                      <p:childTnLst>
+                        <p:par>
+                          <p:cTn id="63" fill="hold">
+                            <p:stCondLst>
+                              <p:cond delay="0"/>
+                            </p:stCondLst>
+                            <p:childTnLst>
+                              <p:par>
+                                <p:cTn id="64" presetID="1" presetClass="entr" presetSubtype="0" fill="hold" nodeType="clickEffect">
+                                  <p:stCondLst>
+                                    <p:cond delay="0"/>
+                                  </p:stCondLst>
+                                  <p:childTnLst>
+                                    <p:set>
+                                      <p:cBhvr>
+                                        <p:cTn id="65" dur="1" fill="hold">
+                                          <p:stCondLst>
+                                            <p:cond delay="0"/>
+                                          </p:stCondLst>
+                                        </p:cTn>
+                                        <p:tgtEl>
+                                          <p:spTgt spid="53"/>
+                                        </p:tgtEl>
+                                        <p:attrNameLst>
+                                          <p:attrName>style.visibility</p:attrName>
+                                        </p:attrNameLst>
+                                      </p:cBhvr>
+                                      <p:to>
+                                        <p:strVal val="visible"/>
+                                      </p:to>
+                                    </p:set>
+                                  </p:childTnLst>
+                                </p:cTn>
+                              </p:par>
+                              <p:par>
+                                <p:cTn id="66" presetID="0" presetClass="path" presetSubtype="0" accel="50000" decel="50000" fill="hold" nodeType="withEffect">
+                                  <p:stCondLst>
+                                    <p:cond delay="0"/>
+                                  </p:stCondLst>
+                                  <p:childTnLst>
+                                    <p:animMotion origin="layout" path="M -0.01892 0.3155 C -0.01388 0.20925 -0.02777 -0.0257 -0.02899 -0.06181 " pathEditMode="fixed" rAng="0" ptsTypes="AA">
+                                      <p:cBhvr>
+                                        <p:cTn id="67" dur="2000" fill="hold"/>
+                                        <p:tgtEl>
+                                          <p:spTgt spid="53"/>
+                                        </p:tgtEl>
+                                        <p:attrNameLst>
+                                          <p:attrName>ppt_x</p:attrName>
+                                          <p:attrName>ppt_y</p:attrName>
+                                        </p:attrNameLst>
+                                      </p:cBhvr>
+                                      <p:rCtr x="-451" y="-18866"/>
+                                    </p:animMotion>
+                                  </p:childTnLst>
+                                </p:cTn>
+                              </p:par>
+                            </p:childTnLst>
+                          </p:cTn>
+                        </p:par>
+                      </p:childTnLst>
+                    </p:cTn>
+                  </p:par>
+                </p:childTnLst>
+              </p:cTn>
+              <p:prevCondLst>
+                <p:cond evt="onPrev" delay="0">
+                  <p:tgtEl>
+                    <p:sldTgt/>
+                  </p:tgtEl>
+                </p:cond>
+              </p:prevCondLst>
+              <p:nextCondLst>
+                <p:cond evt="onNext" delay="0">
+                  <p:tgtEl>
+                    <p:sldTgt/>
+                  </p:tgtEl>
+                </p:cond>
+              </p:nextCondLst>
+            </p:seq>
+          </p:childTnLst>
+        </p:cTn>
+      </p:par>
+    </p:tnLst>
+    <p:bldLst>
+      <p:bldP spid="21" grpId="0" animBg="1"/>
+      <p:bldP spid="44" grpId="0" animBg="1"/>
+      <p:bldP spid="66" grpId="0" uiExpand="1" build="p"/>
+    </p:bldLst>
+  </p:timing>
+</p:sld>
+</file>
+
+<file path=ppt/slides/slide33.xml><?xml version="1.0" encoding="utf-8"?>
+<p:sld xmlns:a="http://schemas.openxmlformats.org/drawingml/2006/main" xmlns:r="http://schemas.openxmlformats.org/officeDocument/2006/relationships" xmlns:p="http://schemas.openxmlformats.org/presentationml/2006/main">
+  <p:cSld>
+    <p:spTree>
+      <p:nvGrpSpPr>
+        <p:cNvPr id="1" name=""/>
+        <p:cNvGrpSpPr/>
+        <p:nvPr/>
+      </p:nvGrpSpPr>
+      <p:grpSpPr>
+        <a:xfrm>
+          <a:off x="0" y="0"/>
+          <a:ext cx="0" cy="0"/>
+          <a:chOff x="0" y="0"/>
+          <a:chExt cx="0" cy="0"/>
+        </a:xfrm>
+      </p:grpSpPr>
+      <p:sp>
+        <p:nvSpPr>
           <p:cNvPr id="2" name="Title 1"/>
           <p:cNvSpPr>
             <a:spLocks noGrp="1"/>
@@ -20790,7 +29722,7 @@
           <a:p>
             <a:fld id="{33C783E2-4793-4F48-A271-51A73CC37D74}" type="slidenum">
               <a:rPr lang="fr-FR" smtClean="0"/>
-              <a:t>30</a:t>
+              <a:t>33</a:t>
             </a:fld>
             <a:endParaRPr lang="fr-FR"/>
           </a:p>
@@ -21758,7 +30690,7 @@
 </p:sld>
 </file>
 
-<file path=ppt/slides/slide31.xml><?xml version="1.0" encoding="utf-8"?>
+<file path=ppt/slides/slide34.xml><?xml version="1.0" encoding="utf-8"?>
 <p:sld xmlns:a="http://schemas.openxmlformats.org/drawingml/2006/main" xmlns:r="http://schemas.openxmlformats.org/officeDocument/2006/relationships" xmlns:p="http://schemas.openxmlformats.org/presentationml/2006/main">
   <p:cSld>
     <p:spTree>
@@ -22105,7 +31037,7 @@
           <a:p>
             <a:fld id="{33C783E2-4793-4F48-A271-51A73CC37D74}" type="slidenum">
               <a:rPr lang="fr-FR" smtClean="0"/>
-              <a:t>31</a:t>
+              <a:t>34</a:t>
             </a:fld>
             <a:endParaRPr lang="fr-FR"/>
           </a:p>
@@ -22247,7 +31179,7 @@
 </p:sld>
 </file>
 
-<file path=ppt/slides/slide32.xml><?xml version="1.0" encoding="utf-8"?>
+<file path=ppt/slides/slide35.xml><?xml version="1.0" encoding="utf-8"?>
 <p:sld xmlns:a="http://schemas.openxmlformats.org/drawingml/2006/main" xmlns:r="http://schemas.openxmlformats.org/officeDocument/2006/relationships" xmlns:p="http://schemas.openxmlformats.org/presentationml/2006/main">
   <p:cSld>
     <p:spTree>
@@ -22465,7 +31397,7 @@
           <a:p>
             <a:fld id="{33C783E2-4793-4F48-A271-51A73CC37D74}" type="slidenum">
               <a:rPr lang="fr-FR" smtClean="0"/>
-              <a:t>32</a:t>
+              <a:t>35</a:t>
             </a:fld>
             <a:endParaRPr lang="fr-FR"/>
           </a:p>
@@ -22521,7 +31453,7 @@
 </p:sld>
 </file>
 
-<file path=ppt/slides/slide33.xml><?xml version="1.0" encoding="utf-8"?>
+<file path=ppt/slides/slide36.xml><?xml version="1.0" encoding="utf-8"?>
 <p:sld xmlns:a="http://schemas.openxmlformats.org/drawingml/2006/main" xmlns:r="http://schemas.openxmlformats.org/officeDocument/2006/relationships" xmlns:p="http://schemas.openxmlformats.org/presentationml/2006/main">
   <p:cSld>
     <p:spTree>
@@ -22744,7 +31676,7 @@
           <a:p>
             <a:fld id="{33C783E2-4793-4F48-A271-51A73CC37D74}" type="slidenum">
               <a:rPr lang="fr-FR" smtClean="0"/>
-              <a:t>33</a:t>
+              <a:t>36</a:t>
             </a:fld>
             <a:endParaRPr lang="fr-FR"/>
           </a:p>

--- a/_slides/remanies/14. FX1_slides.pptx
+++ b/_slides/remanies/14. FX1_slides.pptx
@@ -1184,6 +1184,12 @@
               <a:t>D'autres contrôles, la case à cocher et le curseur, attendront le deck suivant, qui en a besoin.</a:t>
             </a:r>
           </a:p>
+          <a:p>
+            <a:r>
+              <a:rPr lang="fr-BE" dirty="0"/>
+              <a:t>Le code complet, à lancer : demos, classe demo.fx.slides.fx1.LanceurInterrupteur.</a:t>
+            </a:r>
+          </a:p>
         </p:txBody>
       </p:sp>
       <p:sp>
@@ -1528,6 +1534,12 @@
               <a:t> est reçu, même si on ne s'en sert pas ici.</a:t>
             </a:r>
           </a:p>
+          <a:p>
+            <a:r>
+              <a:rPr lang="fr-BE" dirty="0"/>
+              <a:t>Le code complet, à lancer : demos, classe demo.fx.slides.fx1.LanceurInterrupteur.</a:t>
+            </a:r>
+          </a:p>
         </p:txBody>
       </p:sp>
       <p:sp>
@@ -1644,6 +1656,12 @@
               <a:t>C'est aussi une question d'examen classique : activer un bouton et en désactiver un autre, en ajoutant et retirant leurs gestionnaires.</a:t>
             </a:r>
           </a:p>
+          <a:p>
+            <a:r>
+              <a:rPr lang="fr-BE" dirty="0"/>
+              <a:t>Le code complet, à lancer : demos, classe demo.fx.slides.fx1.LanceurInterrupteur.</a:t>
+            </a:r>
+          </a:p>
         </p:txBody>
       </p:sp>
       <p:sp>
@@ -2098,6 +2116,12 @@
               <a:t>.</a:t>
             </a:r>
           </a:p>
+          <a:p>
+            <a:r>
+              <a:rPr lang="fr-BE" dirty="0"/>
+              <a:t>Le code complet, à lancer : demos, classe demo.fx.slides.fx1.LanceurInterrupteur.</a:t>
+            </a:r>
+          </a:p>
         </p:txBody>
       </p:sp>
       <p:sp>
@@ -2720,6 +2744,12 @@
               <a:t> vide dit explicitement que les autres touches ne font rien.</a:t>
             </a:r>
           </a:p>
+          <a:p>
+            <a:r>
+              <a:rPr lang="fr-BE" dirty="0"/>
+              <a:t>Le code complet, à lancer : demos, classe demo.fx.slides.fx1.LanceurClavierEtSouris.</a:t>
+            </a:r>
+          </a:p>
         </p:txBody>
       </p:sp>
       <p:sp>
@@ -2876,6 +2906,12 @@
               <a:t> ne survient qu'à la souris. Quand un énoncé demande d'utiliser le clic de souris comme déclencheur, c'est le second qu'il attend.</a:t>
             </a:r>
           </a:p>
+          <a:p>
+            <a:r>
+              <a:rPr lang="fr-BE" dirty="0"/>
+              <a:t>Le code complet, à lancer : demos, classe demo.fx.slides.fx1.LanceurClavierEtSouris.</a:t>
+            </a:r>
+          </a:p>
         </p:txBody>
       </p:sp>
       <p:sp>
@@ -3642,6 +3678,12 @@
               <a:t> arrête le voyage d'un nœud au suivant ; il n'empêche pas les autres gestionnaires posés sur le même nœud de s'exécuter.</a:t>
             </a:r>
           </a:p>
+          <a:p>
+            <a:r>
+              <a:rPr lang="fr-BE" dirty="0"/>
+              <a:t>Le code complet, à lancer : demos, classe demo.fx.slides.fx1.LanceurClavierEtSouris.</a:t>
+            </a:r>
+          </a:p>
         </p:txBody>
       </p:sp>
       <p:sp>
@@ -4054,6 +4096,12 @@
               <a:t>Vous n'avez rien à écrire dans ces classes. Elles sont fournies.</a:t>
             </a:r>
           </a:p>
+          <a:p>
+            <a:r>
+              <a:rPr lang="fr-BE" dirty="0"/>
+              <a:t>Le code complet, à lancer : demos, classe demo.fx.slides.fx1.LanceurLampe.</a:t>
+            </a:r>
+          </a:p>
         </p:txBody>
       </p:sp>
       <p:sp>
@@ -4348,6 +4396,12 @@
               <a:t> se termine en quelques millisecondes, mais la fenêtre reste ouverte et le programme continue de tourner. Ce qu'il fait pendant ce temps est le sujet de la section suivante.</a:t>
             </a:r>
           </a:p>
+          <a:p>
+            <a:r>
+              <a:rPr lang="fr-BE" dirty="0"/>
+              <a:t>Le code complet, à lancer : demos, classe demo.fx.slides.fx1.LanceurLampe.</a:t>
+            </a:r>
+          </a:p>
         </p:txBody>
       </p:sp>
       <p:sp>
@@ -4429,6 +4483,12 @@
             <a:r>
               <a:rPr lang="fr-BE" dirty="0"/>
               <a:t>Pour afficher plusieurs composants, on les range donc dans un conteneur, qui devient la racine. La slide suivante construit cet empilement en code.</a:t>
+            </a:r>
+          </a:p>
+          <a:p>
+            <a:r>
+              <a:rPr lang="fr-BE" dirty="0"/>
+              <a:t>Le code complet, à lancer : demos, classe demo.fx.slides.fx1.LanceurInterrupteur.</a:t>
             </a:r>
           </a:p>
         </p:txBody>
@@ -7796,6 +7856,7 @@
           </a:p>
           <a:p>
             <a:r>
+              <a:rPr/>
               <a:t>Une fenêtre qui réagit</a:t>
             </a:r>
           </a:p>
@@ -8633,7 +8694,7 @@
                     <a:schemeClr val="accent4"/>
                   </a:solidFill>
                 </a:rPr>
-                <a:t>noeuds</a:t>
+                <a:t>nœuds</a:t>
               </a:r>
               <a:endParaRPr lang="fr-FR" dirty="0">
                 <a:solidFill>
@@ -9143,7 +9204,7 @@
                     <a:schemeClr val="accent4"/>
                   </a:solidFill>
                 </a:rPr>
-                <a:t>Ajout d’un enfant après-coup</a:t>
+                <a:t>Ajout d’un enfant après coup</a:t>
               </a:r>
             </a:p>
           </p:txBody>
@@ -22192,7 +22253,7 @@
                       </a:outerShdw>
                     </a:effectLst>
                   </a:rPr>
-                  <a:t>Evénement</a:t>
+                  <a:t>Événement</a:t>
                 </a:r>
               </a:p>
             </p:txBody>
@@ -24382,7 +24443,7 @@
                       </a:outerShdw>
                     </a:effectLst>
                   </a:rPr>
-                  <a:t>Evénement</a:t>
+                  <a:t>Événement</a:t>
                 </a:r>
               </a:p>
             </p:txBody>
@@ -26688,7 +26749,7 @@
                       </a:outerShdw>
                     </a:effectLst>
                   </a:rPr>
-                  <a:t>Evénement</a:t>
+                  <a:t>Événement</a:t>
                 </a:r>
               </a:p>
             </p:txBody>
@@ -27227,7 +27288,7 @@
                       </a:outerShdw>
                     </a:effectLst>
                   </a:rPr>
-                  <a:t>Evénement</a:t>
+                  <a:t>Événement</a:t>
                 </a:r>
               </a:p>
             </p:txBody>
@@ -27766,7 +27827,7 @@
                       </a:outerShdw>
                     </a:effectLst>
                   </a:rPr>
-                  <a:t>Evénement</a:t>
+                  <a:t>Événement</a:t>
                 </a:r>
               </a:p>
             </p:txBody>
@@ -28404,7 +28465,7 @@
                       </a:outerShdw>
                     </a:effectLst>
                   </a:rPr>
-                  <a:t>Evénement</a:t>
+                  <a:t>Événement</a:t>
                 </a:r>
               </a:p>
             </p:txBody>

--- a/_slides/remanies/14. FX1_slides.pptx
+++ b/_slides/remanies/14. FX1_slides.pptx
@@ -4476,7 +4476,7 @@
           <a:p>
             <a:r>
               <a:rPr lang="fr-BE" dirty="0"/>
-              <a:t>L'image se lit de bas en haut. La fenêtre, le Stage, est fournie par JavaFX. Elle affiche une scène, la Scene. La scène n'accepte qu'un nœud, sa racine. Et cette racine porte tous les autres nœuds : ce sont eux qu'on voit.</a:t>
+              <a:t>L'image se lit de bas en haut. La fenêtre, le Stage, est fournie par JavaFX. Elle affiche une scène, la Scene. La scène n'accepte qu'un nœud, sa racine. Et cette racine contient tous les autres nœuds : ce sont eux qu'on voit.</a:t>
             </a:r>
           </a:p>
           <a:p>
@@ -7996,7 +7996,7 @@
             </a:r>
             <a:r>
               <a:rPr sz="2400" dirty="0"/>
-              <a:t> rend la liste des enfants : on peut y ajouter après coup</a:t>
+              <a:t> retourne la liste des enfants : on peut y ajouter après coup</a:t>
             </a:r>
           </a:p>
         </p:txBody>
